--- a/FIM_BookJ3_Lecture_Script_V6-01062026SHY-TE.pptx
+++ b/FIM_BookJ3_Lecture_Script_V6-01062026SHY-TE.pptx
@@ -8,6 +8,7 @@
     <p:sldId id="256" r:id="rId7"/>
     <p:sldId id="257" r:id="rId8"/>
     <p:sldId id="258" r:id="rId9"/>
+    <p:sldId id="259" r:id="rId10"/>
   </p:sldIdLst>
   <p:sldSz cx="12188952" cy="6858000" type="screen4x3"/>
   <p:notesSz cx="6858000" cy="9144000"/>
@@ -3142,13 +3143,13 @@
         <p:spPr>
           <a:xfrm>
             <a:off x="0" y="0"/>
-            <a:ext cx="12188952" cy="2377440"/>
+            <a:ext cx="12188952" cy="2286000"/>
           </a:xfrm>
           <a:prstGeom prst="rect">
             <a:avLst/>
           </a:prstGeom>
           <a:solidFill>
-            <a:srgbClr val="005050"/>
+            <a:srgbClr val="005555"/>
           </a:solidFill>
           <a:ln>
             <a:noFill/>
@@ -3184,14 +3185,14 @@
         </p:nvSpPr>
         <p:spPr>
           <a:xfrm>
-            <a:off x="0" y="2331720"/>
-            <a:ext cx="12188952" cy="91440"/>
+            <a:off x="0" y="2267712"/>
+            <a:ext cx="12188952" cy="73152"/>
           </a:xfrm>
           <a:prstGeom prst="rect">
             <a:avLst/>
           </a:prstGeom>
           <a:solidFill>
-            <a:srgbClr val="C9A84C"/>
+            <a:srgbClr val="FF0000"/>
           </a:solidFill>
           <a:ln>
             <a:noFill/>
@@ -3221,14 +3222,57 @@
       </p:sp>
       <p:sp>
         <p:nvSpPr>
-          <p:cNvPr id="5" name="TextBox 4"/>
+          <p:cNvPr id="5" name="Rectangle 4"/>
+          <p:cNvSpPr/>
+          <p:nvPr/>
+        </p:nvSpPr>
+        <p:spPr>
+          <a:xfrm>
+            <a:off x="274320" y="109728"/>
+            <a:ext cx="2926080" cy="822960"/>
+          </a:xfrm>
+          <a:prstGeom prst="rect">
+            <a:avLst/>
+          </a:prstGeom>
+          <a:solidFill>
+            <a:srgbClr val="008080"/>
+          </a:solidFill>
+          <a:ln>
+            <a:noFill/>
+          </a:ln>
+        </p:spPr>
+        <p:style>
+          <a:lnRef idx="1">
+            <a:schemeClr val="accent1"/>
+          </a:lnRef>
+          <a:fillRef idx="3">
+            <a:schemeClr val="accent1"/>
+          </a:fillRef>
+          <a:effectRef idx="2">
+            <a:schemeClr val="accent1"/>
+          </a:effectRef>
+          <a:fontRef idx="minor">
+            <a:schemeClr val="lt1"/>
+          </a:fontRef>
+        </p:style>
+        <p:txBody>
+          <a:bodyPr rtlCol="0" anchor="ctr"/>
+          <a:lstStyle/>
+          <a:p>
+            <a:pPr algn="ctr"/>
+          </a:p>
+        </p:txBody>
+      </p:sp>
+      <p:sp>
+        <p:nvSpPr>
+          <p:cNvPr id="6" name="TextBox 5"/>
           <p:cNvSpPr txBox="1"/>
           <p:nvPr/>
         </p:nvSpPr>
         <p:spPr>
           <a:xfrm>
-            <a:off x="365760" y="182880"/>
-            <a:ext cx="3657600" cy="365760"/>
+            <a:off x="320040" y="118872"/>
+            <a:ext cx="1097280" cy="804672"/>
           </a:xfrm>
           <a:prstGeom prst="rect">
             <a:avLst/>
@@ -3243,26 +3287,137 @@
           <a:p>
             <a:pPr algn="l"/>
             <a:r>
-              <a:rPr sz="1000" b="1" i="0">
+              <a:rPr sz="3600" b="1" i="0">
                 <a:solidFill>
-                  <a:srgbClr val="C9A84C"/>
+                  <a:srgbClr val="FFFFFF"/>
                 </a:solidFill>
               </a:rPr>
-              <a:t>BOOK J3 · Journée 3</a:t>
-            </a:r>
-          </a:p>
-        </p:txBody>
-      </p:sp>
-      <p:sp>
-        <p:nvSpPr>
-          <p:cNvPr id="6" name="TextBox 5"/>
+              <a:t>SHY</a:t>
+            </a:r>
+          </a:p>
+        </p:txBody>
+      </p:sp>
+      <p:sp>
+        <p:nvSpPr>
+          <p:cNvPr id="7" name="TextBox 6"/>
           <p:cNvSpPr txBox="1"/>
           <p:nvPr/>
         </p:nvSpPr>
         <p:spPr>
           <a:xfrm>
-            <a:off x="457200" y="502920"/>
-            <a:ext cx="11247120" cy="1371600"/>
+            <a:off x="1371600" y="347472"/>
+            <a:ext cx="1828800" cy="411480"/>
+          </a:xfrm>
+          <a:prstGeom prst="rect">
+            <a:avLst/>
+          </a:prstGeom>
+          <a:noFill/>
+        </p:spPr>
+        <p:txBody>
+          <a:bodyPr wrap="square">
+            <a:spAutoFit/>
+          </a:bodyPr>
+          <a:lstStyle/>
+          <a:p>
+            <a:pPr algn="l"/>
+            <a:r>
+              <a:rPr sz="1400" b="1" i="0">
+                <a:solidFill>
+                  <a:srgbClr val="FFFFFF"/>
+                </a:solidFill>
+              </a:rPr>
+              <a:t>Performance</a:t>
+            </a:r>
+          </a:p>
+        </p:txBody>
+      </p:sp>
+      <p:sp>
+        <p:nvSpPr>
+          <p:cNvPr id="8" name="Rectangle 7"/>
+          <p:cNvSpPr/>
+          <p:nvPr/>
+        </p:nvSpPr>
+        <p:spPr>
+          <a:xfrm>
+            <a:off x="3337560" y="164592"/>
+            <a:ext cx="36576" cy="658368"/>
+          </a:xfrm>
+          <a:prstGeom prst="rect">
+            <a:avLst/>
+          </a:prstGeom>
+          <a:solidFill>
+            <a:srgbClr val="FF0000"/>
+          </a:solidFill>
+          <a:ln>
+            <a:noFill/>
+          </a:ln>
+        </p:spPr>
+        <p:style>
+          <a:lnRef idx="1">
+            <a:schemeClr val="accent1"/>
+          </a:lnRef>
+          <a:fillRef idx="3">
+            <a:schemeClr val="accent1"/>
+          </a:fillRef>
+          <a:effectRef idx="2">
+            <a:schemeClr val="accent1"/>
+          </a:effectRef>
+          <a:fontRef idx="minor">
+            <a:schemeClr val="lt1"/>
+          </a:fontRef>
+        </p:style>
+        <p:txBody>
+          <a:bodyPr rtlCol="0" anchor="ctr"/>
+          <a:lstStyle/>
+          <a:p>
+            <a:pPr algn="ctr"/>
+          </a:p>
+        </p:txBody>
+      </p:sp>
+      <p:sp>
+        <p:nvSpPr>
+          <p:cNvPr id="9" name="TextBox 8"/>
+          <p:cNvSpPr txBox="1"/>
+          <p:nvPr/>
+        </p:nvSpPr>
+        <p:spPr>
+          <a:xfrm>
+            <a:off x="3474720" y="164592"/>
+            <a:ext cx="8503920" cy="347472"/>
+          </a:xfrm>
+          <a:prstGeom prst="rect">
+            <a:avLst/>
+          </a:prstGeom>
+          <a:noFill/>
+        </p:spPr>
+        <p:txBody>
+          <a:bodyPr wrap="square">
+            <a:spAutoFit/>
+          </a:bodyPr>
+          <a:lstStyle/>
+          <a:p>
+            <a:pPr algn="l"/>
+            <a:r>
+              <a:rPr sz="900" b="1" i="0">
+                <a:solidFill>
+                  <a:srgbClr val="BBEEEE"/>
+                </a:solidFill>
+              </a:rPr>
+              <a:t>BOOK J3  ·  Journée 3  ·  Discours &amp; Storytelling</a:t>
+            </a:r>
+          </a:p>
+        </p:txBody>
+      </p:sp>
+      <p:sp>
+        <p:nvSpPr>
+          <p:cNvPr id="10" name="TextBox 9"/>
+          <p:cNvSpPr txBox="1"/>
+          <p:nvPr/>
+        </p:nvSpPr>
+        <p:spPr>
+          <a:xfrm>
+            <a:off x="320040" y="960120"/>
+            <a:ext cx="11521440" cy="1143000"/>
           </a:xfrm>
           <a:prstGeom prst="rect">
             <a:avLst/>
@@ -3282,21 +3437,21 @@
                   <a:srgbClr val="FFFFFF"/>
                 </a:solidFill>
               </a:rPr>
-              <a:t>Lecture &amp; Script</a:t>
-            </a:r>
-          </a:p>
-        </p:txBody>
-      </p:sp>
-      <p:sp>
-        <p:nvSpPr>
-          <p:cNvPr id="7" name="TextBox 6"/>
+              <a:t>Votre Script de Présentation</a:t>
+            </a:r>
+          </a:p>
+        </p:txBody>
+      </p:sp>
+      <p:sp>
+        <p:nvSpPr>
+          <p:cNvPr id="11" name="TextBox 10"/>
           <p:cNvSpPr txBox="1"/>
           <p:nvPr/>
         </p:nvSpPr>
         <p:spPr>
           <a:xfrm>
-            <a:off x="457200" y="1828800"/>
-            <a:ext cx="11247120" cy="502920"/>
+            <a:off x="320040" y="1920240"/>
+            <a:ext cx="11521440" cy="347472"/>
           </a:xfrm>
           <a:prstGeom prst="rect">
             <a:avLst/>
@@ -3311,26 +3466,69 @@
           <a:p>
             <a:pPr algn="l"/>
             <a:r>
-              <a:rPr sz="1300" b="0" i="1">
+              <a:rPr sz="1200" b="0" i="1">
                 <a:solidFill>
-                  <a:srgbClr val="DDEEEE"/>
+                  <a:srgbClr val="CCEEEE"/>
                 </a:solidFill>
               </a:rPr>
-              <a:t>Maîtrise du discours commercial-humanitaire · Les 5 étapes · Storytelling</a:t>
-            </a:r>
-          </a:p>
-        </p:txBody>
-      </p:sp>
-      <p:sp>
-        <p:nvSpPr>
-          <p:cNvPr id="8" name="TextBox 7"/>
-          <p:cNvSpPr txBox="1"/>
+              <a:t>Les 5 étapes pour convaincre un donateur français avec authenticité</a:t>
+            </a:r>
+          </a:p>
+        </p:txBody>
+      </p:sp>
+      <p:sp>
+        <p:nvSpPr>
+          <p:cNvPr id="12" name="Rectangle 11"/>
+          <p:cNvSpPr/>
           <p:nvPr/>
         </p:nvSpPr>
         <p:spPr>
           <a:xfrm>
             <a:off x="0" y="6492240"/>
             <a:ext cx="12188952" cy="365760"/>
+          </a:xfrm>
+          <a:prstGeom prst="rect">
+            <a:avLst/>
+          </a:prstGeom>
+          <a:solidFill>
+            <a:srgbClr val="005555"/>
+          </a:solidFill>
+          <a:ln>
+            <a:noFill/>
+          </a:ln>
+        </p:spPr>
+        <p:style>
+          <a:lnRef idx="1">
+            <a:schemeClr val="accent1"/>
+          </a:lnRef>
+          <a:fillRef idx="3">
+            <a:schemeClr val="accent1"/>
+          </a:fillRef>
+          <a:effectRef idx="2">
+            <a:schemeClr val="accent1"/>
+          </a:effectRef>
+          <a:fontRef idx="minor">
+            <a:schemeClr val="lt1"/>
+          </a:fontRef>
+        </p:style>
+        <p:txBody>
+          <a:bodyPr rtlCol="0" anchor="ctr"/>
+          <a:lstStyle/>
+          <a:p>
+            <a:pPr algn="ctr"/>
+          </a:p>
+        </p:txBody>
+      </p:sp>
+      <p:sp>
+        <p:nvSpPr>
+          <p:cNvPr id="13" name="TextBox 12"/>
+          <p:cNvSpPr txBox="1"/>
+          <p:nvPr/>
+        </p:nvSpPr>
+        <p:spPr>
+          <a:xfrm>
+            <a:off x="0" y="6519672"/>
+            <a:ext cx="12188952" cy="274320"/>
           </a:xfrm>
           <a:prstGeom prst="rect">
             <a:avLst/>
@@ -3347,10 +3545,46 @@
             <a:r>
               <a:rPr sz="900" b="0" i="0">
                 <a:solidFill>
-                  <a:srgbClr val="888888"/>
+                  <a:srgbClr val="FFFFFF"/>
                 </a:solidFill>
               </a:rPr>
-              <a:t>SHY-Performance · V6-01062026SHY-TE · Référentiel UM6P/CMC 2025</a:t>
+              <a:t>SHY-Performance  ·  Formation FIM  ·  V6-01062026SHY-TE</a:t>
+            </a:r>
+          </a:p>
+        </p:txBody>
+      </p:sp>
+      <p:sp>
+        <p:nvSpPr>
+          <p:cNvPr id="14" name="TextBox 13"/>
+          <p:cNvSpPr txBox="1"/>
+          <p:nvPr/>
+        </p:nvSpPr>
+        <p:spPr>
+          <a:xfrm>
+            <a:off x="457200" y="2514600"/>
+            <a:ext cx="11247120" cy="1051560"/>
+          </a:xfrm>
+          <a:prstGeom prst="rect">
+            <a:avLst/>
+          </a:prstGeom>
+          <a:noFill/>
+        </p:spPr>
+        <p:txBody>
+          <a:bodyPr wrap="square">
+            <a:spAutoFit/>
+          </a:bodyPr>
+          <a:lstStyle/>
+          <a:p>
+            <a:pPr algn="l"/>
+            <a:r>
+              <a:rPr sz="1400" b="0" i="0">
+                <a:solidFill>
+                  <a:srgbClr val="1A1A1A"/>
+                </a:solidFill>
+              </a:rPr>
+              <a:t>Aujourd'hui vous allez construire votre propre version du script FIM.
+Vous ne le lirez pas — vous allez le vivre, le ressentir et le personnaliser
+pour qu'il sonne vrai à chaque rencontre.</a:t>
             </a:r>
           </a:p>
         </p:txBody>
@@ -3425,13 +3659,13 @@
         <p:spPr>
           <a:xfrm>
             <a:off x="0" y="0"/>
-            <a:ext cx="12188952" cy="685800"/>
+            <a:ext cx="12188952" cy="658368"/>
           </a:xfrm>
           <a:prstGeom prst="rect">
             <a:avLst/>
           </a:prstGeom>
           <a:solidFill>
-            <a:srgbClr val="005050"/>
+            <a:srgbClr val="005555"/>
           </a:solidFill>
           <a:ln>
             <a:noFill/>
@@ -3467,14 +3701,14 @@
         </p:nvSpPr>
         <p:spPr>
           <a:xfrm>
-            <a:off x="0" y="667512"/>
-            <a:ext cx="12188952" cy="36576"/>
+            <a:off x="0" y="640080"/>
+            <a:ext cx="12188952" cy="54864"/>
           </a:xfrm>
           <a:prstGeom prst="rect">
             <a:avLst/>
           </a:prstGeom>
           <a:solidFill>
-            <a:srgbClr val="C9A84C"/>
+            <a:srgbClr val="FF0000"/>
           </a:solidFill>
           <a:ln>
             <a:noFill/>
@@ -3510,8 +3744,8 @@
         </p:nvSpPr>
         <p:spPr>
           <a:xfrm>
-            <a:off x="274320" y="73152"/>
-            <a:ext cx="11612880" cy="566928"/>
+            <a:off x="164592" y="64008"/>
+            <a:ext cx="685800" cy="530352"/>
           </a:xfrm>
           <a:prstGeom prst="rect">
             <a:avLst/>
@@ -3526,66 +3760,32 @@
           <a:p>
             <a:pPr algn="l"/>
             <a:r>
-              <a:rPr sz="1800" b="1" i="0">
+              <a:rPr sz="2000" b="1" i="0">
                 <a:solidFill>
                   <a:srgbClr val="FFFFFF"/>
                 </a:solidFill>
               </a:rPr>
-              <a:t>Objectifs &amp; Séquence Kolb — Journée 3</a:t>
-            </a:r>
-          </a:p>
-        </p:txBody>
-      </p:sp>
-      <p:sp>
-        <p:nvSpPr>
-          <p:cNvPr id="6" name="TextBox 5"/>
-          <p:cNvSpPr txBox="1"/>
-          <p:nvPr/>
-        </p:nvSpPr>
-        <p:spPr>
-          <a:xfrm>
-            <a:off x="0" y="6492240"/>
-            <a:ext cx="12188952" cy="365760"/>
-          </a:xfrm>
-          <a:prstGeom prst="rect">
-            <a:avLst/>
-          </a:prstGeom>
-          <a:noFill/>
-        </p:spPr>
-        <p:txBody>
-          <a:bodyPr wrap="square">
-            <a:spAutoFit/>
-          </a:bodyPr>
-          <a:lstStyle/>
-          <a:p>
-            <a:pPr algn="ctr"/>
-            <a:r>
-              <a:rPr sz="800" b="0" i="0">
-                <a:solidFill>
-                  <a:srgbClr val="888888"/>
-                </a:solidFill>
-              </a:rPr>
-              <a:t>SHY-Performance · V6-01062026SHY-TE</a:t>
-            </a:r>
-          </a:p>
-        </p:txBody>
-      </p:sp>
-      <p:sp>
-        <p:nvSpPr>
-          <p:cNvPr id="7" name="Rectangle 6"/>
+              <a:t>SHY</a:t>
+            </a:r>
+          </a:p>
+        </p:txBody>
+      </p:sp>
+      <p:sp>
+        <p:nvSpPr>
+          <p:cNvPr id="6" name="Rectangle 5"/>
           <p:cNvSpPr/>
           <p:nvPr/>
         </p:nvSpPr>
         <p:spPr>
           <a:xfrm>
-            <a:off x="274320" y="868680"/>
-            <a:ext cx="5486400" cy="347472"/>
+            <a:off x="914400" y="91440"/>
+            <a:ext cx="36576" cy="475488"/>
           </a:xfrm>
           <a:prstGeom prst="rect">
             <a:avLst/>
           </a:prstGeom>
           <a:solidFill>
-            <a:srgbClr val="007A7A"/>
+            <a:srgbClr val="FF0000"/>
           </a:solidFill>
           <a:ln>
             <a:noFill/>
@@ -3615,14 +3815,14 @@
       </p:sp>
       <p:sp>
         <p:nvSpPr>
-          <p:cNvPr id="8" name="TextBox 7"/>
+          <p:cNvPr id="7" name="TextBox 6"/>
           <p:cNvSpPr txBox="1"/>
           <p:nvPr/>
         </p:nvSpPr>
         <p:spPr>
           <a:xfrm>
-            <a:off x="365760" y="905256"/>
-            <a:ext cx="5303520" cy="292608"/>
+            <a:off x="1024128" y="91440"/>
+            <a:ext cx="10881360" cy="475488"/>
           </a:xfrm>
           <a:prstGeom prst="rect">
             <a:avLst/>
@@ -3637,32 +3837,32 @@
           <a:p>
             <a:pPr algn="l"/>
             <a:r>
-              <a:rPr sz="1200" b="1" i="0">
+              <a:rPr sz="1700" b="1" i="0">
                 <a:solidFill>
                   <a:srgbClr val="FFFFFF"/>
                 </a:solidFill>
               </a:rPr>
-              <a:t>Objectifs V6 — Bloom Niv. 3–4</a:t>
-            </a:r>
-          </a:p>
-        </p:txBody>
-      </p:sp>
-      <p:sp>
-        <p:nvSpPr>
-          <p:cNvPr id="9" name="Rectangle 8"/>
+              <a:t>Journée 3 — Ce que vous allez vivre aujourd'hui</a:t>
+            </a:r>
+          </a:p>
+        </p:txBody>
+      </p:sp>
+      <p:sp>
+        <p:nvSpPr>
+          <p:cNvPr id="8" name="Rectangle 7"/>
           <p:cNvSpPr/>
           <p:nvPr/>
         </p:nvSpPr>
         <p:spPr>
           <a:xfrm>
-            <a:off x="6126480" y="868680"/>
-            <a:ext cx="5486400" cy="347472"/>
+            <a:off x="0" y="6492240"/>
+            <a:ext cx="12188952" cy="365760"/>
           </a:xfrm>
           <a:prstGeom prst="rect">
             <a:avLst/>
           </a:prstGeom>
           <a:solidFill>
-            <a:srgbClr val="007A7A"/>
+            <a:srgbClr val="005555"/>
           </a:solidFill>
           <a:ln>
             <a:noFill/>
@@ -3692,14 +3892,14 @@
       </p:sp>
       <p:sp>
         <p:nvSpPr>
-          <p:cNvPr id="10" name="TextBox 9"/>
+          <p:cNvPr id="9" name="TextBox 8"/>
           <p:cNvSpPr txBox="1"/>
           <p:nvPr/>
         </p:nvSpPr>
         <p:spPr>
           <a:xfrm>
-            <a:off x="6217920" y="905256"/>
-            <a:ext cx="5303520" cy="292608"/>
+            <a:off x="0" y="6519672"/>
+            <a:ext cx="12188952" cy="274320"/>
           </a:xfrm>
           <a:prstGeom prst="rect">
             <a:avLst/>
@@ -3712,340 +3912,34 @@
           </a:bodyPr>
           <a:lstStyle/>
           <a:p>
-            <a:pPr algn="l"/>
-            <a:r>
-              <a:rPr sz="1200" b="1" i="0">
+            <a:pPr algn="ctr"/>
+            <a:r>
+              <a:rPr sz="900" b="0" i="0">
                 <a:solidFill>
                   <a:srgbClr val="FFFFFF"/>
                 </a:solidFill>
               </a:rPr>
-              <a:t>Les 5 étapes du Script FIM V6</a:t>
-            </a:r>
-          </a:p>
-        </p:txBody>
-      </p:sp>
-      <p:sp>
-        <p:nvSpPr>
-          <p:cNvPr id="11" name="TextBox 10"/>
-          <p:cNvSpPr txBox="1"/>
-          <p:nvPr/>
-        </p:nvSpPr>
-        <p:spPr>
-          <a:xfrm>
-            <a:off x="365760" y="1280160"/>
-            <a:ext cx="5303520" cy="347472"/>
-          </a:xfrm>
-          <a:prstGeom prst="rect">
-            <a:avLst/>
-          </a:prstGeom>
-          <a:noFill/>
-        </p:spPr>
-        <p:txBody>
-          <a:bodyPr wrap="square">
-            <a:spAutoFit/>
-          </a:bodyPr>
-          <a:lstStyle/>
-          <a:p>
-            <a:pPr algn="l"/>
-            <a:r>
-              <a:rPr sz="1100" b="0" i="0">
-                <a:solidFill>
-                  <a:srgbClr val="1A1A1A"/>
-                </a:solidFill>
-              </a:rPr>
-              <a:t>• Utiliser les 5 étapes du script FIM dans l'ordre et avec naturel</a:t>
-            </a:r>
-          </a:p>
-        </p:txBody>
-      </p:sp>
-      <p:sp>
-        <p:nvSpPr>
-          <p:cNvPr id="12" name="TextBox 11"/>
-          <p:cNvSpPr txBox="1"/>
-          <p:nvPr/>
-        </p:nvSpPr>
-        <p:spPr>
-          <a:xfrm>
-            <a:off x="365760" y="1645919"/>
-            <a:ext cx="5303520" cy="347472"/>
-          </a:xfrm>
-          <a:prstGeom prst="rect">
-            <a:avLst/>
-          </a:prstGeom>
-          <a:noFill/>
-        </p:spPr>
-        <p:txBody>
-          <a:bodyPr wrap="square">
-            <a:spAutoFit/>
-          </a:bodyPr>
-          <a:lstStyle/>
-          <a:p>
-            <a:pPr algn="l"/>
-            <a:r>
-              <a:rPr sz="1100" b="0" i="0">
-                <a:solidFill>
-                  <a:srgbClr val="1A1A1A"/>
-                </a:solidFill>
-              </a:rPr>
-              <a:t>• Adapter le storytelling au profil du passant</a:t>
-            </a:r>
-          </a:p>
-        </p:txBody>
-      </p:sp>
-      <p:sp>
-        <p:nvSpPr>
-          <p:cNvPr id="13" name="TextBox 12"/>
-          <p:cNvSpPr txBox="1"/>
-          <p:nvPr/>
-        </p:nvSpPr>
-        <p:spPr>
-          <a:xfrm>
-            <a:off x="365760" y="2011679"/>
-            <a:ext cx="5303520" cy="347472"/>
-          </a:xfrm>
-          <a:prstGeom prst="rect">
-            <a:avLst/>
-          </a:prstGeom>
-          <a:noFill/>
-        </p:spPr>
-        <p:txBody>
-          <a:bodyPr wrap="square">
-            <a:spAutoFit/>
-          </a:bodyPr>
-          <a:lstStyle/>
-          <a:p>
-            <a:pPr algn="l"/>
-            <a:r>
-              <a:rPr sz="1100" b="0" i="0">
-                <a:solidFill>
-                  <a:srgbClr val="1A1A1A"/>
-                </a:solidFill>
-              </a:rPr>
-              <a:t>• Analyser sa propre performance via la grille d'observation</a:t>
-            </a:r>
-          </a:p>
-        </p:txBody>
-      </p:sp>
-      <p:sp>
-        <p:nvSpPr>
-          <p:cNvPr id="14" name="TextBox 13"/>
-          <p:cNvSpPr txBox="1"/>
-          <p:nvPr/>
-        </p:nvSpPr>
-        <p:spPr>
-          <a:xfrm>
-            <a:off x="365760" y="2377439"/>
-            <a:ext cx="5303520" cy="347472"/>
-          </a:xfrm>
-          <a:prstGeom prst="rect">
-            <a:avLst/>
-          </a:prstGeom>
-          <a:noFill/>
-        </p:spPr>
-        <p:txBody>
-          <a:bodyPr wrap="square">
-            <a:spAutoFit/>
-          </a:bodyPr>
-          <a:lstStyle/>
-          <a:p>
-            <a:pPr algn="l"/>
-            <a:r>
-              <a:rPr sz="1100" b="0" i="0">
-                <a:solidFill>
-                  <a:srgbClr val="1A1A1A"/>
-                </a:solidFill>
-              </a:rPr>
-              <a:t>• Démontrer une accroche naturelle en &lt; 15 secondes</a:t>
-            </a:r>
-          </a:p>
-        </p:txBody>
-      </p:sp>
-      <p:sp>
-        <p:nvSpPr>
-          <p:cNvPr id="15" name="TextBox 14"/>
-          <p:cNvSpPr txBox="1"/>
-          <p:nvPr/>
-        </p:nvSpPr>
-        <p:spPr>
-          <a:xfrm>
-            <a:off x="6217920" y="1280160"/>
-            <a:ext cx="5303520" cy="347472"/>
-          </a:xfrm>
-          <a:prstGeom prst="rect">
-            <a:avLst/>
-          </a:prstGeom>
-          <a:noFill/>
-        </p:spPr>
-        <p:txBody>
-          <a:bodyPr wrap="square">
-            <a:spAutoFit/>
-          </a:bodyPr>
-          <a:lstStyle/>
-          <a:p>
-            <a:pPr algn="l"/>
-            <a:r>
-              <a:rPr sz="1100" b="0" i="0">
-                <a:solidFill>
-                  <a:srgbClr val="1A1A1A"/>
-                </a:solidFill>
-              </a:rPr>
-              <a:t>• ① Accroche — contact visuel, sourire, question ouverte (10–15 sec)</a:t>
-            </a:r>
-          </a:p>
-        </p:txBody>
-      </p:sp>
-      <p:sp>
-        <p:nvSpPr>
-          <p:cNvPr id="16" name="TextBox 15"/>
-          <p:cNvSpPr txBox="1"/>
-          <p:nvPr/>
-        </p:nvSpPr>
-        <p:spPr>
-          <a:xfrm>
-            <a:off x="6217920" y="1645919"/>
-            <a:ext cx="5303520" cy="347472"/>
-          </a:xfrm>
-          <a:prstGeom prst="rect">
-            <a:avLst/>
-          </a:prstGeom>
-          <a:noFill/>
-        </p:spPr>
-        <p:txBody>
-          <a:bodyPr wrap="square">
-            <a:spAutoFit/>
-          </a:bodyPr>
-          <a:lstStyle/>
-          <a:p>
-            <a:pPr algn="l"/>
-            <a:r>
-              <a:rPr sz="1100" b="0" i="0">
-                <a:solidFill>
-                  <a:srgbClr val="1A1A1A"/>
-                </a:solidFill>
-              </a:rPr>
-              <a:t>• ② Mise en contexte — 'Je travaille avec l'UNICEF…' (20 sec)</a:t>
-            </a:r>
-          </a:p>
-        </p:txBody>
-      </p:sp>
-      <p:sp>
-        <p:nvSpPr>
-          <p:cNvPr id="17" name="TextBox 16"/>
-          <p:cNvSpPr txBox="1"/>
-          <p:nvPr/>
-        </p:nvSpPr>
-        <p:spPr>
-          <a:xfrm>
-            <a:off x="6217920" y="2011679"/>
-            <a:ext cx="5303520" cy="347472"/>
-          </a:xfrm>
-          <a:prstGeom prst="rect">
-            <a:avLst/>
-          </a:prstGeom>
-          <a:noFill/>
-        </p:spPr>
-        <p:txBody>
-          <a:bodyPr wrap="square">
-            <a:spAutoFit/>
-          </a:bodyPr>
-          <a:lstStyle/>
-          <a:p>
-            <a:pPr algn="l"/>
-            <a:r>
-              <a:rPr sz="1100" b="0" i="0">
-                <a:solidFill>
-                  <a:srgbClr val="1A1A1A"/>
-                </a:solidFill>
-              </a:rPr>
-              <a:t>• ③ Impact Story — récit bénéficiaire, émotion + faits (45–60 sec)</a:t>
-            </a:r>
-          </a:p>
-        </p:txBody>
-      </p:sp>
-      <p:sp>
-        <p:nvSpPr>
-          <p:cNvPr id="18" name="TextBox 17"/>
-          <p:cNvSpPr txBox="1"/>
-          <p:nvPr/>
-        </p:nvSpPr>
-        <p:spPr>
-          <a:xfrm>
-            <a:off x="6217920" y="2377439"/>
-            <a:ext cx="5303520" cy="347472"/>
-          </a:xfrm>
-          <a:prstGeom prst="rect">
-            <a:avLst/>
-          </a:prstGeom>
-          <a:noFill/>
-        </p:spPr>
-        <p:txBody>
-          <a:bodyPr wrap="square">
-            <a:spAutoFit/>
-          </a:bodyPr>
-          <a:lstStyle/>
-          <a:p>
-            <a:pPr algn="l"/>
-            <a:r>
-              <a:rPr sz="1100" b="0" i="0">
-                <a:solidFill>
-                  <a:srgbClr val="1A1A1A"/>
-                </a:solidFill>
-              </a:rPr>
-              <a:t>• ④ Proposition — montant, avantages donateur (30 sec)</a:t>
-            </a:r>
-          </a:p>
-        </p:txBody>
-      </p:sp>
-      <p:sp>
-        <p:nvSpPr>
-          <p:cNvPr id="19" name="TextBox 18"/>
-          <p:cNvSpPr txBox="1"/>
-          <p:nvPr/>
-        </p:nvSpPr>
-        <p:spPr>
-          <a:xfrm>
-            <a:off x="6217920" y="2743199"/>
-            <a:ext cx="5303520" cy="347472"/>
-          </a:xfrm>
-          <a:prstGeom prst="rect">
-            <a:avLst/>
-          </a:prstGeom>
-          <a:noFill/>
-        </p:spPr>
-        <p:txBody>
-          <a:bodyPr wrap="square">
-            <a:spAutoFit/>
-          </a:bodyPr>
-          <a:lstStyle/>
-          <a:p>
-            <a:pPr algn="l"/>
-            <a:r>
-              <a:rPr sz="1100" b="0" i="0">
-                <a:solidFill>
-                  <a:srgbClr val="1A1A1A"/>
-                </a:solidFill>
-              </a:rPr>
-              <a:t>• ⑤ Engagement — signature, remerciement chaleureux (20 sec)</a:t>
-            </a:r>
-          </a:p>
-        </p:txBody>
-      </p:sp>
-      <p:sp>
-        <p:nvSpPr>
-          <p:cNvPr id="20" name="Rectangle 19"/>
+              <a:t>SHY-Performance  ·  Formation FIM  ·  V6-01062026SHY-TE</a:t>
+            </a:r>
+          </a:p>
+        </p:txBody>
+      </p:sp>
+      <p:sp>
+        <p:nvSpPr>
+          <p:cNvPr id="10" name="Rectangle 9"/>
           <p:cNvSpPr/>
           <p:nvPr/>
         </p:nvSpPr>
         <p:spPr>
           <a:xfrm>
-            <a:off x="274320" y="4160520"/>
-            <a:ext cx="2882646" cy="256032"/>
+            <a:off x="274320" y="804672"/>
+            <a:ext cx="2910078" cy="274320"/>
           </a:xfrm>
           <a:prstGeom prst="rect">
             <a:avLst/>
           </a:prstGeom>
           <a:solidFill>
-            <a:srgbClr val="2E86AB"/>
+            <a:srgbClr val="005555"/>
           </a:solidFill>
           <a:ln>
             <a:noFill/>
@@ -4075,14 +3969,14 @@
       </p:sp>
       <p:sp>
         <p:nvSpPr>
-          <p:cNvPr id="21" name="TextBox 20"/>
+          <p:cNvPr id="11" name="TextBox 10"/>
           <p:cNvSpPr txBox="1"/>
           <p:nvPr/>
         </p:nvSpPr>
         <p:spPr>
           <a:xfrm>
-            <a:off x="320040" y="4187952"/>
-            <a:ext cx="2791206" cy="201168"/>
+            <a:off x="347472" y="841248"/>
+            <a:ext cx="2763774" cy="219456"/>
           </a:xfrm>
           <a:prstGeom prst="rect">
             <a:avLst/>
@@ -4102,21 +3996,21 @@
                   <a:srgbClr val="FFFFFF"/>
                 </a:solidFill>
               </a:rPr>
-              <a:t>EC — Expérience Concrète</a:t>
-            </a:r>
-          </a:p>
-        </p:txBody>
-      </p:sp>
-      <p:sp>
-        <p:nvSpPr>
-          <p:cNvPr id="22" name="Rectangle 21"/>
+              <a:t>OBSERVATION</a:t>
+            </a:r>
+          </a:p>
+        </p:txBody>
+      </p:sp>
+      <p:sp>
+        <p:nvSpPr>
+          <p:cNvPr id="12" name="Rectangle 11"/>
           <p:cNvSpPr/>
           <p:nvPr/>
         </p:nvSpPr>
         <p:spPr>
           <a:xfrm>
-            <a:off x="274320" y="4416552"/>
-            <a:ext cx="2882646" cy="1481328"/>
+            <a:off x="274320" y="1078992"/>
+            <a:ext cx="2910078" cy="3840480"/>
           </a:xfrm>
           <a:prstGeom prst="rect">
             <a:avLst/>
@@ -4126,7 +4020,7 @@
           </a:solidFill>
           <a:ln w="12700">
             <a:solidFill>
-              <a:srgbClr val="2E86AB"/>
+              <a:srgbClr val="005555"/>
             </a:solidFill>
           </a:ln>
         </p:spPr>
@@ -4154,14 +4048,14 @@
       </p:sp>
       <p:sp>
         <p:nvSpPr>
-          <p:cNvPr id="23" name="TextBox 22"/>
+          <p:cNvPr id="13" name="TextBox 12"/>
           <p:cNvSpPr txBox="1"/>
           <p:nvPr/>
         </p:nvSpPr>
         <p:spPr>
           <a:xfrm>
-            <a:off x="365760" y="4453128"/>
-            <a:ext cx="2699765" cy="1371600"/>
+            <a:off x="384048" y="1124712"/>
+            <a:ext cx="2690622" cy="3657600"/>
           </a:xfrm>
           <a:prstGeom prst="rect">
             <a:avLst/>
@@ -4181,27 +4075,29 @@
                   <a:srgbClr val="1A1A1A"/>
                 </a:solidFill>
               </a:rPr>
-              <a:t>Démo formateur LIVE sur passant simulé · apprenants observent avec grille</a:t>
-            </a:r>
-          </a:p>
-        </p:txBody>
-      </p:sp>
-      <p:sp>
-        <p:nvSpPr>
-          <p:cNvPr id="24" name="Rectangle 23"/>
+              <a:t>Votre formateur fait une
+démonstration complète
+devant un passant simulé.</a:t>
+            </a:r>
+          </a:p>
+        </p:txBody>
+      </p:sp>
+      <p:sp>
+        <p:nvSpPr>
+          <p:cNvPr id="14" name="Rectangle 13"/>
           <p:cNvSpPr/>
           <p:nvPr/>
         </p:nvSpPr>
         <p:spPr>
           <a:xfrm>
-            <a:off x="3184397" y="4160520"/>
-            <a:ext cx="2882646" cy="256032"/>
+            <a:off x="3202686" y="804672"/>
+            <a:ext cx="2910078" cy="274320"/>
           </a:xfrm>
           <a:prstGeom prst="rect">
             <a:avLst/>
           </a:prstGeom>
           <a:solidFill>
-            <a:srgbClr val="4CAF82"/>
+            <a:srgbClr val="008080"/>
           </a:solidFill>
           <a:ln>
             <a:noFill/>
@@ -4231,14 +4127,14 @@
       </p:sp>
       <p:sp>
         <p:nvSpPr>
-          <p:cNvPr id="25" name="TextBox 24"/>
+          <p:cNvPr id="15" name="TextBox 14"/>
           <p:cNvSpPr txBox="1"/>
           <p:nvPr/>
         </p:nvSpPr>
         <p:spPr>
           <a:xfrm>
-            <a:off x="3230117" y="4187952"/>
-            <a:ext cx="2791206" cy="201168"/>
+            <a:off x="3275838" y="841248"/>
+            <a:ext cx="2763774" cy="219456"/>
           </a:xfrm>
           <a:prstGeom prst="rect">
             <a:avLst/>
@@ -4258,21 +4154,21 @@
                   <a:srgbClr val="FFFFFF"/>
                 </a:solidFill>
               </a:rPr>
-              <a:t>OR — Observation Réfléchie</a:t>
-            </a:r>
-          </a:p>
-        </p:txBody>
-      </p:sp>
-      <p:sp>
-        <p:nvSpPr>
-          <p:cNvPr id="26" name="Rectangle 25"/>
+              <a:t>ANALYSE</a:t>
+            </a:r>
+          </a:p>
+        </p:txBody>
+      </p:sp>
+      <p:sp>
+        <p:nvSpPr>
+          <p:cNvPr id="16" name="Rectangle 15"/>
           <p:cNvSpPr/>
           <p:nvPr/>
         </p:nvSpPr>
         <p:spPr>
           <a:xfrm>
-            <a:off x="3184397" y="4416552"/>
-            <a:ext cx="2882646" cy="1481328"/>
+            <a:off x="3202686" y="1078992"/>
+            <a:ext cx="2910078" cy="3840480"/>
           </a:xfrm>
           <a:prstGeom prst="rect">
             <a:avLst/>
@@ -4282,7 +4178,7 @@
           </a:solidFill>
           <a:ln w="12700">
             <a:solidFill>
-              <a:srgbClr val="4CAF82"/>
+              <a:srgbClr val="008080"/>
             </a:solidFill>
           </a:ln>
         </p:spPr>
@@ -4310,14 +4206,14 @@
       </p:sp>
       <p:sp>
         <p:nvSpPr>
-          <p:cNvPr id="27" name="TextBox 26"/>
+          <p:cNvPr id="17" name="TextBox 16"/>
           <p:cNvSpPr txBox="1"/>
           <p:nvPr/>
         </p:nvSpPr>
         <p:spPr>
           <a:xfrm>
-            <a:off x="3275837" y="4453128"/>
-            <a:ext cx="2699765" cy="1371600"/>
+            <a:off x="3312414" y="1124712"/>
+            <a:ext cx="2690622" cy="3657600"/>
           </a:xfrm>
           <a:prstGeom prst="rect">
             <a:avLst/>
@@ -4337,27 +4233,29 @@
                   <a:srgbClr val="1A1A1A"/>
                 </a:solidFill>
               </a:rPr>
-              <a:t>'Qu'avez-vous observé ?' → liste comportements efficaces</a:t>
-            </a:r>
-          </a:p>
-        </p:txBody>
-      </p:sp>
-      <p:sp>
-        <p:nvSpPr>
-          <p:cNvPr id="28" name="Rectangle 27"/>
+              <a:t>Vous observez et notez :
+Qu'est-ce qui a marché ?
+Qu'auriez-vous fait autrement ?</a:t>
+            </a:r>
+          </a:p>
+        </p:txBody>
+      </p:sp>
+      <p:sp>
+        <p:nvSpPr>
+          <p:cNvPr id="18" name="Rectangle 17"/>
           <p:cNvSpPr/>
           <p:nvPr/>
         </p:nvSpPr>
         <p:spPr>
           <a:xfrm>
-            <a:off x="6094475" y="4160520"/>
-            <a:ext cx="2882646" cy="256032"/>
+            <a:off x="6131052" y="804672"/>
+            <a:ext cx="2910078" cy="274320"/>
           </a:xfrm>
           <a:prstGeom prst="rect">
             <a:avLst/>
           </a:prstGeom>
           <a:solidFill>
-            <a:srgbClr val="F4AE2D"/>
+            <a:srgbClr val="2A7A50"/>
           </a:solidFill>
           <a:ln>
             <a:noFill/>
@@ -4387,14 +4285,14 @@
       </p:sp>
       <p:sp>
         <p:nvSpPr>
-          <p:cNvPr id="29" name="TextBox 28"/>
+          <p:cNvPr id="19" name="TextBox 18"/>
           <p:cNvSpPr txBox="1"/>
           <p:nvPr/>
         </p:nvSpPr>
         <p:spPr>
           <a:xfrm>
-            <a:off x="6140195" y="4187952"/>
-            <a:ext cx="2791206" cy="201168"/>
+            <a:off x="6204204" y="841248"/>
+            <a:ext cx="2763774" cy="219456"/>
           </a:xfrm>
           <a:prstGeom prst="rect">
             <a:avLst/>
@@ -4414,21 +4312,21 @@
                   <a:srgbClr val="FFFFFF"/>
                 </a:solidFill>
               </a:rPr>
-              <a:t>CA — Conceptualisation</a:t>
-            </a:r>
-          </a:p>
-        </p:txBody>
-      </p:sp>
-      <p:sp>
-        <p:nvSpPr>
-          <p:cNvPr id="30" name="Rectangle 29"/>
+              <a:t>APPORT</a:t>
+            </a:r>
+          </a:p>
+        </p:txBody>
+      </p:sp>
+      <p:sp>
+        <p:nvSpPr>
+          <p:cNvPr id="20" name="Rectangle 19"/>
           <p:cNvSpPr/>
           <p:nvPr/>
         </p:nvSpPr>
         <p:spPr>
           <a:xfrm>
-            <a:off x="6094475" y="4416552"/>
-            <a:ext cx="2882646" cy="1481328"/>
+            <a:off x="6131052" y="1078992"/>
+            <a:ext cx="2910078" cy="3840480"/>
           </a:xfrm>
           <a:prstGeom prst="rect">
             <a:avLst/>
@@ -4438,7 +4336,7 @@
           </a:solidFill>
           <a:ln w="12700">
             <a:solidFill>
-              <a:srgbClr val="F4AE2D"/>
+              <a:srgbClr val="2A7A50"/>
             </a:solidFill>
           </a:ln>
         </p:spPr>
@@ -4466,14 +4364,14 @@
       </p:sp>
       <p:sp>
         <p:nvSpPr>
-          <p:cNvPr id="31" name="TextBox 30"/>
+          <p:cNvPr id="21" name="TextBox 20"/>
           <p:cNvSpPr txBox="1"/>
           <p:nvPr/>
         </p:nvSpPr>
         <p:spPr>
           <a:xfrm>
-            <a:off x="6185915" y="4453128"/>
-            <a:ext cx="2699765" cy="1371600"/>
+            <a:off x="6240780" y="1124712"/>
+            <a:ext cx="2690622" cy="3657600"/>
           </a:xfrm>
           <a:prstGeom prst="rect">
             <a:avLst/>
@@ -4493,27 +4391,29 @@
                   <a:srgbClr val="1A1A1A"/>
                 </a:solidFill>
               </a:rPr>
-              <a:t>Déconstruction des 5 étapes, ancres mnémotechniques, langage corporel</a:t>
-            </a:r>
-          </a:p>
-        </p:txBody>
-      </p:sp>
-      <p:sp>
-        <p:nvSpPr>
-          <p:cNvPr id="32" name="Rectangle 31"/>
+              <a:t>Déconstruction des
+5 étapes. Ancrages.
+Language corporel.</a:t>
+            </a:r>
+          </a:p>
+        </p:txBody>
+      </p:sp>
+      <p:sp>
+        <p:nvSpPr>
+          <p:cNvPr id="22" name="Rectangle 21"/>
           <p:cNvSpPr/>
           <p:nvPr/>
         </p:nvSpPr>
         <p:spPr>
           <a:xfrm>
-            <a:off x="9004554" y="4160520"/>
-            <a:ext cx="2882646" cy="256032"/>
+            <a:off x="9059418" y="804672"/>
+            <a:ext cx="2910078" cy="274320"/>
           </a:xfrm>
           <a:prstGeom prst="rect">
             <a:avLst/>
           </a:prstGeom>
           <a:solidFill>
-            <a:srgbClr val="E84855"/>
+            <a:srgbClr val="FF0000"/>
           </a:solidFill>
           <a:ln>
             <a:noFill/>
@@ -4543,14 +4443,14 @@
       </p:sp>
       <p:sp>
         <p:nvSpPr>
-          <p:cNvPr id="33" name="TextBox 32"/>
+          <p:cNvPr id="23" name="TextBox 22"/>
           <p:cNvSpPr txBox="1"/>
           <p:nvPr/>
         </p:nvSpPr>
         <p:spPr>
           <a:xfrm>
-            <a:off x="9050274" y="4187952"/>
-            <a:ext cx="2791206" cy="201168"/>
+            <a:off x="9132570" y="841248"/>
+            <a:ext cx="2763774" cy="219456"/>
           </a:xfrm>
           <a:prstGeom prst="rect">
             <a:avLst/>
@@ -4570,21 +4470,21 @@
                   <a:srgbClr val="FFFFFF"/>
                 </a:solidFill>
               </a:rPr>
-              <a:t>EA — Expérimentation Active</a:t>
-            </a:r>
-          </a:p>
-        </p:txBody>
-      </p:sp>
-      <p:sp>
-        <p:nvSpPr>
-          <p:cNvPr id="34" name="Rectangle 33"/>
+              <a:t>ENTRAÎNEMENT</a:t>
+            </a:r>
+          </a:p>
+        </p:txBody>
+      </p:sp>
+      <p:sp>
+        <p:nvSpPr>
+          <p:cNvPr id="24" name="Rectangle 23"/>
           <p:cNvSpPr/>
           <p:nvPr/>
         </p:nvSpPr>
         <p:spPr>
           <a:xfrm>
-            <a:off x="9004554" y="4416552"/>
-            <a:ext cx="2882646" cy="1481328"/>
+            <a:off x="9059418" y="1078992"/>
+            <a:ext cx="2910078" cy="3840480"/>
           </a:xfrm>
           <a:prstGeom prst="rect">
             <a:avLst/>
@@ -4594,7 +4494,7 @@
           </a:solidFill>
           <a:ln w="12700">
             <a:solidFill>
-              <a:srgbClr val="E84855"/>
+              <a:srgbClr val="FF0000"/>
             </a:solidFill>
           </a:ln>
         </p:spPr>
@@ -4622,14 +4522,14 @@
       </p:sp>
       <p:sp>
         <p:nvSpPr>
-          <p:cNvPr id="35" name="TextBox 34"/>
+          <p:cNvPr id="25" name="TextBox 24"/>
           <p:cNvSpPr txBox="1"/>
           <p:nvPr/>
         </p:nvSpPr>
         <p:spPr>
           <a:xfrm>
-            <a:off x="9095994" y="4453128"/>
-            <a:ext cx="2699765" cy="1371600"/>
+            <a:off x="9169146" y="1124712"/>
+            <a:ext cx="2690622" cy="3657600"/>
           </a:xfrm>
           <a:prstGeom prst="rect">
             <a:avLst/>
@@ -4649,27 +4549,29 @@
                   <a:srgbClr val="1A1A1A"/>
                 </a:solidFill>
               </a:rPr>
-              <a:t>Trinômes 90 min : fundraiser / passant / observateur · rotation 15 min</a:t>
-            </a:r>
-          </a:p>
-        </p:txBody>
-      </p:sp>
-      <p:sp>
-        <p:nvSpPr>
-          <p:cNvPr id="36" name="Rectangle 35"/>
+              <a:t>Trinômes 90 min :
+fundraiser / passant /
+observateur. Rotation 15 min.</a:t>
+            </a:r>
+          </a:p>
+        </p:txBody>
+      </p:sp>
+      <p:sp>
+        <p:nvSpPr>
+          <p:cNvPr id="26" name="Rectangle 25"/>
           <p:cNvSpPr/>
           <p:nvPr/>
         </p:nvSpPr>
         <p:spPr>
           <a:xfrm>
-            <a:off x="274320" y="5486400"/>
-            <a:ext cx="11612880" cy="274320"/>
+            <a:off x="274320" y="5074920"/>
+            <a:ext cx="11640312" cy="274320"/>
           </a:xfrm>
           <a:prstGeom prst="rect">
             <a:avLst/>
           </a:prstGeom>
           <a:solidFill>
-            <a:srgbClr val="C9A84C"/>
+            <a:srgbClr val="FF0000"/>
           </a:solidFill>
           <a:ln>
             <a:noFill/>
@@ -4699,13 +4601,13 @@
       </p:sp>
       <p:sp>
         <p:nvSpPr>
-          <p:cNvPr id="37" name="TextBox 36"/>
+          <p:cNvPr id="27" name="TextBox 26"/>
           <p:cNvSpPr txBox="1"/>
           <p:nvPr/>
         </p:nvSpPr>
         <p:spPr>
           <a:xfrm>
-            <a:off x="365760" y="5522976"/>
+            <a:off x="384048" y="5111496"/>
             <a:ext cx="11430000" cy="219456"/>
           </a:xfrm>
           <a:prstGeom prst="rect">
@@ -4721,26 +4623,71 @@
           <a:p>
             <a:pPr algn="l"/>
             <a:r>
-              <a:rPr sz="1000" b="1" i="0">
+              <a:rPr sz="900" b="1" i="0">
                 <a:solidFill>
-                  <a:srgbClr val="005050"/>
+                  <a:srgbClr val="FFFFFF"/>
                 </a:solidFill>
               </a:rPr>
-              <a:t>🎯 Évaluation formative</a:t>
-            </a:r>
-          </a:p>
-        </p:txBody>
-      </p:sp>
-      <p:sp>
-        <p:nvSpPr>
-          <p:cNvPr id="38" name="TextBox 37"/>
+              <a:t>Vos 3 réussites à valider aujourd'hui</a:t>
+            </a:r>
+          </a:p>
+        </p:txBody>
+      </p:sp>
+      <p:sp>
+        <p:nvSpPr>
+          <p:cNvPr id="28" name="Rectangle 27"/>
+          <p:cNvSpPr/>
+          <p:nvPr/>
+        </p:nvSpPr>
+        <p:spPr>
+          <a:xfrm>
+            <a:off x="274320" y="5367528"/>
+            <a:ext cx="3843528" cy="502920"/>
+          </a:xfrm>
+          <a:prstGeom prst="rect">
+            <a:avLst/>
+          </a:prstGeom>
+          <a:solidFill>
+            <a:srgbClr val="FFFFFF"/>
+          </a:solidFill>
+          <a:ln w="10160">
+            <a:solidFill>
+              <a:srgbClr val="FF0000"/>
+            </a:solidFill>
+          </a:ln>
+        </p:spPr>
+        <p:style>
+          <a:lnRef idx="1">
+            <a:schemeClr val="accent1"/>
+          </a:lnRef>
+          <a:fillRef idx="3">
+            <a:schemeClr val="accent1"/>
+          </a:fillRef>
+          <a:effectRef idx="2">
+            <a:schemeClr val="accent1"/>
+          </a:effectRef>
+          <a:fontRef idx="minor">
+            <a:schemeClr val="lt1"/>
+          </a:fontRef>
+        </p:style>
+        <p:txBody>
+          <a:bodyPr rtlCol="0" anchor="ctr"/>
+          <a:lstStyle/>
+          <a:p>
+            <a:pPr algn="ctr"/>
+          </a:p>
+        </p:txBody>
+      </p:sp>
+      <p:sp>
+        <p:nvSpPr>
+          <p:cNvPr id="29" name="TextBox 28"/>
           <p:cNvSpPr txBox="1"/>
           <p:nvPr/>
         </p:nvSpPr>
         <p:spPr>
           <a:xfrm>
-            <a:off x="365760" y="5779008"/>
-            <a:ext cx="3718560" cy="502920"/>
+            <a:off x="365760" y="5404104"/>
+            <a:ext cx="3715512" cy="420624"/>
           </a:xfrm>
           <a:prstGeom prst="rect">
             <a:avLst/>
@@ -4760,21 +4707,66 @@
                   <a:srgbClr val="1A1A1A"/>
                 </a:solidFill>
               </a:rPr>
-              <a:t>✓ Grille certification partielle C1+C2+C5 (formateur)</a:t>
-            </a:r>
-          </a:p>
-        </p:txBody>
-      </p:sp>
-      <p:sp>
-        <p:nvSpPr>
-          <p:cNvPr id="39" name="TextBox 38"/>
+              <a:t>✔ Grille C1+C2+C5 validée par votre formateur</a:t>
+            </a:r>
+          </a:p>
+        </p:txBody>
+      </p:sp>
+      <p:sp>
+        <p:nvSpPr>
+          <p:cNvPr id="30" name="Rectangle 29"/>
+          <p:cNvSpPr/>
+          <p:nvPr/>
+        </p:nvSpPr>
+        <p:spPr>
+          <a:xfrm>
+            <a:off x="4154423" y="5367528"/>
+            <a:ext cx="3843528" cy="502920"/>
+          </a:xfrm>
+          <a:prstGeom prst="rect">
+            <a:avLst/>
+          </a:prstGeom>
+          <a:solidFill>
+            <a:srgbClr val="FFFFFF"/>
+          </a:solidFill>
+          <a:ln w="10160">
+            <a:solidFill>
+              <a:srgbClr val="FF0000"/>
+            </a:solidFill>
+          </a:ln>
+        </p:spPr>
+        <p:style>
+          <a:lnRef idx="1">
+            <a:schemeClr val="accent1"/>
+          </a:lnRef>
+          <a:fillRef idx="3">
+            <a:schemeClr val="accent1"/>
+          </a:fillRef>
+          <a:effectRef idx="2">
+            <a:schemeClr val="accent1"/>
+          </a:effectRef>
+          <a:fontRef idx="minor">
+            <a:schemeClr val="lt1"/>
+          </a:fontRef>
+        </p:style>
+        <p:txBody>
+          <a:bodyPr rtlCol="0" anchor="ctr"/>
+          <a:lstStyle/>
+          <a:p>
+            <a:pPr algn="ctr"/>
+          </a:p>
+        </p:txBody>
+      </p:sp>
+      <p:sp>
+        <p:nvSpPr>
+          <p:cNvPr id="31" name="TextBox 30"/>
           <p:cNvSpPr txBox="1"/>
           <p:nvPr/>
         </p:nvSpPr>
         <p:spPr>
           <a:xfrm>
-            <a:off x="4175760" y="5779008"/>
-            <a:ext cx="3718560" cy="502920"/>
+            <a:off x="4245863" y="5404104"/>
+            <a:ext cx="3715512" cy="420624"/>
           </a:xfrm>
           <a:prstGeom prst="rect">
             <a:avLst/>
@@ -4794,21 +4786,66 @@
                   <a:srgbClr val="1A1A1A"/>
                 </a:solidFill>
               </a:rPr>
-              <a:t>✓ Auto-évaluation vidéo si consentement apprenant</a:t>
-            </a:r>
-          </a:p>
-        </p:txBody>
-      </p:sp>
-      <p:sp>
-        <p:nvSpPr>
-          <p:cNvPr id="40" name="TextBox 39"/>
+              <a:t>✔ Auto-évaluation après votre 3ème round</a:t>
+            </a:r>
+          </a:p>
+        </p:txBody>
+      </p:sp>
+      <p:sp>
+        <p:nvSpPr>
+          <p:cNvPr id="32" name="Rectangle 31"/>
+          <p:cNvSpPr/>
+          <p:nvPr/>
+        </p:nvSpPr>
+        <p:spPr>
+          <a:xfrm>
+            <a:off x="8034527" y="5367528"/>
+            <a:ext cx="3843528" cy="502920"/>
+          </a:xfrm>
+          <a:prstGeom prst="rect">
+            <a:avLst/>
+          </a:prstGeom>
+          <a:solidFill>
+            <a:srgbClr val="FFFFFF"/>
+          </a:solidFill>
+          <a:ln w="10160">
+            <a:solidFill>
+              <a:srgbClr val="FF0000"/>
+            </a:solidFill>
+          </a:ln>
+        </p:spPr>
+        <p:style>
+          <a:lnRef idx="1">
+            <a:schemeClr val="accent1"/>
+          </a:lnRef>
+          <a:fillRef idx="3">
+            <a:schemeClr val="accent1"/>
+          </a:fillRef>
+          <a:effectRef idx="2">
+            <a:schemeClr val="accent1"/>
+          </a:effectRef>
+          <a:fontRef idx="minor">
+            <a:schemeClr val="lt1"/>
+          </a:fontRef>
+        </p:style>
+        <p:txBody>
+          <a:bodyPr rtlCol="0" anchor="ctr"/>
+          <a:lstStyle/>
+          <a:p>
+            <a:pPr algn="ctr"/>
+          </a:p>
+        </p:txBody>
+      </p:sp>
+      <p:sp>
+        <p:nvSpPr>
+          <p:cNvPr id="33" name="TextBox 32"/>
           <p:cNvSpPr txBox="1"/>
           <p:nvPr/>
         </p:nvSpPr>
         <p:spPr>
           <a:xfrm>
-            <a:off x="7985760" y="5779008"/>
-            <a:ext cx="3718560" cy="502920"/>
+            <a:off x="8125967" y="5404104"/>
+            <a:ext cx="3715512" cy="420624"/>
           </a:xfrm>
           <a:prstGeom prst="rect">
             <a:avLst/>
@@ -4828,7 +4865,7 @@
                   <a:srgbClr val="1A1A1A"/>
                 </a:solidFill>
               </a:rPr>
-              <a:t>✓ Score seuil : 12/20 pour passer à J4</a:t>
+              <a:t>✔ Score ≥ 12/20 pour passer à J4</a:t>
             </a:r>
           </a:p>
         </p:txBody>
@@ -4903,13 +4940,13 @@
         <p:spPr>
           <a:xfrm>
             <a:off x="0" y="0"/>
-            <a:ext cx="12188952" cy="685800"/>
+            <a:ext cx="12188952" cy="658368"/>
           </a:xfrm>
           <a:prstGeom prst="rect">
             <a:avLst/>
           </a:prstGeom>
           <a:solidFill>
-            <a:srgbClr val="005050"/>
+            <a:srgbClr val="005555"/>
           </a:solidFill>
           <a:ln>
             <a:noFill/>
@@ -4945,14 +4982,14 @@
         </p:nvSpPr>
         <p:spPr>
           <a:xfrm>
-            <a:off x="0" y="667512"/>
-            <a:ext cx="12188952" cy="36576"/>
+            <a:off x="0" y="640080"/>
+            <a:ext cx="12188952" cy="54864"/>
           </a:xfrm>
           <a:prstGeom prst="rect">
             <a:avLst/>
           </a:prstGeom>
           <a:solidFill>
-            <a:srgbClr val="C9A84C"/>
+            <a:srgbClr val="FF0000"/>
           </a:solidFill>
           <a:ln>
             <a:noFill/>
@@ -4988,8 +5025,8 @@
         </p:nvSpPr>
         <p:spPr>
           <a:xfrm>
-            <a:off x="274320" y="73152"/>
-            <a:ext cx="11612880" cy="566928"/>
+            <a:off x="164592" y="64008"/>
+            <a:ext cx="685800" cy="530352"/>
           </a:xfrm>
           <a:prstGeom prst="rect">
             <a:avLst/>
@@ -5004,12 +5041,12 @@
           <a:p>
             <a:pPr algn="l"/>
             <a:r>
-              <a:rPr sz="1800" b="1" i="0">
+              <a:rPr sz="2000" b="1" i="0">
                 <a:solidFill>
                   <a:srgbClr val="FFFFFF"/>
                 </a:solidFill>
               </a:rPr>
-              <a:t>Script FIM V6 — Détail des 5 étapes + Adaptation profil</a:t>
+              <a:t>SHY</a:t>
             </a:r>
           </a:p>
         </p:txBody>
@@ -5022,14 +5059,14 @@
         </p:nvSpPr>
         <p:spPr>
           <a:xfrm>
-            <a:off x="274320" y="822960"/>
-            <a:ext cx="2286000" cy="320040"/>
+            <a:off x="914400" y="91440"/>
+            <a:ext cx="36576" cy="475488"/>
           </a:xfrm>
           <a:prstGeom prst="rect">
             <a:avLst/>
           </a:prstGeom>
           <a:solidFill>
-            <a:srgbClr val="007A7A"/>
+            <a:srgbClr val="FF0000"/>
           </a:solidFill>
           <a:ln>
             <a:noFill/>
@@ -5065,8 +5102,162 @@
         </p:nvSpPr>
         <p:spPr>
           <a:xfrm>
-            <a:off x="347472" y="850392"/>
-            <a:ext cx="2139696" cy="256032"/>
+            <a:off x="1024128" y="91440"/>
+            <a:ext cx="10881360" cy="475488"/>
+          </a:xfrm>
+          <a:prstGeom prst="rect">
+            <a:avLst/>
+          </a:prstGeom>
+          <a:noFill/>
+        </p:spPr>
+        <p:txBody>
+          <a:bodyPr wrap="square">
+            <a:spAutoFit/>
+          </a:bodyPr>
+          <a:lstStyle/>
+          <a:p>
+            <a:pPr algn="l"/>
+            <a:r>
+              <a:rPr sz="1700" b="1" i="0">
+                <a:solidFill>
+                  <a:srgbClr val="FFFFFF"/>
+                </a:solidFill>
+              </a:rPr>
+              <a:t>Les 5 Étapes de Votre Script — Apprenez à les Incarner</a:t>
+            </a:r>
+          </a:p>
+        </p:txBody>
+      </p:sp>
+      <p:sp>
+        <p:nvSpPr>
+          <p:cNvPr id="8" name="Rectangle 7"/>
+          <p:cNvSpPr/>
+          <p:nvPr/>
+        </p:nvSpPr>
+        <p:spPr>
+          <a:xfrm>
+            <a:off x="0" y="6492240"/>
+            <a:ext cx="12188952" cy="365760"/>
+          </a:xfrm>
+          <a:prstGeom prst="rect">
+            <a:avLst/>
+          </a:prstGeom>
+          <a:solidFill>
+            <a:srgbClr val="005555"/>
+          </a:solidFill>
+          <a:ln>
+            <a:noFill/>
+          </a:ln>
+        </p:spPr>
+        <p:style>
+          <a:lnRef idx="1">
+            <a:schemeClr val="accent1"/>
+          </a:lnRef>
+          <a:fillRef idx="3">
+            <a:schemeClr val="accent1"/>
+          </a:fillRef>
+          <a:effectRef idx="2">
+            <a:schemeClr val="accent1"/>
+          </a:effectRef>
+          <a:fontRef idx="minor">
+            <a:schemeClr val="lt1"/>
+          </a:fontRef>
+        </p:style>
+        <p:txBody>
+          <a:bodyPr rtlCol="0" anchor="ctr"/>
+          <a:lstStyle/>
+          <a:p>
+            <a:pPr algn="ctr"/>
+          </a:p>
+        </p:txBody>
+      </p:sp>
+      <p:sp>
+        <p:nvSpPr>
+          <p:cNvPr id="9" name="TextBox 8"/>
+          <p:cNvSpPr txBox="1"/>
+          <p:nvPr/>
+        </p:nvSpPr>
+        <p:spPr>
+          <a:xfrm>
+            <a:off x="0" y="6519672"/>
+            <a:ext cx="12188952" cy="274320"/>
+          </a:xfrm>
+          <a:prstGeom prst="rect">
+            <a:avLst/>
+          </a:prstGeom>
+          <a:noFill/>
+        </p:spPr>
+        <p:txBody>
+          <a:bodyPr wrap="square">
+            <a:spAutoFit/>
+          </a:bodyPr>
+          <a:lstStyle/>
+          <a:p>
+            <a:pPr algn="ctr"/>
+            <a:r>
+              <a:rPr sz="900" b="0" i="0">
+                <a:solidFill>
+                  <a:srgbClr val="FFFFFF"/>
+                </a:solidFill>
+              </a:rPr>
+              <a:t>SHY-Performance  ·  Formation FIM  ·  V6-01062026SHY-TE</a:t>
+            </a:r>
+          </a:p>
+        </p:txBody>
+      </p:sp>
+      <p:sp>
+        <p:nvSpPr>
+          <p:cNvPr id="10" name="Rectangle 9"/>
+          <p:cNvSpPr/>
+          <p:nvPr/>
+        </p:nvSpPr>
+        <p:spPr>
+          <a:xfrm>
+            <a:off x="274320" y="804672"/>
+            <a:ext cx="2286000" cy="347472"/>
+          </a:xfrm>
+          <a:prstGeom prst="rect">
+            <a:avLst/>
+          </a:prstGeom>
+          <a:solidFill>
+            <a:srgbClr val="005555"/>
+          </a:solidFill>
+          <a:ln>
+            <a:noFill/>
+          </a:ln>
+        </p:spPr>
+        <p:style>
+          <a:lnRef idx="1">
+            <a:schemeClr val="accent1"/>
+          </a:lnRef>
+          <a:fillRef idx="3">
+            <a:schemeClr val="accent1"/>
+          </a:fillRef>
+          <a:effectRef idx="2">
+            <a:schemeClr val="accent1"/>
+          </a:effectRef>
+          <a:fontRef idx="minor">
+            <a:schemeClr val="lt1"/>
+          </a:fontRef>
+        </p:style>
+        <p:txBody>
+          <a:bodyPr rtlCol="0" anchor="ctr"/>
+          <a:lstStyle/>
+          <a:p>
+            <a:pPr algn="ctr"/>
+          </a:p>
+        </p:txBody>
+      </p:sp>
+      <p:sp>
+        <p:nvSpPr>
+          <p:cNvPr id="11" name="TextBox 10"/>
+          <p:cNvSpPr txBox="1"/>
+          <p:nvPr/>
+        </p:nvSpPr>
+        <p:spPr>
+          <a:xfrm>
+            <a:off x="347472" y="832104"/>
+            <a:ext cx="2139696" cy="274320"/>
           </a:xfrm>
           <a:prstGeom prst="rect">
             <a:avLst/>
@@ -5093,14 +5284,14 @@
       </p:sp>
       <p:sp>
         <p:nvSpPr>
-          <p:cNvPr id="8" name="Rectangle 7"/>
+          <p:cNvPr id="12" name="Rectangle 11"/>
           <p:cNvSpPr/>
           <p:nvPr/>
         </p:nvSpPr>
         <p:spPr>
           <a:xfrm>
-            <a:off x="274320" y="1143000"/>
-            <a:ext cx="2286000" cy="4114800"/>
+            <a:off x="274320" y="1152144"/>
+            <a:ext cx="2286000" cy="4206240"/>
           </a:xfrm>
           <a:prstGeom prst="rect">
             <a:avLst/>
@@ -5110,7 +5301,7 @@
           </a:solidFill>
           <a:ln w="19050">
             <a:solidFill>
-              <a:srgbClr val="007A7A"/>
+              <a:srgbClr val="005555"/>
             </a:solidFill>
           </a:ln>
         </p:spPr>
@@ -5138,14 +5329,14 @@
       </p:sp>
       <p:sp>
         <p:nvSpPr>
-          <p:cNvPr id="9" name="TextBox 8"/>
+          <p:cNvPr id="13" name="TextBox 12"/>
           <p:cNvSpPr txBox="1"/>
           <p:nvPr/>
         </p:nvSpPr>
         <p:spPr>
           <a:xfrm>
-            <a:off x="365760" y="1188720"/>
-            <a:ext cx="2103120" cy="3840480"/>
+            <a:off x="384048" y="1225296"/>
+            <a:ext cx="2066543" cy="3931920"/>
           </a:xfrm>
           <a:prstGeom prst="rect">
             <a:avLst/>
@@ -5160,34 +5351,34 @@
           <a:p>
             <a:pPr algn="l"/>
             <a:r>
-              <a:rPr sz="900" b="0" i="0">
+              <a:rPr sz="1000" b="0" i="0">
                 <a:solidFill>
                   <a:srgbClr val="1A1A1A"/>
                 </a:solidFill>
               </a:rPr>
-              <a:t>Contact visuel · Sourire authentique · Question ouverte non intrusive
-Ex : 'Bonjour ! Vous avez 2 minutes pour les enfants ?'
-⚠ Éviter : 'Excusez-moi de vous déranger…'</a:t>
-            </a:r>
-          </a:p>
-        </p:txBody>
-      </p:sp>
-      <p:sp>
-        <p:nvSpPr>
-          <p:cNvPr id="10" name="Rectangle 9"/>
+              <a:t>Contact visuel · Sourire · Question ouverte
+'Bonjour ! Vous avez 2 petites minutes
+pour les enfants ?'</a:t>
+            </a:r>
+          </a:p>
+        </p:txBody>
+      </p:sp>
+      <p:sp>
+        <p:nvSpPr>
+          <p:cNvPr id="14" name="Rectangle 13"/>
           <p:cNvSpPr/>
           <p:nvPr/>
         </p:nvSpPr>
         <p:spPr>
           <a:xfrm>
-            <a:off x="2615184" y="822960"/>
-            <a:ext cx="2286000" cy="320040"/>
+            <a:off x="2615184" y="804672"/>
+            <a:ext cx="2286000" cy="347472"/>
           </a:xfrm>
           <a:prstGeom prst="rect">
             <a:avLst/>
           </a:prstGeom>
           <a:solidFill>
-            <a:srgbClr val="005050"/>
+            <a:srgbClr val="008080"/>
           </a:solidFill>
           <a:ln>
             <a:noFill/>
@@ -5217,14 +5408,14 @@
       </p:sp>
       <p:sp>
         <p:nvSpPr>
-          <p:cNvPr id="11" name="TextBox 10"/>
+          <p:cNvPr id="15" name="TextBox 14"/>
           <p:cNvSpPr txBox="1"/>
           <p:nvPr/>
         </p:nvSpPr>
         <p:spPr>
           <a:xfrm>
-            <a:off x="2688336" y="850392"/>
-            <a:ext cx="2139696" cy="256032"/>
+            <a:off x="2688336" y="832104"/>
+            <a:ext cx="2139696" cy="274320"/>
           </a:xfrm>
           <a:prstGeom prst="rect">
             <a:avLst/>
@@ -5251,14 +5442,14 @@
       </p:sp>
       <p:sp>
         <p:nvSpPr>
-          <p:cNvPr id="12" name="Rectangle 11"/>
+          <p:cNvPr id="16" name="Rectangle 15"/>
           <p:cNvSpPr/>
           <p:nvPr/>
         </p:nvSpPr>
         <p:spPr>
           <a:xfrm>
-            <a:off x="2615184" y="1143000"/>
-            <a:ext cx="2286000" cy="4114800"/>
+            <a:off x="2615184" y="1152144"/>
+            <a:ext cx="2286000" cy="4206240"/>
           </a:xfrm>
           <a:prstGeom prst="rect">
             <a:avLst/>
@@ -5268,7 +5459,7 @@
           </a:solidFill>
           <a:ln w="19050">
             <a:solidFill>
-              <a:srgbClr val="005050"/>
+              <a:srgbClr val="008080"/>
             </a:solidFill>
           </a:ln>
         </p:spPr>
@@ -5296,14 +5487,14 @@
       </p:sp>
       <p:sp>
         <p:nvSpPr>
-          <p:cNvPr id="13" name="TextBox 12"/>
+          <p:cNvPr id="17" name="TextBox 16"/>
           <p:cNvSpPr txBox="1"/>
           <p:nvPr/>
         </p:nvSpPr>
         <p:spPr>
           <a:xfrm>
-            <a:off x="2706624" y="1188720"/>
-            <a:ext cx="2103120" cy="3840480"/>
+            <a:off x="2724912" y="1225296"/>
+            <a:ext cx="2066543" cy="3931920"/>
           </a:xfrm>
           <a:prstGeom prst="rect">
             <a:avLst/>
@@ -5318,34 +5509,35 @@
           <a:p>
             <a:pPr algn="l"/>
             <a:r>
-              <a:rPr sz="900" b="0" i="0">
+              <a:rPr sz="1000" b="0" i="0">
                 <a:solidFill>
                   <a:srgbClr val="1A1A1A"/>
                 </a:solidFill>
               </a:rPr>
-              <a:t>Identification claire + légitimité
-Ex : 'Je travaille avec l'UNICEF — nous collectons des fonds pour les enfants en danger.'
-Montrer le badge / la carte officielle</a:t>
-            </a:r>
-          </a:p>
-        </p:txBody>
-      </p:sp>
-      <p:sp>
-        <p:nvSpPr>
-          <p:cNvPr id="14" name="Rectangle 13"/>
+              <a:t>Identification claire
+'Je travaille avec l'UNICEF — nous
+collectons des fonds
+pour les enfants en danger.'</a:t>
+            </a:r>
+          </a:p>
+        </p:txBody>
+      </p:sp>
+      <p:sp>
+        <p:nvSpPr>
+          <p:cNvPr id="18" name="Rectangle 17"/>
           <p:cNvSpPr/>
           <p:nvPr/>
         </p:nvSpPr>
         <p:spPr>
           <a:xfrm>
-            <a:off x="4956048" y="822960"/>
-            <a:ext cx="2286000" cy="320040"/>
+            <a:off x="4956048" y="804672"/>
+            <a:ext cx="2286000" cy="347472"/>
           </a:xfrm>
           <a:prstGeom prst="rect">
             <a:avLst/>
           </a:prstGeom>
           <a:solidFill>
-            <a:srgbClr val="4A9070"/>
+            <a:srgbClr val="2A7A50"/>
           </a:solidFill>
           <a:ln>
             <a:noFill/>
@@ -5375,14 +5567,14 @@
       </p:sp>
       <p:sp>
         <p:nvSpPr>
-          <p:cNvPr id="15" name="TextBox 14"/>
+          <p:cNvPr id="19" name="TextBox 18"/>
           <p:cNvSpPr txBox="1"/>
           <p:nvPr/>
         </p:nvSpPr>
         <p:spPr>
           <a:xfrm>
-            <a:off x="5029200" y="850392"/>
-            <a:ext cx="2139696" cy="256032"/>
+            <a:off x="5029200" y="832104"/>
+            <a:ext cx="2139696" cy="274320"/>
           </a:xfrm>
           <a:prstGeom prst="rect">
             <a:avLst/>
@@ -5409,14 +5601,14 @@
       </p:sp>
       <p:sp>
         <p:nvSpPr>
-          <p:cNvPr id="16" name="Rectangle 15"/>
+          <p:cNvPr id="20" name="Rectangle 19"/>
           <p:cNvSpPr/>
           <p:nvPr/>
         </p:nvSpPr>
         <p:spPr>
           <a:xfrm>
-            <a:off x="4956048" y="1143000"/>
-            <a:ext cx="2286000" cy="4114800"/>
+            <a:off x="4956048" y="1152144"/>
+            <a:ext cx="2286000" cy="4206240"/>
           </a:xfrm>
           <a:prstGeom prst="rect">
             <a:avLst/>
@@ -5426,7 +5618,7 @@
           </a:solidFill>
           <a:ln w="19050">
             <a:solidFill>
-              <a:srgbClr val="4A9070"/>
+              <a:srgbClr val="2A7A50"/>
             </a:solidFill>
           </a:ln>
         </p:spPr>
@@ -5454,14 +5646,14 @@
       </p:sp>
       <p:sp>
         <p:nvSpPr>
-          <p:cNvPr id="17" name="TextBox 16"/>
+          <p:cNvPr id="21" name="TextBox 20"/>
           <p:cNvSpPr txBox="1"/>
           <p:nvPr/>
         </p:nvSpPr>
         <p:spPr>
           <a:xfrm>
-            <a:off x="5047488" y="1188720"/>
-            <a:ext cx="2103120" cy="3840480"/>
+            <a:off x="5065776" y="1225296"/>
+            <a:ext cx="2066543" cy="3931920"/>
           </a:xfrm>
           <a:prstGeom prst="rect">
             <a:avLst/>
@@ -5476,34 +5668,35 @@
           <a:p>
             <a:pPr algn="l"/>
             <a:r>
-              <a:rPr sz="900" b="0" i="0">
+              <a:rPr sz="1000" b="0" i="0">
                 <a:solidFill>
                   <a:srgbClr val="1A1A1A"/>
                 </a:solidFill>
               </a:rPr>
-              <a:t>Histoire d'1 enfant bénéficiaire spécifique · Prénom + pays + situation
-Ex : 'Aisha, 4 ans, Yémen — sans votre aide, elle n'avait pas accès à l'eau potable.'
-Faits + chiffre concret + résolution par le don</a:t>
-            </a:r>
-          </a:p>
-        </p:txBody>
-      </p:sp>
-      <p:sp>
-        <p:nvSpPr>
-          <p:cNvPr id="18" name="Rectangle 17"/>
+              <a:t>Histoire vraie d'1 enfant
+Prénom + pays + situation
+Fait chiffré + résolution
+par le don</a:t>
+            </a:r>
+          </a:p>
+        </p:txBody>
+      </p:sp>
+      <p:sp>
+        <p:nvSpPr>
+          <p:cNvPr id="22" name="Rectangle 21"/>
           <p:cNvSpPr/>
           <p:nvPr/>
         </p:nvSpPr>
         <p:spPr>
           <a:xfrm>
-            <a:off x="7296912" y="822960"/>
-            <a:ext cx="2286000" cy="320040"/>
+            <a:off x="7296912" y="804672"/>
+            <a:ext cx="2286000" cy="347472"/>
           </a:xfrm>
           <a:prstGeom prst="rect">
             <a:avLst/>
           </a:prstGeom>
           <a:solidFill>
-            <a:srgbClr val="C9A84C"/>
+            <a:srgbClr val="C08010"/>
           </a:solidFill>
           <a:ln>
             <a:noFill/>
@@ -5533,14 +5726,14 @@
       </p:sp>
       <p:sp>
         <p:nvSpPr>
-          <p:cNvPr id="19" name="TextBox 18"/>
+          <p:cNvPr id="23" name="TextBox 22"/>
           <p:cNvSpPr txBox="1"/>
           <p:nvPr/>
         </p:nvSpPr>
         <p:spPr>
           <a:xfrm>
-            <a:off x="7370064" y="850392"/>
-            <a:ext cx="2139696" cy="256032"/>
+            <a:off x="7370064" y="832104"/>
+            <a:ext cx="2139696" cy="274320"/>
           </a:xfrm>
           <a:prstGeom prst="rect">
             <a:avLst/>
@@ -5567,14 +5760,14 @@
       </p:sp>
       <p:sp>
         <p:nvSpPr>
-          <p:cNvPr id="20" name="Rectangle 19"/>
+          <p:cNvPr id="24" name="Rectangle 23"/>
           <p:cNvSpPr/>
           <p:nvPr/>
         </p:nvSpPr>
         <p:spPr>
           <a:xfrm>
-            <a:off x="7296912" y="1143000"/>
-            <a:ext cx="2286000" cy="4114800"/>
+            <a:off x="7296912" y="1152144"/>
+            <a:ext cx="2286000" cy="4206240"/>
           </a:xfrm>
           <a:prstGeom prst="rect">
             <a:avLst/>
@@ -5584,7 +5777,7 @@
           </a:solidFill>
           <a:ln w="19050">
             <a:solidFill>
-              <a:srgbClr val="C9A84C"/>
+              <a:srgbClr val="C08010"/>
             </a:solidFill>
           </a:ln>
         </p:spPr>
@@ -5612,14 +5805,14 @@
       </p:sp>
       <p:sp>
         <p:nvSpPr>
-          <p:cNvPr id="21" name="TextBox 20"/>
+          <p:cNvPr id="25" name="TextBox 24"/>
           <p:cNvSpPr txBox="1"/>
           <p:nvPr/>
         </p:nvSpPr>
         <p:spPr>
           <a:xfrm>
-            <a:off x="7388352" y="1188720"/>
-            <a:ext cx="2103120" cy="3840480"/>
+            <a:off x="7406640" y="1225296"/>
+            <a:ext cx="2066543" cy="3931920"/>
           </a:xfrm>
           <a:prstGeom prst="rect">
             <a:avLst/>
@@ -5634,34 +5827,35 @@
           <a:p>
             <a:pPr algn="l"/>
             <a:r>
-              <a:rPr sz="900" b="0" i="0">
+              <a:rPr sz="1000" b="0" i="0">
                 <a:solidFill>
                   <a:srgbClr val="1A1A1A"/>
                 </a:solidFill>
               </a:rPr>
-              <a:t>Montant suggéré adapté au profil observé (100–300 DH/mois)
-Bénéfices donateur : reçu fiscal, rapport annuel, impact tracé
-Ex : '100 DH/mois = 3 DH/jour = 1 café. Impact : 6 enfants protégés/an.'</a:t>
-            </a:r>
-          </a:p>
-        </p:txBody>
-      </p:sp>
-      <p:sp>
-        <p:nvSpPr>
-          <p:cNvPr id="22" name="Rectangle 21"/>
+              <a:t>'10€/mois c'est 30 centimes
+par jour — moins qu'un café.
+En 1 an vous offrez l'accès
+aux soins à 6 enfants.'</a:t>
+            </a:r>
+          </a:p>
+        </p:txBody>
+      </p:sp>
+      <p:sp>
+        <p:nvSpPr>
+          <p:cNvPr id="26" name="Rectangle 25"/>
           <p:cNvSpPr/>
           <p:nvPr/>
         </p:nvSpPr>
         <p:spPr>
           <a:xfrm>
-            <a:off x="9637776" y="822960"/>
-            <a:ext cx="2286000" cy="320040"/>
+            <a:off x="9637776" y="804672"/>
+            <a:ext cx="2286000" cy="347472"/>
           </a:xfrm>
           <a:prstGeom prst="rect">
             <a:avLst/>
           </a:prstGeom>
           <a:solidFill>
-            <a:srgbClr val="D27A42"/>
+            <a:srgbClr val="FF0000"/>
           </a:solidFill>
           <a:ln>
             <a:noFill/>
@@ -5691,14 +5885,14 @@
       </p:sp>
       <p:sp>
         <p:nvSpPr>
-          <p:cNvPr id="23" name="TextBox 22"/>
+          <p:cNvPr id="27" name="TextBox 26"/>
           <p:cNvSpPr txBox="1"/>
           <p:nvPr/>
         </p:nvSpPr>
         <p:spPr>
           <a:xfrm>
-            <a:off x="9710928" y="850392"/>
-            <a:ext cx="2139696" cy="256032"/>
+            <a:off x="9710928" y="832104"/>
+            <a:ext cx="2139696" cy="274320"/>
           </a:xfrm>
           <a:prstGeom prst="rect">
             <a:avLst/>
@@ -5725,14 +5919,14 @@
       </p:sp>
       <p:sp>
         <p:nvSpPr>
-          <p:cNvPr id="24" name="Rectangle 23"/>
+          <p:cNvPr id="28" name="Rectangle 27"/>
           <p:cNvSpPr/>
           <p:nvPr/>
         </p:nvSpPr>
         <p:spPr>
           <a:xfrm>
-            <a:off x="9637776" y="1143000"/>
-            <a:ext cx="2286000" cy="4114800"/>
+            <a:off x="9637776" y="1152144"/>
+            <a:ext cx="2286000" cy="4206240"/>
           </a:xfrm>
           <a:prstGeom prst="rect">
             <a:avLst/>
@@ -5742,7 +5936,7 @@
           </a:solidFill>
           <a:ln w="19050">
             <a:solidFill>
-              <a:srgbClr val="D27A42"/>
+              <a:srgbClr val="FF0000"/>
             </a:solidFill>
           </a:ln>
         </p:spPr>
@@ -5770,14 +5964,14 @@
       </p:sp>
       <p:sp>
         <p:nvSpPr>
-          <p:cNvPr id="25" name="TextBox 24"/>
+          <p:cNvPr id="29" name="TextBox 28"/>
           <p:cNvSpPr txBox="1"/>
           <p:nvPr/>
         </p:nvSpPr>
         <p:spPr>
           <a:xfrm>
-            <a:off x="9729216" y="1188720"/>
-            <a:ext cx="2103120" cy="3840480"/>
+            <a:off x="9747504" y="1225296"/>
+            <a:ext cx="2066543" cy="3931920"/>
           </a:xfrm>
           <a:prstGeom prst="rect">
             <a:avLst/>
@@ -5792,28 +5986,72 @@
           <a:p>
             <a:pPr algn="l"/>
             <a:r>
-              <a:rPr sz="900" b="0" i="0">
+              <a:rPr sz="1000" b="0" i="0">
                 <a:solidFill>
                   <a:srgbClr val="1A1A1A"/>
                 </a:solidFill>
               </a:rPr>
-              <a:t>Formulaire clair · Accompagner la signature · Remerciement sincère
-Ex : 'Merci ! Vous allez recevoir votre confirmation par SMS dans 24h.'
-Remettre la brochure UNICEF + coordonnées contact</a:t>
-            </a:r>
-          </a:p>
-        </p:txBody>
-      </p:sp>
-      <p:sp>
-        <p:nvSpPr>
-          <p:cNvPr id="26" name="TextBox 25"/>
+              <a:t>Formulaire simple · Accompagner
+la signature · Remerciement sincère
+'Merci ! Vous recevrez votre
+confirmation par SMS sous 24h.'</a:t>
+            </a:r>
+          </a:p>
+        </p:txBody>
+      </p:sp>
+      <p:sp>
+        <p:nvSpPr>
+          <p:cNvPr id="30" name="Rectangle 29"/>
+          <p:cNvSpPr/>
+          <p:nvPr/>
+        </p:nvSpPr>
+        <p:spPr>
+          <a:xfrm>
+            <a:off x="274320" y="5486400"/>
+            <a:ext cx="11640312" cy="402336"/>
+          </a:xfrm>
+          <a:prstGeom prst="rect">
+            <a:avLst/>
+          </a:prstGeom>
+          <a:solidFill>
+            <a:srgbClr val="005555"/>
+          </a:solidFill>
+          <a:ln>
+            <a:noFill/>
+          </a:ln>
+        </p:spPr>
+        <p:style>
+          <a:lnRef idx="1">
+            <a:schemeClr val="accent1"/>
+          </a:lnRef>
+          <a:fillRef idx="3">
+            <a:schemeClr val="accent1"/>
+          </a:fillRef>
+          <a:effectRef idx="2">
+            <a:schemeClr val="accent1"/>
+          </a:effectRef>
+          <a:fontRef idx="minor">
+            <a:schemeClr val="lt1"/>
+          </a:fontRef>
+        </p:style>
+        <p:txBody>
+          <a:bodyPr rtlCol="0" anchor="ctr"/>
+          <a:lstStyle/>
+          <a:p>
+            <a:pPr algn="ctr"/>
+          </a:p>
+        </p:txBody>
+      </p:sp>
+      <p:sp>
+        <p:nvSpPr>
+          <p:cNvPr id="31" name="TextBox 30"/>
           <p:cNvSpPr txBox="1"/>
           <p:nvPr/>
         </p:nvSpPr>
         <p:spPr>
           <a:xfrm>
-            <a:off x="274320" y="5394960"/>
-            <a:ext cx="11612880" cy="320040"/>
+            <a:off x="411479" y="5559552"/>
+            <a:ext cx="11365992" cy="256032"/>
           </a:xfrm>
           <a:prstGeom prst="rect">
             <a:avLst/>
@@ -5826,28 +6064,175 @@
           </a:bodyPr>
           <a:lstStyle/>
           <a:p>
-            <a:pPr algn="ctr"/>
-            <a:r>
-              <a:rPr sz="1000" b="1" i="0">
+            <a:pPr algn="l"/>
+            <a:r>
+              <a:rPr sz="1000" b="0" i="0">
                 <a:solidFill>
-                  <a:srgbClr val="005050"/>
+                  <a:srgbClr val="FFFFFF"/>
                 </a:solidFill>
               </a:rPr>
-              <a:t>Durée totale script standard : 2 min 15 sec · Version express (passant pressé) : 55 sec</a:t>
-            </a:r>
-          </a:p>
-        </p:txBody>
-      </p:sp>
-      <p:sp>
-        <p:nvSpPr>
-          <p:cNvPr id="27" name="TextBox 26"/>
+              <a:t>Durée totale : 2 min 15 sec  ·  Version express (passant pressé) : 55 sec  ·  Le silence après la proposition est votre allié — ne le brisez pas.</a:t>
+            </a:r>
+          </a:p>
+        </p:txBody>
+      </p:sp>
+    </p:spTree>
+  </p:cSld>
+  <p:clrMapOvr>
+    <a:masterClrMapping/>
+  </p:clrMapOvr>
+</p:sld>
+</file>
+
+<file path=ppt/slides/slide4.xml><?xml version="1.0" encoding="utf-8"?>
+<p:sld xmlns:a="http://schemas.openxmlformats.org/drawingml/2006/main" xmlns:p="http://schemas.openxmlformats.org/presentationml/2006/main" xmlns:r="http://schemas.openxmlformats.org/officeDocument/2006/relationships">
+  <p:cSld>
+    <p:spTree>
+      <p:nvGrpSpPr>
+        <p:cNvPr id="1" name=""/>
+        <p:cNvGrpSpPr/>
+        <p:nvPr/>
+      </p:nvGrpSpPr>
+      <p:grpSpPr/>
+      <p:sp>
+        <p:nvSpPr>
+          <p:cNvPr id="2" name="Rectangle 1"/>
+          <p:cNvSpPr/>
+          <p:nvPr/>
+        </p:nvSpPr>
+        <p:spPr>
+          <a:xfrm>
+            <a:off x="0" y="0"/>
+            <a:ext cx="12188952" cy="6858000"/>
+          </a:xfrm>
+          <a:prstGeom prst="rect">
+            <a:avLst/>
+          </a:prstGeom>
+          <a:solidFill>
+            <a:srgbClr val="F0F7F7"/>
+          </a:solidFill>
+          <a:ln>
+            <a:noFill/>
+          </a:ln>
+        </p:spPr>
+        <p:style>
+          <a:lnRef idx="1">
+            <a:schemeClr val="accent1"/>
+          </a:lnRef>
+          <a:fillRef idx="3">
+            <a:schemeClr val="accent1"/>
+          </a:fillRef>
+          <a:effectRef idx="2">
+            <a:schemeClr val="accent1"/>
+          </a:effectRef>
+          <a:fontRef idx="minor">
+            <a:schemeClr val="lt1"/>
+          </a:fontRef>
+        </p:style>
+        <p:txBody>
+          <a:bodyPr rtlCol="0" anchor="ctr"/>
+          <a:lstStyle/>
+          <a:p>
+            <a:pPr algn="ctr"/>
+          </a:p>
+        </p:txBody>
+      </p:sp>
+      <p:sp>
+        <p:nvSpPr>
+          <p:cNvPr id="3" name="Rectangle 2"/>
+          <p:cNvSpPr/>
+          <p:nvPr/>
+        </p:nvSpPr>
+        <p:spPr>
+          <a:xfrm>
+            <a:off x="0" y="0"/>
+            <a:ext cx="12188952" cy="658368"/>
+          </a:xfrm>
+          <a:prstGeom prst="rect">
+            <a:avLst/>
+          </a:prstGeom>
+          <a:solidFill>
+            <a:srgbClr val="005555"/>
+          </a:solidFill>
+          <a:ln>
+            <a:noFill/>
+          </a:ln>
+        </p:spPr>
+        <p:style>
+          <a:lnRef idx="1">
+            <a:schemeClr val="accent1"/>
+          </a:lnRef>
+          <a:fillRef idx="3">
+            <a:schemeClr val="accent1"/>
+          </a:fillRef>
+          <a:effectRef idx="2">
+            <a:schemeClr val="accent1"/>
+          </a:effectRef>
+          <a:fontRef idx="minor">
+            <a:schemeClr val="lt1"/>
+          </a:fontRef>
+        </p:style>
+        <p:txBody>
+          <a:bodyPr rtlCol="0" anchor="ctr"/>
+          <a:lstStyle/>
+          <a:p>
+            <a:pPr algn="ctr"/>
+          </a:p>
+        </p:txBody>
+      </p:sp>
+      <p:sp>
+        <p:nvSpPr>
+          <p:cNvPr id="4" name="Rectangle 3"/>
+          <p:cNvSpPr/>
+          <p:nvPr/>
+        </p:nvSpPr>
+        <p:spPr>
+          <a:xfrm>
+            <a:off x="0" y="640080"/>
+            <a:ext cx="12188952" cy="54864"/>
+          </a:xfrm>
+          <a:prstGeom prst="rect">
+            <a:avLst/>
+          </a:prstGeom>
+          <a:solidFill>
+            <a:srgbClr val="FF0000"/>
+          </a:solidFill>
+          <a:ln>
+            <a:noFill/>
+          </a:ln>
+        </p:spPr>
+        <p:style>
+          <a:lnRef idx="1">
+            <a:schemeClr val="accent1"/>
+          </a:lnRef>
+          <a:fillRef idx="3">
+            <a:schemeClr val="accent1"/>
+          </a:fillRef>
+          <a:effectRef idx="2">
+            <a:schemeClr val="accent1"/>
+          </a:effectRef>
+          <a:fontRef idx="minor">
+            <a:schemeClr val="lt1"/>
+          </a:fontRef>
+        </p:style>
+        <p:txBody>
+          <a:bodyPr rtlCol="0" anchor="ctr"/>
+          <a:lstStyle/>
+          <a:p>
+            <a:pPr algn="ctr"/>
+          </a:p>
+        </p:txBody>
+      </p:sp>
+      <p:sp>
+        <p:nvSpPr>
+          <p:cNvPr id="5" name="TextBox 4"/>
           <p:cNvSpPr txBox="1"/>
           <p:nvPr/>
         </p:nvSpPr>
         <p:spPr>
           <a:xfrm>
-            <a:off x="0" y="6492240"/>
-            <a:ext cx="12188952" cy="365760"/>
+            <a:off x="164592" y="64008"/>
+            <a:ext cx="685800" cy="530352"/>
           </a:xfrm>
           <a:prstGeom prst="rect">
             <a:avLst/>
@@ -5860,14 +6245,1034 @@
           </a:bodyPr>
           <a:lstStyle/>
           <a:p>
-            <a:pPr algn="ctr"/>
-            <a:r>
-              <a:rPr sz="800" b="0" i="0">
+            <a:pPr algn="l"/>
+            <a:r>
+              <a:rPr sz="2000" b="1" i="0">
                 <a:solidFill>
-                  <a:srgbClr val="888888"/>
+                  <a:srgbClr val="FFFFFF"/>
                 </a:solidFill>
               </a:rPr>
-              <a:t>SHY-Performance · V6-01062026SHY-TE</a:t>
+              <a:t>SHY</a:t>
+            </a:r>
+          </a:p>
+        </p:txBody>
+      </p:sp>
+      <p:sp>
+        <p:nvSpPr>
+          <p:cNvPr id="6" name="Rectangle 5"/>
+          <p:cNvSpPr/>
+          <p:nvPr/>
+        </p:nvSpPr>
+        <p:spPr>
+          <a:xfrm>
+            <a:off x="914400" y="91440"/>
+            <a:ext cx="36576" cy="475488"/>
+          </a:xfrm>
+          <a:prstGeom prst="rect">
+            <a:avLst/>
+          </a:prstGeom>
+          <a:solidFill>
+            <a:srgbClr val="FF0000"/>
+          </a:solidFill>
+          <a:ln>
+            <a:noFill/>
+          </a:ln>
+        </p:spPr>
+        <p:style>
+          <a:lnRef idx="1">
+            <a:schemeClr val="accent1"/>
+          </a:lnRef>
+          <a:fillRef idx="3">
+            <a:schemeClr val="accent1"/>
+          </a:fillRef>
+          <a:effectRef idx="2">
+            <a:schemeClr val="accent1"/>
+          </a:effectRef>
+          <a:fontRef idx="minor">
+            <a:schemeClr val="lt1"/>
+          </a:fontRef>
+        </p:style>
+        <p:txBody>
+          <a:bodyPr rtlCol="0" anchor="ctr"/>
+          <a:lstStyle/>
+          <a:p>
+            <a:pPr algn="ctr"/>
+          </a:p>
+        </p:txBody>
+      </p:sp>
+      <p:sp>
+        <p:nvSpPr>
+          <p:cNvPr id="7" name="TextBox 6"/>
+          <p:cNvSpPr txBox="1"/>
+          <p:nvPr/>
+        </p:nvSpPr>
+        <p:spPr>
+          <a:xfrm>
+            <a:off x="1024128" y="91440"/>
+            <a:ext cx="10881360" cy="475488"/>
+          </a:xfrm>
+          <a:prstGeom prst="rect">
+            <a:avLst/>
+          </a:prstGeom>
+          <a:noFill/>
+        </p:spPr>
+        <p:txBody>
+          <a:bodyPr wrap="square">
+            <a:spAutoFit/>
+          </a:bodyPr>
+          <a:lstStyle/>
+          <a:p>
+            <a:pPr algn="l"/>
+            <a:r>
+              <a:rPr sz="1700" b="1" i="0">
+                <a:solidFill>
+                  <a:srgbClr val="FFFFFF"/>
+                </a:solidFill>
+              </a:rPr>
+              <a:t>L'Impact Story — Comment Raconter une Histoire qui Touche</a:t>
+            </a:r>
+          </a:p>
+        </p:txBody>
+      </p:sp>
+      <p:sp>
+        <p:nvSpPr>
+          <p:cNvPr id="8" name="Rectangle 7"/>
+          <p:cNvSpPr/>
+          <p:nvPr/>
+        </p:nvSpPr>
+        <p:spPr>
+          <a:xfrm>
+            <a:off x="0" y="6492240"/>
+            <a:ext cx="12188952" cy="365760"/>
+          </a:xfrm>
+          <a:prstGeom prst="rect">
+            <a:avLst/>
+          </a:prstGeom>
+          <a:solidFill>
+            <a:srgbClr val="005555"/>
+          </a:solidFill>
+          <a:ln>
+            <a:noFill/>
+          </a:ln>
+        </p:spPr>
+        <p:style>
+          <a:lnRef idx="1">
+            <a:schemeClr val="accent1"/>
+          </a:lnRef>
+          <a:fillRef idx="3">
+            <a:schemeClr val="accent1"/>
+          </a:fillRef>
+          <a:effectRef idx="2">
+            <a:schemeClr val="accent1"/>
+          </a:effectRef>
+          <a:fontRef idx="minor">
+            <a:schemeClr val="lt1"/>
+          </a:fontRef>
+        </p:style>
+        <p:txBody>
+          <a:bodyPr rtlCol="0" anchor="ctr"/>
+          <a:lstStyle/>
+          <a:p>
+            <a:pPr algn="ctr"/>
+          </a:p>
+        </p:txBody>
+      </p:sp>
+      <p:sp>
+        <p:nvSpPr>
+          <p:cNvPr id="9" name="TextBox 8"/>
+          <p:cNvSpPr txBox="1"/>
+          <p:nvPr/>
+        </p:nvSpPr>
+        <p:spPr>
+          <a:xfrm>
+            <a:off x="0" y="6519672"/>
+            <a:ext cx="12188952" cy="274320"/>
+          </a:xfrm>
+          <a:prstGeom prst="rect">
+            <a:avLst/>
+          </a:prstGeom>
+          <a:noFill/>
+        </p:spPr>
+        <p:txBody>
+          <a:bodyPr wrap="square">
+            <a:spAutoFit/>
+          </a:bodyPr>
+          <a:lstStyle/>
+          <a:p>
+            <a:pPr algn="ctr"/>
+            <a:r>
+              <a:rPr sz="900" b="0" i="0">
+                <a:solidFill>
+                  <a:srgbClr val="FFFFFF"/>
+                </a:solidFill>
+              </a:rPr>
+              <a:t>SHY-Performance  ·  Formation FIM  ·  V6-01062026SHY-TE</a:t>
+            </a:r>
+          </a:p>
+        </p:txBody>
+      </p:sp>
+      <p:sp>
+        <p:nvSpPr>
+          <p:cNvPr id="10" name="TextBox 9"/>
+          <p:cNvSpPr txBox="1"/>
+          <p:nvPr/>
+        </p:nvSpPr>
+        <p:spPr>
+          <a:xfrm>
+            <a:off x="320040" y="804672"/>
+            <a:ext cx="11521440" cy="640080"/>
+          </a:xfrm>
+          <a:prstGeom prst="rect">
+            <a:avLst/>
+          </a:prstGeom>
+          <a:noFill/>
+        </p:spPr>
+        <p:txBody>
+          <a:bodyPr wrap="square">
+            <a:spAutoFit/>
+          </a:bodyPr>
+          <a:lstStyle/>
+          <a:p>
+            <a:pPr algn="l"/>
+            <a:r>
+              <a:rPr sz="1200" b="0" i="0">
+                <a:solidFill>
+                  <a:srgbClr val="1A1A1A"/>
+                </a:solidFill>
+              </a:rPr>
+              <a:t>L'Impact Story est le cœur de votre script. C'est ce moment précis où le donateur passe
+de 'intéressé' à 'convaincu'. Voici comment la construire :</a:t>
+            </a:r>
+          </a:p>
+        </p:txBody>
+      </p:sp>
+      <p:sp>
+        <p:nvSpPr>
+          <p:cNvPr id="11" name="Rectangle 10"/>
+          <p:cNvSpPr/>
+          <p:nvPr/>
+        </p:nvSpPr>
+        <p:spPr>
+          <a:xfrm>
+            <a:off x="274320" y="1554480"/>
+            <a:ext cx="2816352" cy="329184"/>
+          </a:xfrm>
+          <a:prstGeom prst="rect">
+            <a:avLst/>
+          </a:prstGeom>
+          <a:solidFill>
+            <a:srgbClr val="005555"/>
+          </a:solidFill>
+          <a:ln>
+            <a:noFill/>
+          </a:ln>
+        </p:spPr>
+        <p:style>
+          <a:lnRef idx="1">
+            <a:schemeClr val="accent1"/>
+          </a:lnRef>
+          <a:fillRef idx="3">
+            <a:schemeClr val="accent1"/>
+          </a:fillRef>
+          <a:effectRef idx="2">
+            <a:schemeClr val="accent1"/>
+          </a:effectRef>
+          <a:fontRef idx="minor">
+            <a:schemeClr val="lt1"/>
+          </a:fontRef>
+        </p:style>
+        <p:txBody>
+          <a:bodyPr rtlCol="0" anchor="ctr"/>
+          <a:lstStyle/>
+          <a:p>
+            <a:pPr algn="ctr"/>
+          </a:p>
+        </p:txBody>
+      </p:sp>
+      <p:sp>
+        <p:nvSpPr>
+          <p:cNvPr id="12" name="TextBox 11"/>
+          <p:cNvSpPr txBox="1"/>
+          <p:nvPr/>
+        </p:nvSpPr>
+        <p:spPr>
+          <a:xfrm>
+            <a:off x="365760" y="1581912"/>
+            <a:ext cx="2633472" cy="256032"/>
+          </a:xfrm>
+          <a:prstGeom prst="rect">
+            <a:avLst/>
+          </a:prstGeom>
+          <a:noFill/>
+        </p:spPr>
+        <p:txBody>
+          <a:bodyPr wrap="square">
+            <a:spAutoFit/>
+          </a:bodyPr>
+          <a:lstStyle/>
+          <a:p>
+            <a:pPr algn="l"/>
+            <a:r>
+              <a:rPr sz="1000" b="1" i="0">
+                <a:solidFill>
+                  <a:srgbClr val="FFFFFF"/>
+                </a:solidFill>
+              </a:rPr>
+              <a:t>PERSONNAGE</a:t>
+            </a:r>
+          </a:p>
+        </p:txBody>
+      </p:sp>
+      <p:sp>
+        <p:nvSpPr>
+          <p:cNvPr id="13" name="Rectangle 12"/>
+          <p:cNvSpPr/>
+          <p:nvPr/>
+        </p:nvSpPr>
+        <p:spPr>
+          <a:xfrm>
+            <a:off x="274320" y="1883664"/>
+            <a:ext cx="2816352" cy="2651760"/>
+          </a:xfrm>
+          <a:prstGeom prst="rect">
+            <a:avLst/>
+          </a:prstGeom>
+          <a:solidFill>
+            <a:srgbClr val="FFFFFF"/>
+          </a:solidFill>
+          <a:ln w="19050">
+            <a:solidFill>
+              <a:srgbClr val="005555"/>
+            </a:solidFill>
+          </a:ln>
+        </p:spPr>
+        <p:style>
+          <a:lnRef idx="1">
+            <a:schemeClr val="accent1"/>
+          </a:lnRef>
+          <a:fillRef idx="3">
+            <a:schemeClr val="accent1"/>
+          </a:fillRef>
+          <a:effectRef idx="2">
+            <a:schemeClr val="accent1"/>
+          </a:effectRef>
+          <a:fontRef idx="minor">
+            <a:schemeClr val="lt1"/>
+          </a:fontRef>
+        </p:style>
+        <p:txBody>
+          <a:bodyPr rtlCol="0" anchor="ctr"/>
+          <a:lstStyle/>
+          <a:p>
+            <a:pPr algn="ctr"/>
+          </a:p>
+        </p:txBody>
+      </p:sp>
+      <p:sp>
+        <p:nvSpPr>
+          <p:cNvPr id="14" name="TextBox 13"/>
+          <p:cNvSpPr txBox="1"/>
+          <p:nvPr/>
+        </p:nvSpPr>
+        <p:spPr>
+          <a:xfrm>
+            <a:off x="402336" y="1956816"/>
+            <a:ext cx="2560320" cy="2487168"/>
+          </a:xfrm>
+          <a:prstGeom prst="rect">
+            <a:avLst/>
+          </a:prstGeom>
+          <a:noFill/>
+        </p:spPr>
+        <p:txBody>
+          <a:bodyPr wrap="square">
+            <a:spAutoFit/>
+          </a:bodyPr>
+          <a:lstStyle/>
+          <a:p>
+            <a:pPr algn="l"/>
+            <a:r>
+              <a:rPr sz="1000" b="0" i="0">
+                <a:solidFill>
+                  <a:srgbClr val="1A1A1A"/>
+                </a:solidFill>
+              </a:rPr>
+              <a:t>Donnez un prénom, un âge, un pays.
+'Amara, 3 ans, Sahel.'
+Le donateur doit voir un visage, pas une statistique.</a:t>
+            </a:r>
+          </a:p>
+        </p:txBody>
+      </p:sp>
+      <p:sp>
+        <p:nvSpPr>
+          <p:cNvPr id="15" name="Rectangle 14"/>
+          <p:cNvSpPr/>
+          <p:nvPr/>
+        </p:nvSpPr>
+        <p:spPr>
+          <a:xfrm>
+            <a:off x="3200400" y="1554480"/>
+            <a:ext cx="2816352" cy="329184"/>
+          </a:xfrm>
+          <a:prstGeom prst="rect">
+            <a:avLst/>
+          </a:prstGeom>
+          <a:solidFill>
+            <a:srgbClr val="FF0000"/>
+          </a:solidFill>
+          <a:ln>
+            <a:noFill/>
+          </a:ln>
+        </p:spPr>
+        <p:style>
+          <a:lnRef idx="1">
+            <a:schemeClr val="accent1"/>
+          </a:lnRef>
+          <a:fillRef idx="3">
+            <a:schemeClr val="accent1"/>
+          </a:fillRef>
+          <a:effectRef idx="2">
+            <a:schemeClr val="accent1"/>
+          </a:effectRef>
+          <a:fontRef idx="minor">
+            <a:schemeClr val="lt1"/>
+          </a:fontRef>
+        </p:style>
+        <p:txBody>
+          <a:bodyPr rtlCol="0" anchor="ctr"/>
+          <a:lstStyle/>
+          <a:p>
+            <a:pPr algn="ctr"/>
+          </a:p>
+        </p:txBody>
+      </p:sp>
+      <p:sp>
+        <p:nvSpPr>
+          <p:cNvPr id="16" name="TextBox 15"/>
+          <p:cNvSpPr txBox="1"/>
+          <p:nvPr/>
+        </p:nvSpPr>
+        <p:spPr>
+          <a:xfrm>
+            <a:off x="3291840" y="1581912"/>
+            <a:ext cx="2633472" cy="256032"/>
+          </a:xfrm>
+          <a:prstGeom prst="rect">
+            <a:avLst/>
+          </a:prstGeom>
+          <a:noFill/>
+        </p:spPr>
+        <p:txBody>
+          <a:bodyPr wrap="square">
+            <a:spAutoFit/>
+          </a:bodyPr>
+          <a:lstStyle/>
+          <a:p>
+            <a:pPr algn="l"/>
+            <a:r>
+              <a:rPr sz="1000" b="1" i="0">
+                <a:solidFill>
+                  <a:srgbClr val="FFFFFF"/>
+                </a:solidFill>
+              </a:rPr>
+              <a:t>SITUATION</a:t>
+            </a:r>
+          </a:p>
+        </p:txBody>
+      </p:sp>
+      <p:sp>
+        <p:nvSpPr>
+          <p:cNvPr id="17" name="Rectangle 16"/>
+          <p:cNvSpPr/>
+          <p:nvPr/>
+        </p:nvSpPr>
+        <p:spPr>
+          <a:xfrm>
+            <a:off x="3200400" y="1883664"/>
+            <a:ext cx="2816352" cy="2651760"/>
+          </a:xfrm>
+          <a:prstGeom prst="rect">
+            <a:avLst/>
+          </a:prstGeom>
+          <a:solidFill>
+            <a:srgbClr val="FFFFFF"/>
+          </a:solidFill>
+          <a:ln w="19050">
+            <a:solidFill>
+              <a:srgbClr val="FF0000"/>
+            </a:solidFill>
+          </a:ln>
+        </p:spPr>
+        <p:style>
+          <a:lnRef idx="1">
+            <a:schemeClr val="accent1"/>
+          </a:lnRef>
+          <a:fillRef idx="3">
+            <a:schemeClr val="accent1"/>
+          </a:fillRef>
+          <a:effectRef idx="2">
+            <a:schemeClr val="accent1"/>
+          </a:effectRef>
+          <a:fontRef idx="minor">
+            <a:schemeClr val="lt1"/>
+          </a:fontRef>
+        </p:style>
+        <p:txBody>
+          <a:bodyPr rtlCol="0" anchor="ctr"/>
+          <a:lstStyle/>
+          <a:p>
+            <a:pPr algn="ctr"/>
+          </a:p>
+        </p:txBody>
+      </p:sp>
+      <p:sp>
+        <p:nvSpPr>
+          <p:cNvPr id="18" name="TextBox 17"/>
+          <p:cNvSpPr txBox="1"/>
+          <p:nvPr/>
+        </p:nvSpPr>
+        <p:spPr>
+          <a:xfrm>
+            <a:off x="3328416" y="1956816"/>
+            <a:ext cx="2560320" cy="2487168"/>
+          </a:xfrm>
+          <a:prstGeom prst="rect">
+            <a:avLst/>
+          </a:prstGeom>
+          <a:noFill/>
+        </p:spPr>
+        <p:txBody>
+          <a:bodyPr wrap="square">
+            <a:spAutoFit/>
+          </a:bodyPr>
+          <a:lstStyle/>
+          <a:p>
+            <a:pPr algn="l"/>
+            <a:r>
+              <a:rPr sz="1000" b="0" i="0">
+                <a:solidFill>
+                  <a:srgbClr val="1A1A1A"/>
+                </a:solidFill>
+              </a:rPr>
+              <a:t>Décrivez le danger concret avec 1 seul chiffre.
+'Sans accès à l'eau potable, 1 enfant sur 5
+ne survivra pas à sa première année.'</a:t>
+            </a:r>
+          </a:p>
+        </p:txBody>
+      </p:sp>
+      <p:sp>
+        <p:nvSpPr>
+          <p:cNvPr id="19" name="Rectangle 18"/>
+          <p:cNvSpPr/>
+          <p:nvPr/>
+        </p:nvSpPr>
+        <p:spPr>
+          <a:xfrm>
+            <a:off x="6126480" y="1554480"/>
+            <a:ext cx="2816352" cy="329184"/>
+          </a:xfrm>
+          <a:prstGeom prst="rect">
+            <a:avLst/>
+          </a:prstGeom>
+          <a:solidFill>
+            <a:srgbClr val="C08010"/>
+          </a:solidFill>
+          <a:ln>
+            <a:noFill/>
+          </a:ln>
+        </p:spPr>
+        <p:style>
+          <a:lnRef idx="1">
+            <a:schemeClr val="accent1"/>
+          </a:lnRef>
+          <a:fillRef idx="3">
+            <a:schemeClr val="accent1"/>
+          </a:fillRef>
+          <a:effectRef idx="2">
+            <a:schemeClr val="accent1"/>
+          </a:effectRef>
+          <a:fontRef idx="minor">
+            <a:schemeClr val="lt1"/>
+          </a:fontRef>
+        </p:style>
+        <p:txBody>
+          <a:bodyPr rtlCol="0" anchor="ctr"/>
+          <a:lstStyle/>
+          <a:p>
+            <a:pPr algn="ctr"/>
+          </a:p>
+        </p:txBody>
+      </p:sp>
+      <p:sp>
+        <p:nvSpPr>
+          <p:cNvPr id="20" name="TextBox 19"/>
+          <p:cNvSpPr txBox="1"/>
+          <p:nvPr/>
+        </p:nvSpPr>
+        <p:spPr>
+          <a:xfrm>
+            <a:off x="6217920" y="1581912"/>
+            <a:ext cx="2633472" cy="256032"/>
+          </a:xfrm>
+          <a:prstGeom prst="rect">
+            <a:avLst/>
+          </a:prstGeom>
+          <a:noFill/>
+        </p:spPr>
+        <p:txBody>
+          <a:bodyPr wrap="square">
+            <a:spAutoFit/>
+          </a:bodyPr>
+          <a:lstStyle/>
+          <a:p>
+            <a:pPr algn="l"/>
+            <a:r>
+              <a:rPr sz="1000" b="1" i="0">
+                <a:solidFill>
+                  <a:srgbClr val="FFFFFF"/>
+                </a:solidFill>
+              </a:rPr>
+              <a:t>BASCULE</a:t>
+            </a:r>
+          </a:p>
+        </p:txBody>
+      </p:sp>
+      <p:sp>
+        <p:nvSpPr>
+          <p:cNvPr id="21" name="Rectangle 20"/>
+          <p:cNvSpPr/>
+          <p:nvPr/>
+        </p:nvSpPr>
+        <p:spPr>
+          <a:xfrm>
+            <a:off x="6126480" y="1883664"/>
+            <a:ext cx="2816352" cy="2651760"/>
+          </a:xfrm>
+          <a:prstGeom prst="rect">
+            <a:avLst/>
+          </a:prstGeom>
+          <a:solidFill>
+            <a:srgbClr val="FFFFFF"/>
+          </a:solidFill>
+          <a:ln w="19050">
+            <a:solidFill>
+              <a:srgbClr val="C08010"/>
+            </a:solidFill>
+          </a:ln>
+        </p:spPr>
+        <p:style>
+          <a:lnRef idx="1">
+            <a:schemeClr val="accent1"/>
+          </a:lnRef>
+          <a:fillRef idx="3">
+            <a:schemeClr val="accent1"/>
+          </a:fillRef>
+          <a:effectRef idx="2">
+            <a:schemeClr val="accent1"/>
+          </a:effectRef>
+          <a:fontRef idx="minor">
+            <a:schemeClr val="lt1"/>
+          </a:fontRef>
+        </p:style>
+        <p:txBody>
+          <a:bodyPr rtlCol="0" anchor="ctr"/>
+          <a:lstStyle/>
+          <a:p>
+            <a:pPr algn="ctr"/>
+          </a:p>
+        </p:txBody>
+      </p:sp>
+      <p:sp>
+        <p:nvSpPr>
+          <p:cNvPr id="22" name="TextBox 21"/>
+          <p:cNvSpPr txBox="1"/>
+          <p:nvPr/>
+        </p:nvSpPr>
+        <p:spPr>
+          <a:xfrm>
+            <a:off x="6254496" y="1956816"/>
+            <a:ext cx="2560320" cy="2487168"/>
+          </a:xfrm>
+          <a:prstGeom prst="rect">
+            <a:avLst/>
+          </a:prstGeom>
+          <a:noFill/>
+        </p:spPr>
+        <p:txBody>
+          <a:bodyPr wrap="square">
+            <a:spAutoFit/>
+          </a:bodyPr>
+          <a:lstStyle/>
+          <a:p>
+            <a:pPr algn="l"/>
+            <a:r>
+              <a:rPr sz="1000" b="0" i="0">
+                <a:solidFill>
+                  <a:srgbClr val="1A1A1A"/>
+                </a:solidFill>
+              </a:rPr>
+              <a:t>C'est ici que votre don entre en scène.
+'Grâce aux donateurs comme vous,
+l'UNICEF a livré 50 000 kits eau potable.'</a:t>
+            </a:r>
+          </a:p>
+        </p:txBody>
+      </p:sp>
+      <p:sp>
+        <p:nvSpPr>
+          <p:cNvPr id="23" name="Rectangle 22"/>
+          <p:cNvSpPr/>
+          <p:nvPr/>
+        </p:nvSpPr>
+        <p:spPr>
+          <a:xfrm>
+            <a:off x="9052560" y="1554480"/>
+            <a:ext cx="2816352" cy="329184"/>
+          </a:xfrm>
+          <a:prstGeom prst="rect">
+            <a:avLst/>
+          </a:prstGeom>
+          <a:solidFill>
+            <a:srgbClr val="2A7A50"/>
+          </a:solidFill>
+          <a:ln>
+            <a:noFill/>
+          </a:ln>
+        </p:spPr>
+        <p:style>
+          <a:lnRef idx="1">
+            <a:schemeClr val="accent1"/>
+          </a:lnRef>
+          <a:fillRef idx="3">
+            <a:schemeClr val="accent1"/>
+          </a:fillRef>
+          <a:effectRef idx="2">
+            <a:schemeClr val="accent1"/>
+          </a:effectRef>
+          <a:fontRef idx="minor">
+            <a:schemeClr val="lt1"/>
+          </a:fontRef>
+        </p:style>
+        <p:txBody>
+          <a:bodyPr rtlCol="0" anchor="ctr"/>
+          <a:lstStyle/>
+          <a:p>
+            <a:pPr algn="ctr"/>
+          </a:p>
+        </p:txBody>
+      </p:sp>
+      <p:sp>
+        <p:nvSpPr>
+          <p:cNvPr id="24" name="TextBox 23"/>
+          <p:cNvSpPr txBox="1"/>
+          <p:nvPr/>
+        </p:nvSpPr>
+        <p:spPr>
+          <a:xfrm>
+            <a:off x="9144000" y="1581912"/>
+            <a:ext cx="2633472" cy="256032"/>
+          </a:xfrm>
+          <a:prstGeom prst="rect">
+            <a:avLst/>
+          </a:prstGeom>
+          <a:noFill/>
+        </p:spPr>
+        <p:txBody>
+          <a:bodyPr wrap="square">
+            <a:spAutoFit/>
+          </a:bodyPr>
+          <a:lstStyle/>
+          <a:p>
+            <a:pPr algn="l"/>
+            <a:r>
+              <a:rPr sz="1000" b="1" i="0">
+                <a:solidFill>
+                  <a:srgbClr val="FFFFFF"/>
+                </a:solidFill>
+              </a:rPr>
+              <a:t>RÉSOLUTION</a:t>
+            </a:r>
+          </a:p>
+        </p:txBody>
+      </p:sp>
+      <p:sp>
+        <p:nvSpPr>
+          <p:cNvPr id="25" name="Rectangle 24"/>
+          <p:cNvSpPr/>
+          <p:nvPr/>
+        </p:nvSpPr>
+        <p:spPr>
+          <a:xfrm>
+            <a:off x="9052560" y="1883664"/>
+            <a:ext cx="2816352" cy="2651760"/>
+          </a:xfrm>
+          <a:prstGeom prst="rect">
+            <a:avLst/>
+          </a:prstGeom>
+          <a:solidFill>
+            <a:srgbClr val="FFFFFF"/>
+          </a:solidFill>
+          <a:ln w="19050">
+            <a:solidFill>
+              <a:srgbClr val="2A7A50"/>
+            </a:solidFill>
+          </a:ln>
+        </p:spPr>
+        <p:style>
+          <a:lnRef idx="1">
+            <a:schemeClr val="accent1"/>
+          </a:lnRef>
+          <a:fillRef idx="3">
+            <a:schemeClr val="accent1"/>
+          </a:fillRef>
+          <a:effectRef idx="2">
+            <a:schemeClr val="accent1"/>
+          </a:effectRef>
+          <a:fontRef idx="minor">
+            <a:schemeClr val="lt1"/>
+          </a:fontRef>
+        </p:style>
+        <p:txBody>
+          <a:bodyPr rtlCol="0" anchor="ctr"/>
+          <a:lstStyle/>
+          <a:p>
+            <a:pPr algn="ctr"/>
+          </a:p>
+        </p:txBody>
+      </p:sp>
+      <p:sp>
+        <p:nvSpPr>
+          <p:cNvPr id="26" name="TextBox 25"/>
+          <p:cNvSpPr txBox="1"/>
+          <p:nvPr/>
+        </p:nvSpPr>
+        <p:spPr>
+          <a:xfrm>
+            <a:off x="9180576" y="1956816"/>
+            <a:ext cx="2560320" cy="2487168"/>
+          </a:xfrm>
+          <a:prstGeom prst="rect">
+            <a:avLst/>
+          </a:prstGeom>
+          <a:noFill/>
+        </p:spPr>
+        <p:txBody>
+          <a:bodyPr wrap="square">
+            <a:spAutoFit/>
+          </a:bodyPr>
+          <a:lstStyle/>
+          <a:p>
+            <a:pPr algn="l"/>
+            <a:r>
+              <a:rPr sz="1000" b="0" i="0">
+                <a:solidFill>
+                  <a:srgbClr val="1A1A1A"/>
+                </a:solidFill>
+              </a:rPr>
+              <a:t>La fin heureuse — rendue possible
+par le don.
+'Amara a aujourd'hui 4 ans et elle est
+scolarisée.'</a:t>
+            </a:r>
+          </a:p>
+        </p:txBody>
+      </p:sp>
+      <p:sp>
+        <p:nvSpPr>
+          <p:cNvPr id="27" name="Rectangle 26"/>
+          <p:cNvSpPr/>
+          <p:nvPr/>
+        </p:nvSpPr>
+        <p:spPr>
+          <a:xfrm>
+            <a:off x="274320" y="4700016"/>
+            <a:ext cx="11640312" cy="658368"/>
+          </a:xfrm>
+          <a:prstGeom prst="rect">
+            <a:avLst/>
+          </a:prstGeom>
+          <a:solidFill>
+            <a:srgbClr val="F0F7F7"/>
+          </a:solidFill>
+          <a:ln>
+            <a:noFill/>
+          </a:ln>
+        </p:spPr>
+        <p:style>
+          <a:lnRef idx="1">
+            <a:schemeClr val="accent1"/>
+          </a:lnRef>
+          <a:fillRef idx="3">
+            <a:schemeClr val="accent1"/>
+          </a:fillRef>
+          <a:effectRef idx="2">
+            <a:schemeClr val="accent1"/>
+          </a:effectRef>
+          <a:fontRef idx="minor">
+            <a:schemeClr val="lt1"/>
+          </a:fontRef>
+        </p:style>
+        <p:txBody>
+          <a:bodyPr rtlCol="0" anchor="ctr"/>
+          <a:lstStyle/>
+          <a:p>
+            <a:pPr algn="ctr"/>
+          </a:p>
+        </p:txBody>
+      </p:sp>
+      <p:sp>
+        <p:nvSpPr>
+          <p:cNvPr id="28" name="TextBox 27"/>
+          <p:cNvSpPr txBox="1"/>
+          <p:nvPr/>
+        </p:nvSpPr>
+        <p:spPr>
+          <a:xfrm>
+            <a:off x="411479" y="4773168"/>
+            <a:ext cx="11365992" cy="512063"/>
+          </a:xfrm>
+          <a:prstGeom prst="rect">
+            <a:avLst/>
+          </a:prstGeom>
+          <a:noFill/>
+        </p:spPr>
+        <p:txBody>
+          <a:bodyPr wrap="square">
+            <a:spAutoFit/>
+          </a:bodyPr>
+          <a:lstStyle/>
+          <a:p>
+            <a:pPr algn="l"/>
+            <a:r>
+              <a:rPr sz="1000" b="0" i="0">
+                <a:solidFill>
+                  <a:srgbClr val="1A1A1A"/>
+                </a:solidFill>
+              </a:rPr>
+              <a:t>Règle d'or : 1 seul enfant · 1 seul problème · 1 seul chiffre · 1 seule solution.
+La simplicité crée l'émotion. La liste de statistiques crée la distance.</a:t>
+            </a:r>
+          </a:p>
+        </p:txBody>
+      </p:sp>
+      <p:sp>
+        <p:nvSpPr>
+          <p:cNvPr id="29" name="Rectangle 28"/>
+          <p:cNvSpPr/>
+          <p:nvPr/>
+        </p:nvSpPr>
+        <p:spPr>
+          <a:xfrm>
+            <a:off x="274320" y="4700016"/>
+            <a:ext cx="128016" cy="658368"/>
+          </a:xfrm>
+          <a:prstGeom prst="rect">
+            <a:avLst/>
+          </a:prstGeom>
+          <a:solidFill>
+            <a:srgbClr val="FF0000"/>
+          </a:solidFill>
+          <a:ln>
+            <a:noFill/>
+          </a:ln>
+        </p:spPr>
+        <p:style>
+          <a:lnRef idx="1">
+            <a:schemeClr val="accent1"/>
+          </a:lnRef>
+          <a:fillRef idx="3">
+            <a:schemeClr val="accent1"/>
+          </a:fillRef>
+          <a:effectRef idx="2">
+            <a:schemeClr val="accent1"/>
+          </a:effectRef>
+          <a:fontRef idx="minor">
+            <a:schemeClr val="lt1"/>
+          </a:fontRef>
+        </p:style>
+        <p:txBody>
+          <a:bodyPr rtlCol="0" anchor="ctr"/>
+          <a:lstStyle/>
+          <a:p>
+            <a:pPr algn="ctr"/>
+          </a:p>
+        </p:txBody>
+      </p:sp>
+      <p:sp>
+        <p:nvSpPr>
+          <p:cNvPr id="30" name="Rectangle 29"/>
+          <p:cNvSpPr/>
+          <p:nvPr/>
+        </p:nvSpPr>
+        <p:spPr>
+          <a:xfrm>
+            <a:off x="274320" y="5486400"/>
+            <a:ext cx="11640312" cy="402336"/>
+          </a:xfrm>
+          <a:prstGeom prst="rect">
+            <a:avLst/>
+          </a:prstGeom>
+          <a:solidFill>
+            <a:srgbClr val="FF0000"/>
+          </a:solidFill>
+          <a:ln>
+            <a:noFill/>
+          </a:ln>
+        </p:spPr>
+        <p:style>
+          <a:lnRef idx="1">
+            <a:schemeClr val="accent1"/>
+          </a:lnRef>
+          <a:fillRef idx="3">
+            <a:schemeClr val="accent1"/>
+          </a:fillRef>
+          <a:effectRef idx="2">
+            <a:schemeClr val="accent1"/>
+          </a:effectRef>
+          <a:fontRef idx="minor">
+            <a:schemeClr val="lt1"/>
+          </a:fontRef>
+        </p:style>
+        <p:txBody>
+          <a:bodyPr rtlCol="0" anchor="ctr"/>
+          <a:lstStyle/>
+          <a:p>
+            <a:pPr algn="ctr"/>
+          </a:p>
+        </p:txBody>
+      </p:sp>
+      <p:sp>
+        <p:nvSpPr>
+          <p:cNvPr id="31" name="TextBox 30"/>
+          <p:cNvSpPr txBox="1"/>
+          <p:nvPr/>
+        </p:nvSpPr>
+        <p:spPr>
+          <a:xfrm>
+            <a:off x="411479" y="5559552"/>
+            <a:ext cx="11365992" cy="256032"/>
+          </a:xfrm>
+          <a:prstGeom prst="rect">
+            <a:avLst/>
+          </a:prstGeom>
+          <a:noFill/>
+        </p:spPr>
+        <p:txBody>
+          <a:bodyPr wrap="square">
+            <a:spAutoFit/>
+          </a:bodyPr>
+          <a:lstStyle/>
+          <a:p>
+            <a:pPr algn="l"/>
+            <a:r>
+              <a:rPr sz="1000" b="0" i="0">
+                <a:solidFill>
+                  <a:srgbClr val="FFFFFF"/>
+                </a:solidFill>
+              </a:rPr>
+              <a:t>Exercice : Écrivez votre propre Impact Story en 5 lignes — un enfant, une situation, un impact.</a:t>
             </a:r>
           </a:p>
         </p:txBody>

--- a/FIM_BookJ3_Lecture_Script_V6-01062026SHY-TE.pptx
+++ b/FIM_BookJ3_Lecture_Script_V6-01062026SHY-TE.pptx
@@ -3143,7 +3143,7 @@
         <p:spPr>
           <a:xfrm>
             <a:off x="0" y="0"/>
-            <a:ext cx="12188952" cy="2286000"/>
+            <a:ext cx="12188952" cy="2331720"/>
           </a:xfrm>
           <a:prstGeom prst="rect">
             <a:avLst/>
@@ -3185,14 +3185,14 @@
         </p:nvSpPr>
         <p:spPr>
           <a:xfrm>
-            <a:off x="0" y="2267712"/>
-            <a:ext cx="12188952" cy="73152"/>
+            <a:off x="0" y="2313432"/>
+            <a:ext cx="12188952" cy="54864"/>
           </a:xfrm>
           <a:prstGeom prst="rect">
             <a:avLst/>
           </a:prstGeom>
           <a:solidFill>
-            <a:srgbClr val="FF0000"/>
+            <a:srgbClr val="00AAAA"/>
           </a:solidFill>
           <a:ln>
             <a:noFill/>
@@ -3222,57 +3222,14 @@
       </p:sp>
       <p:sp>
         <p:nvSpPr>
-          <p:cNvPr id="5" name="Rectangle 4"/>
-          <p:cNvSpPr/>
-          <p:nvPr/>
-        </p:nvSpPr>
-        <p:spPr>
-          <a:xfrm>
-            <a:off x="274320" y="109728"/>
-            <a:ext cx="2926080" cy="822960"/>
-          </a:xfrm>
-          <a:prstGeom prst="rect">
-            <a:avLst/>
-          </a:prstGeom>
-          <a:solidFill>
-            <a:srgbClr val="008080"/>
-          </a:solidFill>
-          <a:ln>
-            <a:noFill/>
-          </a:ln>
-        </p:spPr>
-        <p:style>
-          <a:lnRef idx="1">
-            <a:schemeClr val="accent1"/>
-          </a:lnRef>
-          <a:fillRef idx="3">
-            <a:schemeClr val="accent1"/>
-          </a:fillRef>
-          <a:effectRef idx="2">
-            <a:schemeClr val="accent1"/>
-          </a:effectRef>
-          <a:fontRef idx="minor">
-            <a:schemeClr val="lt1"/>
-          </a:fontRef>
-        </p:style>
-        <p:txBody>
-          <a:bodyPr rtlCol="0" anchor="ctr"/>
-          <a:lstStyle/>
-          <a:p>
-            <a:pPr algn="ctr"/>
-          </a:p>
-        </p:txBody>
-      </p:sp>
-      <p:sp>
-        <p:nvSpPr>
-          <p:cNvPr id="6" name="TextBox 5"/>
+          <p:cNvPr id="5" name="TextBox 4"/>
           <p:cNvSpPr txBox="1"/>
           <p:nvPr/>
         </p:nvSpPr>
         <p:spPr>
           <a:xfrm>
-            <a:off x="320040" y="118872"/>
-            <a:ext cx="1097280" cy="804672"/>
+            <a:off x="347472" y="91440"/>
+            <a:ext cx="3200400" cy="438912"/>
           </a:xfrm>
           <a:prstGeom prst="rect">
             <a:avLst/>
@@ -3287,26 +3244,26 @@
           <a:p>
             <a:pPr algn="l"/>
             <a:r>
-              <a:rPr sz="3600" b="1" i="0">
+              <a:rPr sz="2200" b="1" i="0">
                 <a:solidFill>
                   <a:srgbClr val="FFFFFF"/>
                 </a:solidFill>
               </a:rPr>
-              <a:t>SHY</a:t>
-            </a:r>
-          </a:p>
-        </p:txBody>
-      </p:sp>
-      <p:sp>
-        <p:nvSpPr>
-          <p:cNvPr id="7" name="TextBox 6"/>
+              <a:t>SHY-Performance</a:t>
+            </a:r>
+          </a:p>
+        </p:txBody>
+      </p:sp>
+      <p:sp>
+        <p:nvSpPr>
+          <p:cNvPr id="6" name="TextBox 5"/>
           <p:cNvSpPr txBox="1"/>
           <p:nvPr/>
         </p:nvSpPr>
         <p:spPr>
           <a:xfrm>
-            <a:off x="1371600" y="347472"/>
-            <a:ext cx="1828800" cy="411480"/>
+            <a:off x="347472" y="530352"/>
+            <a:ext cx="7772400" cy="347472"/>
           </a:xfrm>
           <a:prstGeom prst="rect">
             <a:avLst/>
@@ -3321,103 +3278,60 @@
           <a:p>
             <a:pPr algn="l"/>
             <a:r>
-              <a:rPr sz="1400" b="1" i="0">
-                <a:solidFill>
-                  <a:srgbClr val="FFFFFF"/>
-                </a:solidFill>
-              </a:rPr>
-              <a:t>Performance</a:t>
-            </a:r>
-          </a:p>
-        </p:txBody>
-      </p:sp>
-      <p:sp>
-        <p:nvSpPr>
-          <p:cNvPr id="8" name="Rectangle 7"/>
-          <p:cNvSpPr/>
-          <p:nvPr/>
-        </p:nvSpPr>
-        <p:spPr>
-          <a:xfrm>
-            <a:off x="3337560" y="164592"/>
-            <a:ext cx="36576" cy="658368"/>
-          </a:xfrm>
-          <a:prstGeom prst="rect">
-            <a:avLst/>
-          </a:prstGeom>
-          <a:solidFill>
-            <a:srgbClr val="FF0000"/>
-          </a:solidFill>
-          <a:ln>
-            <a:noFill/>
-          </a:ln>
-        </p:spPr>
-        <p:style>
-          <a:lnRef idx="1">
-            <a:schemeClr val="accent1"/>
-          </a:lnRef>
-          <a:fillRef idx="3">
-            <a:schemeClr val="accent1"/>
-          </a:fillRef>
-          <a:effectRef idx="2">
-            <a:schemeClr val="accent1"/>
-          </a:effectRef>
-          <a:fontRef idx="minor">
-            <a:schemeClr val="lt1"/>
-          </a:fontRef>
-        </p:style>
-        <p:txBody>
-          <a:bodyPr rtlCol="0" anchor="ctr"/>
-          <a:lstStyle/>
-          <a:p>
-            <a:pPr algn="ctr"/>
-          </a:p>
-        </p:txBody>
-      </p:sp>
-      <p:sp>
-        <p:nvSpPr>
-          <p:cNvPr id="9" name="TextBox 8"/>
-          <p:cNvSpPr txBox="1"/>
-          <p:nvPr/>
-        </p:nvSpPr>
-        <p:spPr>
-          <a:xfrm>
-            <a:off x="3474720" y="164592"/>
-            <a:ext cx="8503920" cy="347472"/>
-          </a:xfrm>
-          <a:prstGeom prst="rect">
-            <a:avLst/>
-          </a:prstGeom>
-          <a:noFill/>
-        </p:spPr>
-        <p:txBody>
-          <a:bodyPr wrap="square">
-            <a:spAutoFit/>
-          </a:bodyPr>
-          <a:lstStyle/>
-          <a:p>
-            <a:pPr algn="l"/>
-            <a:r>
-              <a:rPr sz="900" b="1" i="0">
+              <a:rPr sz="1000" b="0" i="1">
                 <a:solidFill>
                   <a:srgbClr val="BBEEEE"/>
                 </a:solidFill>
               </a:rPr>
-              <a:t>BOOK J3  ·  Journée 3  ·  Discours &amp; Storytelling</a:t>
-            </a:r>
-          </a:p>
-        </p:txBody>
-      </p:sp>
-      <p:sp>
-        <p:nvSpPr>
-          <p:cNvPr id="10" name="TextBox 9"/>
+              <a:t>Formation Initiale Module — Fundraising Téléphonique UNICEF</a:t>
+            </a:r>
+          </a:p>
+        </p:txBody>
+      </p:sp>
+      <p:sp>
+        <p:nvSpPr>
+          <p:cNvPr id="7" name="TextBox 6"/>
           <p:cNvSpPr txBox="1"/>
           <p:nvPr/>
         </p:nvSpPr>
         <p:spPr>
           <a:xfrm>
-            <a:off x="320040" y="960120"/>
-            <a:ext cx="11521440" cy="1143000"/>
+            <a:off x="347472" y="932688"/>
+            <a:ext cx="7772400" cy="292608"/>
+          </a:xfrm>
+          <a:prstGeom prst="rect">
+            <a:avLst/>
+          </a:prstGeom>
+          <a:noFill/>
+        </p:spPr>
+        <p:txBody>
+          <a:bodyPr wrap="square">
+            <a:spAutoFit/>
+          </a:bodyPr>
+          <a:lstStyle/>
+          <a:p>
+            <a:pPr algn="l"/>
+            <a:r>
+              <a:rPr sz="900" b="1" i="0">
+                <a:solidFill>
+                  <a:srgbClr val="88DDDD"/>
+                </a:solidFill>
+              </a:rPr>
+              <a:t>BOOK J3  ·  Journée 3  ·  Script UNICEF × FIDELIS</a:t>
+            </a:r>
+          </a:p>
+        </p:txBody>
+      </p:sp>
+      <p:sp>
+        <p:nvSpPr>
+          <p:cNvPr id="8" name="TextBox 7"/>
+          <p:cNvSpPr txBox="1"/>
+          <p:nvPr/>
+        </p:nvSpPr>
+        <p:spPr>
+          <a:xfrm>
+            <a:off x="347472" y="1207008"/>
+            <a:ext cx="10515600" cy="914400"/>
           </a:xfrm>
           <a:prstGeom prst="rect">
             <a:avLst/>
@@ -3437,21 +3351,21 @@
                   <a:srgbClr val="FFFFFF"/>
                 </a:solidFill>
               </a:rPr>
-              <a:t>Votre Script de Présentation</a:t>
-            </a:r>
-          </a:p>
-        </p:txBody>
-      </p:sp>
-      <p:sp>
-        <p:nvSpPr>
-          <p:cNvPr id="11" name="TextBox 10"/>
+              <a:t>Analyse &amp; Script Officiel UNICEF</a:t>
+            </a:r>
+          </a:p>
+        </p:txBody>
+      </p:sp>
+      <p:sp>
+        <p:nvSpPr>
+          <p:cNvPr id="9" name="TextBox 8"/>
           <p:cNvSpPr txBox="1"/>
           <p:nvPr/>
         </p:nvSpPr>
         <p:spPr>
           <a:xfrm>
-            <a:off x="320040" y="1920240"/>
-            <a:ext cx="11521440" cy="347472"/>
+            <a:off x="347472" y="1901952"/>
+            <a:ext cx="10515600" cy="402336"/>
           </a:xfrm>
           <a:prstGeom prst="rect">
             <a:avLst/>
@@ -3471,14 +3385,38 @@
                   <a:srgbClr val="CCEEEE"/>
                 </a:solidFill>
               </a:rPr>
-              <a:t>Les 5 étapes pour convaincre un donateur français avec authenticité</a:t>
-            </a:r>
-          </a:p>
-        </p:txBody>
-      </p:sp>
-      <p:sp>
-        <p:nvSpPr>
-          <p:cNvPr id="12" name="Rectangle 11"/>
+              <a:t>Les 7 étapes · Les 5 règles d'accroche · Les 4 modes de validation</a:t>
+            </a:r>
+          </a:p>
+        </p:txBody>
+      </p:sp>
+      <p:pic>
+        <p:nvPicPr>
+          <p:cNvPr id="10" name="Picture 9" descr="shy_logo_v2.png"/>
+          <p:cNvPicPr>
+            <a:picLocks noChangeAspect="1"/>
+          </p:cNvPicPr>
+          <p:nvPr/>
+        </p:nvPicPr>
+        <p:blipFill>
+          <a:blip r:embed="rId2"/>
+          <a:stretch>
+            <a:fillRect/>
+          </a:stretch>
+        </p:blipFill>
+        <p:spPr>
+          <a:xfrm>
+            <a:off x="11247120" y="45720"/>
+            <a:ext cx="822960" cy="804672"/>
+          </a:xfrm>
+          <a:prstGeom prst="rect">
+            <a:avLst/>
+          </a:prstGeom>
+        </p:spPr>
+      </p:pic>
+      <p:sp>
+        <p:nvSpPr>
+          <p:cNvPr id="11" name="Rectangle 10"/>
           <p:cNvSpPr/>
           <p:nvPr/>
         </p:nvSpPr>
@@ -3521,7 +3459,7 @@
       </p:sp>
       <p:sp>
         <p:nvSpPr>
-          <p:cNvPr id="13" name="TextBox 12"/>
+          <p:cNvPr id="12" name="TextBox 11"/>
           <p:cNvSpPr txBox="1"/>
           <p:nvPr/>
         </p:nvSpPr>
@@ -3543,26 +3481,26 @@
           <a:p>
             <a:pPr algn="ctr"/>
             <a:r>
-              <a:rPr sz="900" b="0" i="0">
+              <a:rPr sz="800" b="0" i="0">
                 <a:solidFill>
                   <a:srgbClr val="FFFFFF"/>
                 </a:solidFill>
               </a:rPr>
-              <a:t>SHY-Performance  ·  Formation FIM  ·  V6-01062026SHY-TE</a:t>
-            </a:r>
-          </a:p>
-        </p:txBody>
-      </p:sp>
-      <p:sp>
-        <p:nvSpPr>
-          <p:cNvPr id="14" name="TextBox 13"/>
+              <a:t>SHY-Performance  ·  Formation FIM  ·  UNICEF France  ·  V6-01062026SHY-TE</a:t>
+            </a:r>
+          </a:p>
+        </p:txBody>
+      </p:sp>
+      <p:sp>
+        <p:nvSpPr>
+          <p:cNvPr id="13" name="TextBox 12"/>
           <p:cNvSpPr txBox="1"/>
           <p:nvPr/>
         </p:nvSpPr>
         <p:spPr>
           <a:xfrm>
             <a:off x="457200" y="2514600"/>
-            <a:ext cx="11247120" cy="1051560"/>
+            <a:ext cx="10789920" cy="1005840"/>
           </a:xfrm>
           <a:prstGeom prst="rect">
             <a:avLst/>
@@ -3582,9 +3520,9 @@
                   <a:srgbClr val="1A1A1A"/>
                 </a:solidFill>
               </a:rPr>
-              <a:t>Aujourd'hui vous allez construire votre propre version du script FIM.
-Vous ne le lirez pas — vous allez le vivre, le ressentir et le personnaliser
-pour qu'il sonne vrai à chaque rencontre.</a:t>
+              <a:t>Aujourd'hui vous allez lire, analyser et incarner le script officiel UNICEF.
+Vous ne le lirez pas mécaniquement — vous allez comprendre l'intention
+de chaque phrase pour le délivrer avec conviction et naturel.</a:t>
             </a:r>
           </a:p>
         </p:txBody>
@@ -3659,7 +3597,7 @@
         <p:spPr>
           <a:xfrm>
             <a:off x="0" y="0"/>
-            <a:ext cx="12188952" cy="658368"/>
+            <a:ext cx="12188952" cy="685800"/>
           </a:xfrm>
           <a:prstGeom prst="rect">
             <a:avLst/>
@@ -3701,14 +3639,14 @@
         </p:nvSpPr>
         <p:spPr>
           <a:xfrm>
-            <a:off x="0" y="640080"/>
-            <a:ext cx="12188952" cy="54864"/>
+            <a:off x="0" y="667512"/>
+            <a:ext cx="12188952" cy="45720"/>
           </a:xfrm>
           <a:prstGeom prst="rect">
             <a:avLst/>
           </a:prstGeom>
           <a:solidFill>
-            <a:srgbClr val="FF0000"/>
+            <a:srgbClr val="00AAAA"/>
           </a:solidFill>
           <a:ln>
             <a:noFill/>
@@ -3744,8 +3682,8 @@
         </p:nvSpPr>
         <p:spPr>
           <a:xfrm>
-            <a:off x="164592" y="64008"/>
-            <a:ext cx="685800" cy="530352"/>
+            <a:off x="164592" y="73152"/>
+            <a:ext cx="2011680" cy="347472"/>
           </a:xfrm>
           <a:prstGeom prst="rect">
             <a:avLst/>
@@ -3760,12 +3698,12 @@
           <a:p>
             <a:pPr algn="l"/>
             <a:r>
-              <a:rPr sz="2000" b="1" i="0">
+              <a:rPr sz="1400" b="1" i="0">
                 <a:solidFill>
                   <a:srgbClr val="FFFFFF"/>
                 </a:solidFill>
               </a:rPr>
-              <a:t>SHY</a:t>
+              <a:t>SHY-Performance</a:t>
             </a:r>
           </a:p>
         </p:txBody>
@@ -3778,14 +3716,14 @@
         </p:nvSpPr>
         <p:spPr>
           <a:xfrm>
-            <a:off x="914400" y="91440"/>
-            <a:ext cx="36576" cy="475488"/>
+            <a:off x="2286000" y="91440"/>
+            <a:ext cx="36576" cy="502920"/>
           </a:xfrm>
           <a:prstGeom prst="rect">
             <a:avLst/>
           </a:prstGeom>
           <a:solidFill>
-            <a:srgbClr val="FF0000"/>
+            <a:srgbClr val="00AAAA"/>
           </a:solidFill>
           <a:ln>
             <a:noFill/>
@@ -3821,8 +3759,8 @@
         </p:nvSpPr>
         <p:spPr>
           <a:xfrm>
-            <a:off x="1024128" y="91440"/>
-            <a:ext cx="10881360" cy="475488"/>
+            <a:off x="2423160" y="91440"/>
+            <a:ext cx="9235440" cy="502920"/>
           </a:xfrm>
           <a:prstGeom prst="rect">
             <a:avLst/>
@@ -3837,7 +3775,7 @@
           <a:p>
             <a:pPr algn="l"/>
             <a:r>
-              <a:rPr sz="1700" b="1" i="0">
+              <a:rPr sz="1600" b="1" i="0">
                 <a:solidFill>
                   <a:srgbClr val="FFFFFF"/>
                 </a:solidFill>
@@ -3847,9 +3785,33 @@
           </a:p>
         </p:txBody>
       </p:sp>
-      <p:sp>
-        <p:nvSpPr>
-          <p:cNvPr id="8" name="Rectangle 7"/>
+      <p:pic>
+        <p:nvPicPr>
+          <p:cNvPr id="8" name="Picture 7" descr="shy_logo_v2.png"/>
+          <p:cNvPicPr>
+            <a:picLocks noChangeAspect="1"/>
+          </p:cNvPicPr>
+          <p:nvPr/>
+        </p:nvPicPr>
+        <p:blipFill>
+          <a:blip r:embed="rId2"/>
+          <a:stretch>
+            <a:fillRect/>
+          </a:stretch>
+        </p:blipFill>
+        <p:spPr>
+          <a:xfrm>
+            <a:off x="11247120" y="0"/>
+            <a:ext cx="822960" cy="676656"/>
+          </a:xfrm>
+          <a:prstGeom prst="rect">
+            <a:avLst/>
+          </a:prstGeom>
+        </p:spPr>
+      </p:pic>
+      <p:sp>
+        <p:nvSpPr>
+          <p:cNvPr id="9" name="Rectangle 8"/>
           <p:cNvSpPr/>
           <p:nvPr/>
         </p:nvSpPr>
@@ -3892,7 +3854,7 @@
       </p:sp>
       <p:sp>
         <p:nvSpPr>
-          <p:cNvPr id="9" name="TextBox 8"/>
+          <p:cNvPr id="10" name="TextBox 9"/>
           <p:cNvSpPr txBox="1"/>
           <p:nvPr/>
         </p:nvSpPr>
@@ -3914,26 +3876,26 @@
           <a:p>
             <a:pPr algn="ctr"/>
             <a:r>
-              <a:rPr sz="900" b="0" i="0">
+              <a:rPr sz="800" b="0" i="0">
                 <a:solidFill>
                   <a:srgbClr val="FFFFFF"/>
                 </a:solidFill>
               </a:rPr>
-              <a:t>SHY-Performance  ·  Formation FIM  ·  V6-01062026SHY-TE</a:t>
-            </a:r>
-          </a:p>
-        </p:txBody>
-      </p:sp>
-      <p:sp>
-        <p:nvSpPr>
-          <p:cNvPr id="10" name="Rectangle 9"/>
+              <a:t>SHY-Performance  ·  Formation FIM  ·  UNICEF France  ·  V6-01062026SHY-TE</a:t>
+            </a:r>
+          </a:p>
+        </p:txBody>
+      </p:sp>
+      <p:sp>
+        <p:nvSpPr>
+          <p:cNvPr id="11" name="Rectangle 10"/>
           <p:cNvSpPr/>
           <p:nvPr/>
         </p:nvSpPr>
         <p:spPr>
           <a:xfrm>
             <a:off x="274320" y="804672"/>
-            <a:ext cx="2910078" cy="274320"/>
+            <a:ext cx="2910078" cy="292608"/>
           </a:xfrm>
           <a:prstGeom prst="rect">
             <a:avLst/>
@@ -3969,14 +3931,14 @@
       </p:sp>
       <p:sp>
         <p:nvSpPr>
-          <p:cNvPr id="11" name="TextBox 10"/>
+          <p:cNvPr id="12" name="TextBox 11"/>
           <p:cNvSpPr txBox="1"/>
           <p:nvPr/>
         </p:nvSpPr>
         <p:spPr>
           <a:xfrm>
-            <a:off x="347472" y="841248"/>
-            <a:ext cx="2763774" cy="219456"/>
+            <a:off x="365760" y="841248"/>
+            <a:ext cx="2745486" cy="237744"/>
           </a:xfrm>
           <a:prstGeom prst="rect">
             <a:avLst/>
@@ -3991,26 +3953,26 @@
           <a:p>
             <a:pPr algn="l"/>
             <a:r>
-              <a:rPr sz="800" b="1" i="0">
+              <a:rPr sz="900" b="1" i="0">
                 <a:solidFill>
                   <a:srgbClr val="FFFFFF"/>
                 </a:solidFill>
               </a:rPr>
-              <a:t>OBSERVATION</a:t>
-            </a:r>
-          </a:p>
-        </p:txBody>
-      </p:sp>
-      <p:sp>
-        <p:nvSpPr>
-          <p:cNvPr id="12" name="Rectangle 11"/>
+              <a:t>DÉCOUVERTE</a:t>
+            </a:r>
+          </a:p>
+        </p:txBody>
+      </p:sp>
+      <p:sp>
+        <p:nvSpPr>
+          <p:cNvPr id="13" name="Rectangle 12"/>
           <p:cNvSpPr/>
           <p:nvPr/>
         </p:nvSpPr>
         <p:spPr>
           <a:xfrm>
-            <a:off x="274320" y="1078992"/>
-            <a:ext cx="2910078" cy="3840480"/>
+            <a:off x="274320" y="1097280"/>
+            <a:ext cx="2910078" cy="4370831"/>
           </a:xfrm>
           <a:prstGeom prst="rect">
             <a:avLst/>
@@ -4018,7 +3980,7 @@
           <a:solidFill>
             <a:srgbClr val="FFFFFF"/>
           </a:solidFill>
-          <a:ln w="12700">
+          <a:ln w="15240">
             <a:solidFill>
               <a:srgbClr val="005555"/>
             </a:solidFill>
@@ -4048,14 +4010,14 @@
       </p:sp>
       <p:sp>
         <p:nvSpPr>
-          <p:cNvPr id="13" name="TextBox 12"/>
+          <p:cNvPr id="14" name="TextBox 13"/>
           <p:cNvSpPr txBox="1"/>
           <p:nvPr/>
         </p:nvSpPr>
         <p:spPr>
           <a:xfrm>
-            <a:off x="384048" y="1124712"/>
-            <a:ext cx="2690622" cy="3657600"/>
+            <a:off x="384048" y="1152144"/>
+            <a:ext cx="2708910" cy="4160520"/>
           </a:xfrm>
           <a:prstGeom prst="rect">
             <a:avLst/>
@@ -4070,28 +4032,28 @@
           <a:p>
             <a:pPr algn="l"/>
             <a:r>
-              <a:rPr sz="900" b="0" i="0">
+              <a:rPr sz="950" b="0" i="0">
                 <a:solidFill>
                   <a:srgbClr val="1A1A1A"/>
                 </a:solidFill>
               </a:rPr>
-              <a:t>Votre formateur fait une
-démonstration complète
-devant un passant simulé.</a:t>
-            </a:r>
-          </a:p>
-        </p:txBody>
-      </p:sp>
-      <p:sp>
-        <p:nvSpPr>
-          <p:cNvPr id="14" name="Rectangle 13"/>
+              <a:t>Lecture intégrale du script
+officiel UNICEF à voix haute.
+Première impression.</a:t>
+            </a:r>
+          </a:p>
+        </p:txBody>
+      </p:sp>
+      <p:sp>
+        <p:nvSpPr>
+          <p:cNvPr id="15" name="Rectangle 14"/>
           <p:cNvSpPr/>
           <p:nvPr/>
         </p:nvSpPr>
         <p:spPr>
           <a:xfrm>
             <a:off x="3202686" y="804672"/>
-            <a:ext cx="2910078" cy="274320"/>
+            <a:ext cx="2910078" cy="292608"/>
           </a:xfrm>
           <a:prstGeom prst="rect">
             <a:avLst/>
@@ -4127,14 +4089,488 @@
       </p:sp>
       <p:sp>
         <p:nvSpPr>
-          <p:cNvPr id="15" name="TextBox 14"/>
+          <p:cNvPr id="16" name="TextBox 15"/>
           <p:cNvSpPr txBox="1"/>
           <p:nvPr/>
         </p:nvSpPr>
         <p:spPr>
           <a:xfrm>
-            <a:off x="3275838" y="841248"/>
-            <a:ext cx="2763774" cy="219456"/>
+            <a:off x="3294126" y="841248"/>
+            <a:ext cx="2745486" cy="237744"/>
+          </a:xfrm>
+          <a:prstGeom prst="rect">
+            <a:avLst/>
+          </a:prstGeom>
+          <a:noFill/>
+        </p:spPr>
+        <p:txBody>
+          <a:bodyPr wrap="square">
+            <a:spAutoFit/>
+          </a:bodyPr>
+          <a:lstStyle/>
+          <a:p>
+            <a:pPr algn="l"/>
+            <a:r>
+              <a:rPr sz="900" b="1" i="0">
+                <a:solidFill>
+                  <a:srgbClr val="FFFFFF"/>
+                </a:solidFill>
+              </a:rPr>
+              <a:t>ANALYSE</a:t>
+            </a:r>
+          </a:p>
+        </p:txBody>
+      </p:sp>
+      <p:sp>
+        <p:nvSpPr>
+          <p:cNvPr id="17" name="Rectangle 16"/>
+          <p:cNvSpPr/>
+          <p:nvPr/>
+        </p:nvSpPr>
+        <p:spPr>
+          <a:xfrm>
+            <a:off x="3202686" y="1097280"/>
+            <a:ext cx="2910078" cy="4370831"/>
+          </a:xfrm>
+          <a:prstGeom prst="rect">
+            <a:avLst/>
+          </a:prstGeom>
+          <a:solidFill>
+            <a:srgbClr val="FFFFFF"/>
+          </a:solidFill>
+          <a:ln w="15240">
+            <a:solidFill>
+              <a:srgbClr val="008080"/>
+            </a:solidFill>
+          </a:ln>
+        </p:spPr>
+        <p:style>
+          <a:lnRef idx="1">
+            <a:schemeClr val="accent1"/>
+          </a:lnRef>
+          <a:fillRef idx="3">
+            <a:schemeClr val="accent1"/>
+          </a:fillRef>
+          <a:effectRef idx="2">
+            <a:schemeClr val="accent1"/>
+          </a:effectRef>
+          <a:fontRef idx="minor">
+            <a:schemeClr val="lt1"/>
+          </a:fontRef>
+        </p:style>
+        <p:txBody>
+          <a:bodyPr rtlCol="0" anchor="ctr"/>
+          <a:lstStyle/>
+          <a:p>
+            <a:pPr algn="ctr"/>
+          </a:p>
+        </p:txBody>
+      </p:sp>
+      <p:sp>
+        <p:nvSpPr>
+          <p:cNvPr id="18" name="TextBox 17"/>
+          <p:cNvSpPr txBox="1"/>
+          <p:nvPr/>
+        </p:nvSpPr>
+        <p:spPr>
+          <a:xfrm>
+            <a:off x="3312414" y="1152144"/>
+            <a:ext cx="2708910" cy="4160520"/>
+          </a:xfrm>
+          <a:prstGeom prst="rect">
+            <a:avLst/>
+          </a:prstGeom>
+          <a:noFill/>
+        </p:spPr>
+        <p:txBody>
+          <a:bodyPr wrap="square">
+            <a:spAutoFit/>
+          </a:bodyPr>
+          <a:lstStyle/>
+          <a:p>
+            <a:pPr algn="l"/>
+            <a:r>
+              <a:rPr sz="950" b="0" i="0">
+                <a:solidFill>
+                  <a:srgbClr val="1A1A1A"/>
+                </a:solidFill>
+              </a:rPr>
+              <a:t>Analyse phrase par phrase :
+'Quelle est l'intention ici ?
+Pourquoi ce mot précis ?'</a:t>
+            </a:r>
+          </a:p>
+        </p:txBody>
+      </p:sp>
+      <p:sp>
+        <p:nvSpPr>
+          <p:cNvPr id="19" name="Rectangle 18"/>
+          <p:cNvSpPr/>
+          <p:nvPr/>
+        </p:nvSpPr>
+        <p:spPr>
+          <a:xfrm>
+            <a:off x="6131052" y="804672"/>
+            <a:ext cx="2910078" cy="292608"/>
+          </a:xfrm>
+          <a:prstGeom prst="rect">
+            <a:avLst/>
+          </a:prstGeom>
+          <a:solidFill>
+            <a:srgbClr val="006A6A"/>
+          </a:solidFill>
+          <a:ln>
+            <a:noFill/>
+          </a:ln>
+        </p:spPr>
+        <p:style>
+          <a:lnRef idx="1">
+            <a:schemeClr val="accent1"/>
+          </a:lnRef>
+          <a:fillRef idx="3">
+            <a:schemeClr val="accent1"/>
+          </a:fillRef>
+          <a:effectRef idx="2">
+            <a:schemeClr val="accent1"/>
+          </a:effectRef>
+          <a:fontRef idx="minor">
+            <a:schemeClr val="lt1"/>
+          </a:fontRef>
+        </p:style>
+        <p:txBody>
+          <a:bodyPr rtlCol="0" anchor="ctr"/>
+          <a:lstStyle/>
+          <a:p>
+            <a:pPr algn="ctr"/>
+          </a:p>
+        </p:txBody>
+      </p:sp>
+      <p:sp>
+        <p:nvSpPr>
+          <p:cNvPr id="20" name="TextBox 19"/>
+          <p:cNvSpPr txBox="1"/>
+          <p:nvPr/>
+        </p:nvSpPr>
+        <p:spPr>
+          <a:xfrm>
+            <a:off x="6222492" y="841248"/>
+            <a:ext cx="2745486" cy="237744"/>
+          </a:xfrm>
+          <a:prstGeom prst="rect">
+            <a:avLst/>
+          </a:prstGeom>
+          <a:noFill/>
+        </p:spPr>
+        <p:txBody>
+          <a:bodyPr wrap="square">
+            <a:spAutoFit/>
+          </a:bodyPr>
+          <a:lstStyle/>
+          <a:p>
+            <a:pPr algn="l"/>
+            <a:r>
+              <a:rPr sz="900" b="1" i="0">
+                <a:solidFill>
+                  <a:srgbClr val="FFFFFF"/>
+                </a:solidFill>
+              </a:rPr>
+              <a:t>APPORT</a:t>
+            </a:r>
+          </a:p>
+        </p:txBody>
+      </p:sp>
+      <p:sp>
+        <p:nvSpPr>
+          <p:cNvPr id="21" name="Rectangle 20"/>
+          <p:cNvSpPr/>
+          <p:nvPr/>
+        </p:nvSpPr>
+        <p:spPr>
+          <a:xfrm>
+            <a:off x="6131052" y="1097280"/>
+            <a:ext cx="2910078" cy="4370831"/>
+          </a:xfrm>
+          <a:prstGeom prst="rect">
+            <a:avLst/>
+          </a:prstGeom>
+          <a:solidFill>
+            <a:srgbClr val="FFFFFF"/>
+          </a:solidFill>
+          <a:ln w="15240">
+            <a:solidFill>
+              <a:srgbClr val="006A6A"/>
+            </a:solidFill>
+          </a:ln>
+        </p:spPr>
+        <p:style>
+          <a:lnRef idx="1">
+            <a:schemeClr val="accent1"/>
+          </a:lnRef>
+          <a:fillRef idx="3">
+            <a:schemeClr val="accent1"/>
+          </a:fillRef>
+          <a:effectRef idx="2">
+            <a:schemeClr val="accent1"/>
+          </a:effectRef>
+          <a:fontRef idx="minor">
+            <a:schemeClr val="lt1"/>
+          </a:fontRef>
+        </p:style>
+        <p:txBody>
+          <a:bodyPr rtlCol="0" anchor="ctr"/>
+          <a:lstStyle/>
+          <a:p>
+            <a:pPr algn="ctr"/>
+          </a:p>
+        </p:txBody>
+      </p:sp>
+      <p:sp>
+        <p:nvSpPr>
+          <p:cNvPr id="22" name="TextBox 21"/>
+          <p:cNvSpPr txBox="1"/>
+          <p:nvPr/>
+        </p:nvSpPr>
+        <p:spPr>
+          <a:xfrm>
+            <a:off x="6240780" y="1152144"/>
+            <a:ext cx="2708910" cy="4160520"/>
+          </a:xfrm>
+          <a:prstGeom prst="rect">
+            <a:avLst/>
+          </a:prstGeom>
+          <a:noFill/>
+        </p:spPr>
+        <p:txBody>
+          <a:bodyPr wrap="square">
+            <a:spAutoFit/>
+          </a:bodyPr>
+          <a:lstStyle/>
+          <a:p>
+            <a:pPr algn="l"/>
+            <a:r>
+              <a:rPr sz="950" b="0" i="0">
+                <a:solidFill>
+                  <a:srgbClr val="1A1A1A"/>
+                </a:solidFill>
+              </a:rPr>
+              <a:t>Les 7 étapes · Les 5 règles
+d'accroche · Les 4 modes
+de validation du don</a:t>
+            </a:r>
+          </a:p>
+        </p:txBody>
+      </p:sp>
+      <p:sp>
+        <p:nvSpPr>
+          <p:cNvPr id="23" name="Rectangle 22"/>
+          <p:cNvSpPr/>
+          <p:nvPr/>
+        </p:nvSpPr>
+        <p:spPr>
+          <a:xfrm>
+            <a:off x="9059418" y="804672"/>
+            <a:ext cx="2910078" cy="292608"/>
+          </a:xfrm>
+          <a:prstGeom prst="rect">
+            <a:avLst/>
+          </a:prstGeom>
+          <a:solidFill>
+            <a:srgbClr val="00AAAA"/>
+          </a:solidFill>
+          <a:ln>
+            <a:noFill/>
+          </a:ln>
+        </p:spPr>
+        <p:style>
+          <a:lnRef idx="1">
+            <a:schemeClr val="accent1"/>
+          </a:lnRef>
+          <a:fillRef idx="3">
+            <a:schemeClr val="accent1"/>
+          </a:fillRef>
+          <a:effectRef idx="2">
+            <a:schemeClr val="accent1"/>
+          </a:effectRef>
+          <a:fontRef idx="minor">
+            <a:schemeClr val="lt1"/>
+          </a:fontRef>
+        </p:style>
+        <p:txBody>
+          <a:bodyPr rtlCol="0" anchor="ctr"/>
+          <a:lstStyle/>
+          <a:p>
+            <a:pPr algn="ctr"/>
+          </a:p>
+        </p:txBody>
+      </p:sp>
+      <p:sp>
+        <p:nvSpPr>
+          <p:cNvPr id="24" name="TextBox 23"/>
+          <p:cNvSpPr txBox="1"/>
+          <p:nvPr/>
+        </p:nvSpPr>
+        <p:spPr>
+          <a:xfrm>
+            <a:off x="9150858" y="841248"/>
+            <a:ext cx="2745486" cy="237744"/>
+          </a:xfrm>
+          <a:prstGeom prst="rect">
+            <a:avLst/>
+          </a:prstGeom>
+          <a:noFill/>
+        </p:spPr>
+        <p:txBody>
+          <a:bodyPr wrap="square">
+            <a:spAutoFit/>
+          </a:bodyPr>
+          <a:lstStyle/>
+          <a:p>
+            <a:pPr algn="l"/>
+            <a:r>
+              <a:rPr sz="900" b="1" i="0">
+                <a:solidFill>
+                  <a:srgbClr val="FFFFFF"/>
+                </a:solidFill>
+              </a:rPr>
+              <a:t>ENTRAÎNEMENT</a:t>
+            </a:r>
+          </a:p>
+        </p:txBody>
+      </p:sp>
+      <p:sp>
+        <p:nvSpPr>
+          <p:cNvPr id="25" name="Rectangle 24"/>
+          <p:cNvSpPr/>
+          <p:nvPr/>
+        </p:nvSpPr>
+        <p:spPr>
+          <a:xfrm>
+            <a:off x="9059418" y="1097280"/>
+            <a:ext cx="2910078" cy="4370831"/>
+          </a:xfrm>
+          <a:prstGeom prst="rect">
+            <a:avLst/>
+          </a:prstGeom>
+          <a:solidFill>
+            <a:srgbClr val="FFFFFF"/>
+          </a:solidFill>
+          <a:ln w="15240">
+            <a:solidFill>
+              <a:srgbClr val="00AAAA"/>
+            </a:solidFill>
+          </a:ln>
+        </p:spPr>
+        <p:style>
+          <a:lnRef idx="1">
+            <a:schemeClr val="accent1"/>
+          </a:lnRef>
+          <a:fillRef idx="3">
+            <a:schemeClr val="accent1"/>
+          </a:fillRef>
+          <a:effectRef idx="2">
+            <a:schemeClr val="accent1"/>
+          </a:effectRef>
+          <a:fontRef idx="minor">
+            <a:schemeClr val="lt1"/>
+          </a:fontRef>
+        </p:style>
+        <p:txBody>
+          <a:bodyPr rtlCol="0" anchor="ctr"/>
+          <a:lstStyle/>
+          <a:p>
+            <a:pPr algn="ctr"/>
+          </a:p>
+        </p:txBody>
+      </p:sp>
+      <p:sp>
+        <p:nvSpPr>
+          <p:cNvPr id="26" name="TextBox 25"/>
+          <p:cNvSpPr txBox="1"/>
+          <p:nvPr/>
+        </p:nvSpPr>
+        <p:spPr>
+          <a:xfrm>
+            <a:off x="9169146" y="1152144"/>
+            <a:ext cx="2708910" cy="4160520"/>
+          </a:xfrm>
+          <a:prstGeom prst="rect">
+            <a:avLst/>
+          </a:prstGeom>
+          <a:noFill/>
+        </p:spPr>
+        <p:txBody>
+          <a:bodyPr wrap="square">
+            <a:spAutoFit/>
+          </a:bodyPr>
+          <a:lstStyle/>
+          <a:p>
+            <a:pPr algn="l"/>
+            <a:r>
+              <a:rPr sz="950" b="0" i="0">
+                <a:solidFill>
+                  <a:srgbClr val="1A1A1A"/>
+                </a:solidFill>
+              </a:rPr>
+              <a:t>Exercices de lecture en binômes.
+Débriefs collectifs.
+Points forts &amp; axes d'amélioration.</a:t>
+            </a:r>
+          </a:p>
+        </p:txBody>
+      </p:sp>
+      <p:sp>
+        <p:nvSpPr>
+          <p:cNvPr id="27" name="Rectangle 26"/>
+          <p:cNvSpPr/>
+          <p:nvPr/>
+        </p:nvSpPr>
+        <p:spPr>
+          <a:xfrm>
+            <a:off x="274320" y="5596128"/>
+            <a:ext cx="11640312" cy="256032"/>
+          </a:xfrm>
+          <a:prstGeom prst="rect">
+            <a:avLst/>
+          </a:prstGeom>
+          <a:solidFill>
+            <a:srgbClr val="008080"/>
+          </a:solidFill>
+          <a:ln>
+            <a:noFill/>
+          </a:ln>
+        </p:spPr>
+        <p:style>
+          <a:lnRef idx="1">
+            <a:schemeClr val="accent1"/>
+          </a:lnRef>
+          <a:fillRef idx="3">
+            <a:schemeClr val="accent1"/>
+          </a:fillRef>
+          <a:effectRef idx="2">
+            <a:schemeClr val="accent1"/>
+          </a:effectRef>
+          <a:fontRef idx="minor">
+            <a:schemeClr val="lt1"/>
+          </a:fontRef>
+        </p:style>
+        <p:txBody>
+          <a:bodyPr rtlCol="0" anchor="ctr"/>
+          <a:lstStyle/>
+          <a:p>
+            <a:pPr algn="ctr"/>
+          </a:p>
+        </p:txBody>
+      </p:sp>
+      <p:sp>
+        <p:nvSpPr>
+          <p:cNvPr id="28" name="TextBox 27"/>
+          <p:cNvSpPr txBox="1"/>
+          <p:nvPr/>
+        </p:nvSpPr>
+        <p:spPr>
+          <a:xfrm>
+            <a:off x="384048" y="5632704"/>
+            <a:ext cx="11430000" cy="201168"/>
           </a:xfrm>
           <a:prstGeom prst="rect">
             <a:avLst/>
@@ -4154,21 +4590,21 @@
                   <a:srgbClr val="FFFFFF"/>
                 </a:solidFill>
               </a:rPr>
-              <a:t>ANALYSE</a:t>
-            </a:r>
-          </a:p>
-        </p:txBody>
-      </p:sp>
-      <p:sp>
-        <p:nvSpPr>
-          <p:cNvPr id="16" name="Rectangle 15"/>
+              <a:t>Vos 3 réussites à valider aujourd'hui</a:t>
+            </a:r>
+          </a:p>
+        </p:txBody>
+      </p:sp>
+      <p:sp>
+        <p:nvSpPr>
+          <p:cNvPr id="29" name="Rectangle 28"/>
           <p:cNvSpPr/>
           <p:nvPr/>
         </p:nvSpPr>
         <p:spPr>
           <a:xfrm>
-            <a:off x="3202686" y="1078992"/>
-            <a:ext cx="2910078" cy="3840480"/>
+            <a:off x="274320" y="5870448"/>
+            <a:ext cx="3843528" cy="502920"/>
           </a:xfrm>
           <a:prstGeom prst="rect">
             <a:avLst/>
@@ -4176,7 +4612,7 @@
           <a:solidFill>
             <a:srgbClr val="FFFFFF"/>
           </a:solidFill>
-          <a:ln w="12700">
+          <a:ln w="7620">
             <a:solidFill>
               <a:srgbClr val="008080"/>
             </a:solidFill>
@@ -4206,14 +4642,14 @@
       </p:sp>
       <p:sp>
         <p:nvSpPr>
-          <p:cNvPr id="17" name="TextBox 16"/>
+          <p:cNvPr id="30" name="TextBox 29"/>
           <p:cNvSpPr txBox="1"/>
           <p:nvPr/>
         </p:nvSpPr>
         <p:spPr>
           <a:xfrm>
-            <a:off x="3312414" y="1124712"/>
-            <a:ext cx="2690622" cy="3657600"/>
+            <a:off x="384048" y="5907024"/>
+            <a:ext cx="3715512" cy="420624"/>
           </a:xfrm>
           <a:prstGeom prst="rect">
             <a:avLst/>
@@ -4233,32 +4669,32 @@
                   <a:srgbClr val="1A1A1A"/>
                 </a:solidFill>
               </a:rPr>
-              <a:t>Vous observez et notez :
-Qu'est-ce qui a marché ?
-Qu'auriez-vous fait autrement ?</a:t>
-            </a:r>
-          </a:p>
-        </p:txBody>
-      </p:sp>
-      <p:sp>
-        <p:nvSpPr>
-          <p:cNvPr id="18" name="Rectangle 17"/>
+              <a:t>✔ Script lu 3 fois sans hésitation majeure</a:t>
+            </a:r>
+          </a:p>
+        </p:txBody>
+      </p:sp>
+      <p:sp>
+        <p:nvSpPr>
+          <p:cNvPr id="31" name="Rectangle 30"/>
           <p:cNvSpPr/>
           <p:nvPr/>
         </p:nvSpPr>
         <p:spPr>
           <a:xfrm>
-            <a:off x="6131052" y="804672"/>
-            <a:ext cx="2910078" cy="274320"/>
+            <a:off x="4154423" y="5870448"/>
+            <a:ext cx="3843528" cy="502920"/>
           </a:xfrm>
           <a:prstGeom prst="rect">
             <a:avLst/>
           </a:prstGeom>
           <a:solidFill>
-            <a:srgbClr val="2A7A50"/>
+            <a:srgbClr val="F0F7F7"/>
           </a:solidFill>
-          <a:ln>
-            <a:noFill/>
+          <a:ln w="7620">
+            <a:solidFill>
+              <a:srgbClr val="008080"/>
+            </a:solidFill>
           </a:ln>
         </p:spPr>
         <p:style>
@@ -4285,14 +4721,14 @@
       </p:sp>
       <p:sp>
         <p:nvSpPr>
-          <p:cNvPr id="19" name="TextBox 18"/>
+          <p:cNvPr id="32" name="TextBox 31"/>
           <p:cNvSpPr txBox="1"/>
           <p:nvPr/>
         </p:nvSpPr>
         <p:spPr>
           <a:xfrm>
-            <a:off x="6204204" y="841248"/>
-            <a:ext cx="2763774" cy="219456"/>
+            <a:off x="4264152" y="5907024"/>
+            <a:ext cx="3715512" cy="420624"/>
           </a:xfrm>
           <a:prstGeom prst="rect">
             <a:avLst/>
@@ -4307,26 +4743,26 @@
           <a:p>
             <a:pPr algn="l"/>
             <a:r>
-              <a:rPr sz="800" b="1" i="0">
+              <a:rPr sz="900" b="0" i="0">
                 <a:solidFill>
-                  <a:srgbClr val="FFFFFF"/>
+                  <a:srgbClr val="1A1A1A"/>
                 </a:solidFill>
               </a:rPr>
-              <a:t>APPORT</a:t>
-            </a:r>
-          </a:p>
-        </p:txBody>
-      </p:sp>
-      <p:sp>
-        <p:nvSpPr>
-          <p:cNvPr id="20" name="Rectangle 19"/>
+              <a:t>✔ 5 règles d'accroche récitées sans support</a:t>
+            </a:r>
+          </a:p>
+        </p:txBody>
+      </p:sp>
+      <p:sp>
+        <p:nvSpPr>
+          <p:cNvPr id="33" name="Rectangle 32"/>
           <p:cNvSpPr/>
           <p:nvPr/>
         </p:nvSpPr>
         <p:spPr>
           <a:xfrm>
-            <a:off x="6131052" y="1078992"/>
-            <a:ext cx="2910078" cy="3840480"/>
+            <a:off x="8034528" y="5870448"/>
+            <a:ext cx="3843528" cy="502920"/>
           </a:xfrm>
           <a:prstGeom prst="rect">
             <a:avLst/>
@@ -4334,9 +4770,9 @@
           <a:solidFill>
             <a:srgbClr val="FFFFFF"/>
           </a:solidFill>
-          <a:ln w="12700">
+          <a:ln w="7620">
             <a:solidFill>
-              <a:srgbClr val="2A7A50"/>
+              <a:srgbClr val="008080"/>
             </a:solidFill>
           </a:ln>
         </p:spPr>
@@ -4364,14 +4800,14 @@
       </p:sp>
       <p:sp>
         <p:nvSpPr>
-          <p:cNvPr id="21" name="TextBox 20"/>
+          <p:cNvPr id="34" name="TextBox 33"/>
           <p:cNvSpPr txBox="1"/>
           <p:nvPr/>
         </p:nvSpPr>
         <p:spPr>
           <a:xfrm>
-            <a:off x="6240780" y="1124712"/>
-            <a:ext cx="2690622" cy="3657600"/>
+            <a:off x="8144256" y="5907024"/>
+            <a:ext cx="3715512" cy="420624"/>
           </a:xfrm>
           <a:prstGeom prst="rect">
             <a:avLst/>
@@ -4391,481 +4827,7 @@
                   <a:srgbClr val="1A1A1A"/>
                 </a:solidFill>
               </a:rPr>
-              <a:t>Déconstruction des
-5 étapes. Ancrages.
-Language corporel.</a:t>
-            </a:r>
-          </a:p>
-        </p:txBody>
-      </p:sp>
-      <p:sp>
-        <p:nvSpPr>
-          <p:cNvPr id="22" name="Rectangle 21"/>
-          <p:cNvSpPr/>
-          <p:nvPr/>
-        </p:nvSpPr>
-        <p:spPr>
-          <a:xfrm>
-            <a:off x="9059418" y="804672"/>
-            <a:ext cx="2910078" cy="274320"/>
-          </a:xfrm>
-          <a:prstGeom prst="rect">
-            <a:avLst/>
-          </a:prstGeom>
-          <a:solidFill>
-            <a:srgbClr val="FF0000"/>
-          </a:solidFill>
-          <a:ln>
-            <a:noFill/>
-          </a:ln>
-        </p:spPr>
-        <p:style>
-          <a:lnRef idx="1">
-            <a:schemeClr val="accent1"/>
-          </a:lnRef>
-          <a:fillRef idx="3">
-            <a:schemeClr val="accent1"/>
-          </a:fillRef>
-          <a:effectRef idx="2">
-            <a:schemeClr val="accent1"/>
-          </a:effectRef>
-          <a:fontRef idx="minor">
-            <a:schemeClr val="lt1"/>
-          </a:fontRef>
-        </p:style>
-        <p:txBody>
-          <a:bodyPr rtlCol="0" anchor="ctr"/>
-          <a:lstStyle/>
-          <a:p>
-            <a:pPr algn="ctr"/>
-          </a:p>
-        </p:txBody>
-      </p:sp>
-      <p:sp>
-        <p:nvSpPr>
-          <p:cNvPr id="23" name="TextBox 22"/>
-          <p:cNvSpPr txBox="1"/>
-          <p:nvPr/>
-        </p:nvSpPr>
-        <p:spPr>
-          <a:xfrm>
-            <a:off x="9132570" y="841248"/>
-            <a:ext cx="2763774" cy="219456"/>
-          </a:xfrm>
-          <a:prstGeom prst="rect">
-            <a:avLst/>
-          </a:prstGeom>
-          <a:noFill/>
-        </p:spPr>
-        <p:txBody>
-          <a:bodyPr wrap="square">
-            <a:spAutoFit/>
-          </a:bodyPr>
-          <a:lstStyle/>
-          <a:p>
-            <a:pPr algn="l"/>
-            <a:r>
-              <a:rPr sz="800" b="1" i="0">
-                <a:solidFill>
-                  <a:srgbClr val="FFFFFF"/>
-                </a:solidFill>
-              </a:rPr>
-              <a:t>ENTRAÎNEMENT</a:t>
-            </a:r>
-          </a:p>
-        </p:txBody>
-      </p:sp>
-      <p:sp>
-        <p:nvSpPr>
-          <p:cNvPr id="24" name="Rectangle 23"/>
-          <p:cNvSpPr/>
-          <p:nvPr/>
-        </p:nvSpPr>
-        <p:spPr>
-          <a:xfrm>
-            <a:off x="9059418" y="1078992"/>
-            <a:ext cx="2910078" cy="3840480"/>
-          </a:xfrm>
-          <a:prstGeom prst="rect">
-            <a:avLst/>
-          </a:prstGeom>
-          <a:solidFill>
-            <a:srgbClr val="FFFFFF"/>
-          </a:solidFill>
-          <a:ln w="12700">
-            <a:solidFill>
-              <a:srgbClr val="FF0000"/>
-            </a:solidFill>
-          </a:ln>
-        </p:spPr>
-        <p:style>
-          <a:lnRef idx="1">
-            <a:schemeClr val="accent1"/>
-          </a:lnRef>
-          <a:fillRef idx="3">
-            <a:schemeClr val="accent1"/>
-          </a:fillRef>
-          <a:effectRef idx="2">
-            <a:schemeClr val="accent1"/>
-          </a:effectRef>
-          <a:fontRef idx="minor">
-            <a:schemeClr val="lt1"/>
-          </a:fontRef>
-        </p:style>
-        <p:txBody>
-          <a:bodyPr rtlCol="0" anchor="ctr"/>
-          <a:lstStyle/>
-          <a:p>
-            <a:pPr algn="ctr"/>
-          </a:p>
-        </p:txBody>
-      </p:sp>
-      <p:sp>
-        <p:nvSpPr>
-          <p:cNvPr id="25" name="TextBox 24"/>
-          <p:cNvSpPr txBox="1"/>
-          <p:nvPr/>
-        </p:nvSpPr>
-        <p:spPr>
-          <a:xfrm>
-            <a:off x="9169146" y="1124712"/>
-            <a:ext cx="2690622" cy="3657600"/>
-          </a:xfrm>
-          <a:prstGeom prst="rect">
-            <a:avLst/>
-          </a:prstGeom>
-          <a:noFill/>
-        </p:spPr>
-        <p:txBody>
-          <a:bodyPr wrap="square">
-            <a:spAutoFit/>
-          </a:bodyPr>
-          <a:lstStyle/>
-          <a:p>
-            <a:pPr algn="l"/>
-            <a:r>
-              <a:rPr sz="900" b="0" i="0">
-                <a:solidFill>
-                  <a:srgbClr val="1A1A1A"/>
-                </a:solidFill>
-              </a:rPr>
-              <a:t>Trinômes 90 min :
-fundraiser / passant /
-observateur. Rotation 15 min.</a:t>
-            </a:r>
-          </a:p>
-        </p:txBody>
-      </p:sp>
-      <p:sp>
-        <p:nvSpPr>
-          <p:cNvPr id="26" name="Rectangle 25"/>
-          <p:cNvSpPr/>
-          <p:nvPr/>
-        </p:nvSpPr>
-        <p:spPr>
-          <a:xfrm>
-            <a:off x="274320" y="5074920"/>
-            <a:ext cx="11640312" cy="274320"/>
-          </a:xfrm>
-          <a:prstGeom prst="rect">
-            <a:avLst/>
-          </a:prstGeom>
-          <a:solidFill>
-            <a:srgbClr val="FF0000"/>
-          </a:solidFill>
-          <a:ln>
-            <a:noFill/>
-          </a:ln>
-        </p:spPr>
-        <p:style>
-          <a:lnRef idx="1">
-            <a:schemeClr val="accent1"/>
-          </a:lnRef>
-          <a:fillRef idx="3">
-            <a:schemeClr val="accent1"/>
-          </a:fillRef>
-          <a:effectRef idx="2">
-            <a:schemeClr val="accent1"/>
-          </a:effectRef>
-          <a:fontRef idx="minor">
-            <a:schemeClr val="lt1"/>
-          </a:fontRef>
-        </p:style>
-        <p:txBody>
-          <a:bodyPr rtlCol="0" anchor="ctr"/>
-          <a:lstStyle/>
-          <a:p>
-            <a:pPr algn="ctr"/>
-          </a:p>
-        </p:txBody>
-      </p:sp>
-      <p:sp>
-        <p:nvSpPr>
-          <p:cNvPr id="27" name="TextBox 26"/>
-          <p:cNvSpPr txBox="1"/>
-          <p:nvPr/>
-        </p:nvSpPr>
-        <p:spPr>
-          <a:xfrm>
-            <a:off x="384048" y="5111496"/>
-            <a:ext cx="11430000" cy="219456"/>
-          </a:xfrm>
-          <a:prstGeom prst="rect">
-            <a:avLst/>
-          </a:prstGeom>
-          <a:noFill/>
-        </p:spPr>
-        <p:txBody>
-          <a:bodyPr wrap="square">
-            <a:spAutoFit/>
-          </a:bodyPr>
-          <a:lstStyle/>
-          <a:p>
-            <a:pPr algn="l"/>
-            <a:r>
-              <a:rPr sz="900" b="1" i="0">
-                <a:solidFill>
-                  <a:srgbClr val="FFFFFF"/>
-                </a:solidFill>
-              </a:rPr>
-              <a:t>Vos 3 réussites à valider aujourd'hui</a:t>
-            </a:r>
-          </a:p>
-        </p:txBody>
-      </p:sp>
-      <p:sp>
-        <p:nvSpPr>
-          <p:cNvPr id="28" name="Rectangle 27"/>
-          <p:cNvSpPr/>
-          <p:nvPr/>
-        </p:nvSpPr>
-        <p:spPr>
-          <a:xfrm>
-            <a:off x="274320" y="5367528"/>
-            <a:ext cx="3843528" cy="502920"/>
-          </a:xfrm>
-          <a:prstGeom prst="rect">
-            <a:avLst/>
-          </a:prstGeom>
-          <a:solidFill>
-            <a:srgbClr val="FFFFFF"/>
-          </a:solidFill>
-          <a:ln w="10160">
-            <a:solidFill>
-              <a:srgbClr val="FF0000"/>
-            </a:solidFill>
-          </a:ln>
-        </p:spPr>
-        <p:style>
-          <a:lnRef idx="1">
-            <a:schemeClr val="accent1"/>
-          </a:lnRef>
-          <a:fillRef idx="3">
-            <a:schemeClr val="accent1"/>
-          </a:fillRef>
-          <a:effectRef idx="2">
-            <a:schemeClr val="accent1"/>
-          </a:effectRef>
-          <a:fontRef idx="minor">
-            <a:schemeClr val="lt1"/>
-          </a:fontRef>
-        </p:style>
-        <p:txBody>
-          <a:bodyPr rtlCol="0" anchor="ctr"/>
-          <a:lstStyle/>
-          <a:p>
-            <a:pPr algn="ctr"/>
-          </a:p>
-        </p:txBody>
-      </p:sp>
-      <p:sp>
-        <p:nvSpPr>
-          <p:cNvPr id="29" name="TextBox 28"/>
-          <p:cNvSpPr txBox="1"/>
-          <p:nvPr/>
-        </p:nvSpPr>
-        <p:spPr>
-          <a:xfrm>
-            <a:off x="365760" y="5404104"/>
-            <a:ext cx="3715512" cy="420624"/>
-          </a:xfrm>
-          <a:prstGeom prst="rect">
-            <a:avLst/>
-          </a:prstGeom>
-          <a:noFill/>
-        </p:spPr>
-        <p:txBody>
-          <a:bodyPr wrap="square">
-            <a:spAutoFit/>
-          </a:bodyPr>
-          <a:lstStyle/>
-          <a:p>
-            <a:pPr algn="l"/>
-            <a:r>
-              <a:rPr sz="900" b="0" i="0">
-                <a:solidFill>
-                  <a:srgbClr val="1A1A1A"/>
-                </a:solidFill>
-              </a:rPr>
-              <a:t>✔ Grille C1+C2+C5 validée par votre formateur</a:t>
-            </a:r>
-          </a:p>
-        </p:txBody>
-      </p:sp>
-      <p:sp>
-        <p:nvSpPr>
-          <p:cNvPr id="30" name="Rectangle 29"/>
-          <p:cNvSpPr/>
-          <p:nvPr/>
-        </p:nvSpPr>
-        <p:spPr>
-          <a:xfrm>
-            <a:off x="4154423" y="5367528"/>
-            <a:ext cx="3843528" cy="502920"/>
-          </a:xfrm>
-          <a:prstGeom prst="rect">
-            <a:avLst/>
-          </a:prstGeom>
-          <a:solidFill>
-            <a:srgbClr val="FFFFFF"/>
-          </a:solidFill>
-          <a:ln w="10160">
-            <a:solidFill>
-              <a:srgbClr val="FF0000"/>
-            </a:solidFill>
-          </a:ln>
-        </p:spPr>
-        <p:style>
-          <a:lnRef idx="1">
-            <a:schemeClr val="accent1"/>
-          </a:lnRef>
-          <a:fillRef idx="3">
-            <a:schemeClr val="accent1"/>
-          </a:fillRef>
-          <a:effectRef idx="2">
-            <a:schemeClr val="accent1"/>
-          </a:effectRef>
-          <a:fontRef idx="minor">
-            <a:schemeClr val="lt1"/>
-          </a:fontRef>
-        </p:style>
-        <p:txBody>
-          <a:bodyPr rtlCol="0" anchor="ctr"/>
-          <a:lstStyle/>
-          <a:p>
-            <a:pPr algn="ctr"/>
-          </a:p>
-        </p:txBody>
-      </p:sp>
-      <p:sp>
-        <p:nvSpPr>
-          <p:cNvPr id="31" name="TextBox 30"/>
-          <p:cNvSpPr txBox="1"/>
-          <p:nvPr/>
-        </p:nvSpPr>
-        <p:spPr>
-          <a:xfrm>
-            <a:off x="4245863" y="5404104"/>
-            <a:ext cx="3715512" cy="420624"/>
-          </a:xfrm>
-          <a:prstGeom prst="rect">
-            <a:avLst/>
-          </a:prstGeom>
-          <a:noFill/>
-        </p:spPr>
-        <p:txBody>
-          <a:bodyPr wrap="square">
-            <a:spAutoFit/>
-          </a:bodyPr>
-          <a:lstStyle/>
-          <a:p>
-            <a:pPr algn="l"/>
-            <a:r>
-              <a:rPr sz="900" b="0" i="0">
-                <a:solidFill>
-                  <a:srgbClr val="1A1A1A"/>
-                </a:solidFill>
-              </a:rPr>
-              <a:t>✔ Auto-évaluation après votre 3ème round</a:t>
-            </a:r>
-          </a:p>
-        </p:txBody>
-      </p:sp>
-      <p:sp>
-        <p:nvSpPr>
-          <p:cNvPr id="32" name="Rectangle 31"/>
-          <p:cNvSpPr/>
-          <p:nvPr/>
-        </p:nvSpPr>
-        <p:spPr>
-          <a:xfrm>
-            <a:off x="8034527" y="5367528"/>
-            <a:ext cx="3843528" cy="502920"/>
-          </a:xfrm>
-          <a:prstGeom prst="rect">
-            <a:avLst/>
-          </a:prstGeom>
-          <a:solidFill>
-            <a:srgbClr val="FFFFFF"/>
-          </a:solidFill>
-          <a:ln w="10160">
-            <a:solidFill>
-              <a:srgbClr val="FF0000"/>
-            </a:solidFill>
-          </a:ln>
-        </p:spPr>
-        <p:style>
-          <a:lnRef idx="1">
-            <a:schemeClr val="accent1"/>
-          </a:lnRef>
-          <a:fillRef idx="3">
-            <a:schemeClr val="accent1"/>
-          </a:fillRef>
-          <a:effectRef idx="2">
-            <a:schemeClr val="accent1"/>
-          </a:effectRef>
-          <a:fontRef idx="minor">
-            <a:schemeClr val="lt1"/>
-          </a:fontRef>
-        </p:style>
-        <p:txBody>
-          <a:bodyPr rtlCol="0" anchor="ctr"/>
-          <a:lstStyle/>
-          <a:p>
-            <a:pPr algn="ctr"/>
-          </a:p>
-        </p:txBody>
-      </p:sp>
-      <p:sp>
-        <p:nvSpPr>
-          <p:cNvPr id="33" name="TextBox 32"/>
-          <p:cNvSpPr txBox="1"/>
-          <p:nvPr/>
-        </p:nvSpPr>
-        <p:spPr>
-          <a:xfrm>
-            <a:off x="8125967" y="5404104"/>
-            <a:ext cx="3715512" cy="420624"/>
-          </a:xfrm>
-          <a:prstGeom prst="rect">
-            <a:avLst/>
-          </a:prstGeom>
-          <a:noFill/>
-        </p:spPr>
-        <p:txBody>
-          <a:bodyPr wrap="square">
-            <a:spAutoFit/>
-          </a:bodyPr>
-          <a:lstStyle/>
-          <a:p>
-            <a:pPr algn="l"/>
-            <a:r>
-              <a:rPr sz="900" b="0" i="0">
-                <a:solidFill>
-                  <a:srgbClr val="1A1A1A"/>
-                </a:solidFill>
-              </a:rPr>
-              <a:t>✔ Score ≥ 12/20 pour passer à J4</a:t>
+              <a:t>✔ Score seuil : 12/20 pour passage J4</a:t>
             </a:r>
           </a:p>
         </p:txBody>
@@ -4940,7 +4902,7 @@
         <p:spPr>
           <a:xfrm>
             <a:off x="0" y="0"/>
-            <a:ext cx="12188952" cy="658368"/>
+            <a:ext cx="12188952" cy="685800"/>
           </a:xfrm>
           <a:prstGeom prst="rect">
             <a:avLst/>
@@ -4982,14 +4944,14 @@
         </p:nvSpPr>
         <p:spPr>
           <a:xfrm>
-            <a:off x="0" y="640080"/>
-            <a:ext cx="12188952" cy="54864"/>
+            <a:off x="0" y="667512"/>
+            <a:ext cx="12188952" cy="45720"/>
           </a:xfrm>
           <a:prstGeom prst="rect">
             <a:avLst/>
           </a:prstGeom>
           <a:solidFill>
-            <a:srgbClr val="FF0000"/>
+            <a:srgbClr val="00AAAA"/>
           </a:solidFill>
           <a:ln>
             <a:noFill/>
@@ -5025,8 +4987,8 @@
         </p:nvSpPr>
         <p:spPr>
           <a:xfrm>
-            <a:off x="164592" y="64008"/>
-            <a:ext cx="685800" cy="530352"/>
+            <a:off x="164592" y="73152"/>
+            <a:ext cx="2011680" cy="347472"/>
           </a:xfrm>
           <a:prstGeom prst="rect">
             <a:avLst/>
@@ -5041,12 +5003,12 @@
           <a:p>
             <a:pPr algn="l"/>
             <a:r>
-              <a:rPr sz="2000" b="1" i="0">
+              <a:rPr sz="1400" b="1" i="0">
                 <a:solidFill>
                   <a:srgbClr val="FFFFFF"/>
                 </a:solidFill>
               </a:rPr>
-              <a:t>SHY</a:t>
+              <a:t>SHY-Performance</a:t>
             </a:r>
           </a:p>
         </p:txBody>
@@ -5059,14 +5021,14 @@
         </p:nvSpPr>
         <p:spPr>
           <a:xfrm>
-            <a:off x="914400" y="91440"/>
-            <a:ext cx="36576" cy="475488"/>
+            <a:off x="2286000" y="91440"/>
+            <a:ext cx="36576" cy="502920"/>
           </a:xfrm>
           <a:prstGeom prst="rect">
             <a:avLst/>
           </a:prstGeom>
           <a:solidFill>
-            <a:srgbClr val="FF0000"/>
+            <a:srgbClr val="00AAAA"/>
           </a:solidFill>
           <a:ln>
             <a:noFill/>
@@ -5102,8 +5064,8 @@
         </p:nvSpPr>
         <p:spPr>
           <a:xfrm>
-            <a:off x="1024128" y="91440"/>
-            <a:ext cx="10881360" cy="475488"/>
+            <a:off x="2423160" y="91440"/>
+            <a:ext cx="9235440" cy="502920"/>
           </a:xfrm>
           <a:prstGeom prst="rect">
             <a:avLst/>
@@ -5118,19 +5080,43 @@
           <a:p>
             <a:pPr algn="l"/>
             <a:r>
-              <a:rPr sz="1700" b="1" i="0">
+              <a:rPr sz="1600" b="1" i="0">
                 <a:solidFill>
                   <a:srgbClr val="FFFFFF"/>
                 </a:solidFill>
               </a:rPr>
-              <a:t>Les 5 Étapes de Votre Script — Apprenez à les Incarner</a:t>
-            </a:r>
-          </a:p>
-        </p:txBody>
-      </p:sp>
-      <p:sp>
-        <p:nvSpPr>
-          <p:cNvPr id="8" name="Rectangle 7"/>
+              <a:t>Le Script Officiel UNICEF — Les 7 Étapes que Vous Allez Maîtriser</a:t>
+            </a:r>
+          </a:p>
+        </p:txBody>
+      </p:sp>
+      <p:pic>
+        <p:nvPicPr>
+          <p:cNvPr id="8" name="Picture 7" descr="shy_logo_v2.png"/>
+          <p:cNvPicPr>
+            <a:picLocks noChangeAspect="1"/>
+          </p:cNvPicPr>
+          <p:nvPr/>
+        </p:nvPicPr>
+        <p:blipFill>
+          <a:blip r:embed="rId2"/>
+          <a:stretch>
+            <a:fillRect/>
+          </a:stretch>
+        </p:blipFill>
+        <p:spPr>
+          <a:xfrm>
+            <a:off x="11247120" y="0"/>
+            <a:ext cx="822960" cy="676656"/>
+          </a:xfrm>
+          <a:prstGeom prst="rect">
+            <a:avLst/>
+          </a:prstGeom>
+        </p:spPr>
+      </p:pic>
+      <p:sp>
+        <p:nvSpPr>
+          <p:cNvPr id="9" name="Rectangle 8"/>
           <p:cNvSpPr/>
           <p:nvPr/>
         </p:nvSpPr>
@@ -5173,7 +5159,7 @@
       </p:sp>
       <p:sp>
         <p:nvSpPr>
-          <p:cNvPr id="9" name="TextBox 8"/>
+          <p:cNvPr id="10" name="TextBox 9"/>
           <p:cNvSpPr txBox="1"/>
           <p:nvPr/>
         </p:nvSpPr>
@@ -5195,26 +5181,26 @@
           <a:p>
             <a:pPr algn="ctr"/>
             <a:r>
-              <a:rPr sz="900" b="0" i="0">
+              <a:rPr sz="800" b="0" i="0">
                 <a:solidFill>
                   <a:srgbClr val="FFFFFF"/>
                 </a:solidFill>
               </a:rPr>
-              <a:t>SHY-Performance  ·  Formation FIM  ·  V6-01062026SHY-TE</a:t>
-            </a:r>
-          </a:p>
-        </p:txBody>
-      </p:sp>
-      <p:sp>
-        <p:nvSpPr>
-          <p:cNvPr id="10" name="Rectangle 9"/>
+              <a:t>SHY-Performance  ·  Formation FIM  ·  UNICEF France  ·  V6-01062026SHY-TE</a:t>
+            </a:r>
+          </a:p>
+        </p:txBody>
+      </p:sp>
+      <p:sp>
+        <p:nvSpPr>
+          <p:cNvPr id="11" name="Rectangle 10"/>
           <p:cNvSpPr/>
           <p:nvPr/>
         </p:nvSpPr>
         <p:spPr>
           <a:xfrm>
             <a:off x="274320" y="804672"/>
-            <a:ext cx="2286000" cy="347472"/>
+            <a:ext cx="1662901" cy="457200"/>
           </a:xfrm>
           <a:prstGeom prst="rect">
             <a:avLst/>
@@ -5250,14 +5236,14 @@
       </p:sp>
       <p:sp>
         <p:nvSpPr>
-          <p:cNvPr id="11" name="TextBox 10"/>
+          <p:cNvPr id="12" name="TextBox 11"/>
           <p:cNvSpPr txBox="1"/>
           <p:nvPr/>
         </p:nvSpPr>
         <p:spPr>
           <a:xfrm>
-            <a:off x="347472" y="832104"/>
-            <a:ext cx="2139696" cy="274320"/>
+            <a:off x="329184" y="822960"/>
+            <a:ext cx="1571461" cy="420624"/>
           </a:xfrm>
           <a:prstGeom prst="rect">
             <a:avLst/>
@@ -5270,28 +5256,29 @@
           </a:bodyPr>
           <a:lstStyle/>
           <a:p>
-            <a:pPr algn="l"/>
-            <a:r>
-              <a:rPr sz="900" b="1" i="0">
+            <a:pPr algn="ctr"/>
+            <a:r>
+              <a:rPr sz="800" b="1" i="0">
                 <a:solidFill>
                   <a:srgbClr val="FFFFFF"/>
                 </a:solidFill>
               </a:rPr>
-              <a:t>① ACCROCHE  [10–15 sec]</a:t>
-            </a:r>
-          </a:p>
-        </p:txBody>
-      </p:sp>
-      <p:sp>
-        <p:nvSpPr>
-          <p:cNvPr id="12" name="Rectangle 11"/>
+              <a:t>①
+ACCROCHE</a:t>
+            </a:r>
+          </a:p>
+        </p:txBody>
+      </p:sp>
+      <p:sp>
+        <p:nvSpPr>
+          <p:cNvPr id="13" name="Rectangle 12"/>
           <p:cNvSpPr/>
           <p:nvPr/>
         </p:nvSpPr>
         <p:spPr>
           <a:xfrm>
-            <a:off x="274320" y="1152144"/>
-            <a:ext cx="2286000" cy="4206240"/>
+            <a:off x="274320" y="1261872"/>
+            <a:ext cx="1662901" cy="4434840"/>
           </a:xfrm>
           <a:prstGeom prst="rect">
             <a:avLst/>
@@ -5299,7 +5286,7 @@
           <a:solidFill>
             <a:srgbClr val="FFFFFF"/>
           </a:solidFill>
-          <a:ln w="19050">
+          <a:ln w="15240">
             <a:solidFill>
               <a:srgbClr val="005555"/>
             </a:solidFill>
@@ -5329,14 +5316,14 @@
       </p:sp>
       <p:sp>
         <p:nvSpPr>
-          <p:cNvPr id="13" name="TextBox 12"/>
+          <p:cNvPr id="14" name="TextBox 13"/>
           <p:cNvSpPr txBox="1"/>
           <p:nvPr/>
         </p:nvSpPr>
         <p:spPr>
           <a:xfrm>
-            <a:off x="384048" y="1225296"/>
-            <a:ext cx="2066543" cy="3931920"/>
+            <a:off x="347472" y="1316736"/>
+            <a:ext cx="1534885" cy="4251960"/>
           </a:xfrm>
           <a:prstGeom prst="rect">
             <a:avLst/>
@@ -5351,28 +5338,30 @@
           <a:p>
             <a:pPr algn="l"/>
             <a:r>
-              <a:rPr sz="1000" b="0" i="0">
+              <a:rPr sz="850" b="0" i="0">
                 <a:solidFill>
                   <a:srgbClr val="1A1A1A"/>
                 </a:solidFill>
               </a:rPr>
-              <a:t>Contact visuel · Sourire · Question ouverte
-'Bonjour ! Vous avez 2 petites minutes
-pour les enfants ?'</a:t>
-            </a:r>
-          </a:p>
-        </p:txBody>
-      </p:sp>
-      <p:sp>
-        <p:nvSpPr>
-          <p:cNvPr id="14" name="Rectangle 13"/>
+              <a:t>Ouverture téléphonique conforme
+aux 5 règles officielles
+Ton chaleureux, prénom + nom,
+organisation clairement nommée,
+raison de l'appel annoncée</a:t>
+            </a:r>
+          </a:p>
+        </p:txBody>
+      </p:sp>
+      <p:sp>
+        <p:nvSpPr>
+          <p:cNvPr id="15" name="Rectangle 14"/>
           <p:cNvSpPr/>
           <p:nvPr/>
         </p:nvSpPr>
         <p:spPr>
           <a:xfrm>
-            <a:off x="2615184" y="804672"/>
-            <a:ext cx="2286000" cy="347472"/>
+            <a:off x="1955509" y="804672"/>
+            <a:ext cx="1662901" cy="457200"/>
           </a:xfrm>
           <a:prstGeom prst="rect">
             <a:avLst/>
@@ -5408,14 +5397,14 @@
       </p:sp>
       <p:sp>
         <p:nvSpPr>
-          <p:cNvPr id="15" name="TextBox 14"/>
+          <p:cNvPr id="16" name="TextBox 15"/>
           <p:cNvSpPr txBox="1"/>
           <p:nvPr/>
         </p:nvSpPr>
         <p:spPr>
           <a:xfrm>
-            <a:off x="2688336" y="832104"/>
-            <a:ext cx="2139696" cy="274320"/>
+            <a:off x="2010373" y="822960"/>
+            <a:ext cx="1571461" cy="420624"/>
           </a:xfrm>
           <a:prstGeom prst="rect">
             <a:avLst/>
@@ -5428,28 +5417,29 @@
           </a:bodyPr>
           <a:lstStyle/>
           <a:p>
-            <a:pPr algn="l"/>
-            <a:r>
-              <a:rPr sz="900" b="1" i="0">
+            <a:pPr algn="ctr"/>
+            <a:r>
+              <a:rPr sz="800" b="1" i="0">
                 <a:solidFill>
                   <a:srgbClr val="FFFFFF"/>
                 </a:solidFill>
               </a:rPr>
-              <a:t>② CONTEXTE  [20 sec]</a:t>
-            </a:r>
-          </a:p>
-        </p:txBody>
-      </p:sp>
-      <p:sp>
-        <p:nvSpPr>
-          <p:cNvPr id="16" name="Rectangle 15"/>
+              <a:t>②
+MALNUTRITION</a:t>
+            </a:r>
+          </a:p>
+        </p:txBody>
+      </p:sp>
+      <p:sp>
+        <p:nvSpPr>
+          <p:cNvPr id="17" name="Rectangle 16"/>
           <p:cNvSpPr/>
           <p:nvPr/>
         </p:nvSpPr>
         <p:spPr>
           <a:xfrm>
-            <a:off x="2615184" y="1152144"/>
-            <a:ext cx="2286000" cy="4206240"/>
+            <a:off x="1955509" y="1261872"/>
+            <a:ext cx="1662901" cy="4434840"/>
           </a:xfrm>
           <a:prstGeom prst="rect">
             <a:avLst/>
@@ -5457,7 +5447,7 @@
           <a:solidFill>
             <a:srgbClr val="FFFFFF"/>
           </a:solidFill>
-          <a:ln w="19050">
+          <a:ln w="15240">
             <a:solidFill>
               <a:srgbClr val="008080"/>
             </a:solidFill>
@@ -5487,14 +5477,14 @@
       </p:sp>
       <p:sp>
         <p:nvSpPr>
-          <p:cNvPr id="17" name="TextBox 16"/>
+          <p:cNvPr id="18" name="TextBox 17"/>
           <p:cNvSpPr txBox="1"/>
           <p:nvPr/>
         </p:nvSpPr>
         <p:spPr>
           <a:xfrm>
-            <a:off x="2724912" y="1225296"/>
-            <a:ext cx="2066543" cy="3931920"/>
+            <a:off x="2028661" y="1316736"/>
+            <a:ext cx="1534885" cy="4251960"/>
           </a:xfrm>
           <a:prstGeom prst="rect">
             <a:avLst/>
@@ -5509,35 +5499,36 @@
           <a:p>
             <a:pPr algn="l"/>
             <a:r>
-              <a:rPr sz="1000" b="0" i="0">
+              <a:rPr sz="850" b="0" i="0">
                 <a:solidFill>
                   <a:srgbClr val="1A1A1A"/>
                 </a:solidFill>
               </a:rPr>
-              <a:t>Identification claire
-'Je travaille avec l'UNICEF — nous
-collectons des fonds
-pour les enfants en danger.'</a:t>
-            </a:r>
-          </a:p>
-        </p:txBody>
-      </p:sp>
-      <p:sp>
-        <p:nvSpPr>
-          <p:cNvPr id="18" name="Rectangle 17"/>
+              <a:t>Présentation de la cause :
+la malnutrition aigüe sévère
+Chiffre-clé : 1 enfant toutes
+les 11 secondes · Dimension
+humaine et émotionnelle</a:t>
+            </a:r>
+          </a:p>
+        </p:txBody>
+      </p:sp>
+      <p:sp>
+        <p:nvSpPr>
+          <p:cNvPr id="19" name="Rectangle 18"/>
           <p:cNvSpPr/>
           <p:nvPr/>
         </p:nvSpPr>
         <p:spPr>
           <a:xfrm>
-            <a:off x="4956048" y="804672"/>
-            <a:ext cx="2286000" cy="347472"/>
+            <a:off x="3636699" y="804672"/>
+            <a:ext cx="1662901" cy="457200"/>
           </a:xfrm>
           <a:prstGeom prst="rect">
             <a:avLst/>
           </a:prstGeom>
           <a:solidFill>
-            <a:srgbClr val="2A7A50"/>
+            <a:srgbClr val="006A6A"/>
           </a:solidFill>
           <a:ln>
             <a:noFill/>
@@ -5567,14 +5558,14 @@
       </p:sp>
       <p:sp>
         <p:nvSpPr>
-          <p:cNvPr id="19" name="TextBox 18"/>
+          <p:cNvPr id="20" name="TextBox 19"/>
           <p:cNvSpPr txBox="1"/>
           <p:nvPr/>
         </p:nvSpPr>
         <p:spPr>
           <a:xfrm>
-            <a:off x="5029200" y="832104"/>
-            <a:ext cx="2139696" cy="274320"/>
+            <a:off x="3691563" y="822960"/>
+            <a:ext cx="1571461" cy="420624"/>
           </a:xfrm>
           <a:prstGeom prst="rect">
             <a:avLst/>
@@ -5587,28 +5578,29 @@
           </a:bodyPr>
           <a:lstStyle/>
           <a:p>
-            <a:pPr algn="l"/>
-            <a:r>
-              <a:rPr sz="900" b="1" i="0">
+            <a:pPr algn="ctr"/>
+            <a:r>
+              <a:rPr sz="800" b="1" i="0">
                 <a:solidFill>
                   <a:srgbClr val="FFFFFF"/>
                 </a:solidFill>
               </a:rPr>
-              <a:t>③ IMPACT STORY  [45–60 sec]</a:t>
-            </a:r>
-          </a:p>
-        </p:txBody>
-      </p:sp>
-      <p:sp>
-        <p:nvSpPr>
-          <p:cNvPr id="20" name="Rectangle 19"/>
+              <a:t>③
+SACHETS RUTF</a:t>
+            </a:r>
+          </a:p>
+        </p:txBody>
+      </p:sp>
+      <p:sp>
+        <p:nvSpPr>
+          <p:cNvPr id="21" name="Rectangle 20"/>
           <p:cNvSpPr/>
           <p:nvPr/>
         </p:nvSpPr>
         <p:spPr>
           <a:xfrm>
-            <a:off x="4956048" y="1152144"/>
-            <a:ext cx="2286000" cy="4206240"/>
+            <a:off x="3636699" y="1261872"/>
+            <a:ext cx="1662901" cy="4434840"/>
           </a:xfrm>
           <a:prstGeom prst="rect">
             <a:avLst/>
@@ -5616,9 +5608,9 @@
           <a:solidFill>
             <a:srgbClr val="FFFFFF"/>
           </a:solidFill>
-          <a:ln w="19050">
+          <a:ln w="15240">
             <a:solidFill>
-              <a:srgbClr val="2A7A50"/>
+              <a:srgbClr val="006A6A"/>
             </a:solidFill>
           </a:ln>
         </p:spPr>
@@ -5646,14 +5638,14 @@
       </p:sp>
       <p:sp>
         <p:nvSpPr>
-          <p:cNvPr id="21" name="TextBox 20"/>
+          <p:cNvPr id="22" name="TextBox 21"/>
           <p:cNvSpPr txBox="1"/>
           <p:nvPr/>
         </p:nvSpPr>
         <p:spPr>
           <a:xfrm>
-            <a:off x="5065776" y="1225296"/>
-            <a:ext cx="2066543" cy="3931920"/>
+            <a:off x="3709851" y="1316736"/>
+            <a:ext cx="1534885" cy="4251960"/>
           </a:xfrm>
           <a:prstGeom prst="rect">
             <a:avLst/>
@@ -5668,35 +5660,36 @@
           <a:p>
             <a:pPr algn="l"/>
             <a:r>
-              <a:rPr sz="1000" b="0" i="0">
+              <a:rPr sz="850" b="0" i="0">
                 <a:solidFill>
                   <a:srgbClr val="1A1A1A"/>
                 </a:solidFill>
               </a:rPr>
-              <a:t>Histoire vraie d'1 enfant
-Prénom + pays + situation
-Fait chiffré + résolution
-par le don</a:t>
-            </a:r>
-          </a:p>
-        </p:txBody>
-      </p:sp>
-      <p:sp>
-        <p:nvSpPr>
-          <p:cNvPr id="22" name="Rectangle 21"/>
+              <a:t>La solution concrète de l'UNICEF :
+les sachets RUTF (92g)
+6 à 8 semaines pour guérir
+un enfant sévèrement malnutri
+Coût : quelques euros/traitement</a:t>
+            </a:r>
+          </a:p>
+        </p:txBody>
+      </p:sp>
+      <p:sp>
+        <p:nvSpPr>
+          <p:cNvPr id="23" name="Rectangle 22"/>
           <p:cNvSpPr/>
           <p:nvPr/>
         </p:nvSpPr>
         <p:spPr>
           <a:xfrm>
-            <a:off x="7296912" y="804672"/>
-            <a:ext cx="2286000" cy="347472"/>
+            <a:off x="5317889" y="804672"/>
+            <a:ext cx="1662901" cy="457200"/>
           </a:xfrm>
           <a:prstGeom prst="rect">
             <a:avLst/>
           </a:prstGeom>
           <a:solidFill>
-            <a:srgbClr val="C08010"/>
+            <a:srgbClr val="00AAAA"/>
           </a:solidFill>
           <a:ln>
             <a:noFill/>
@@ -5726,14 +5719,14 @@
       </p:sp>
       <p:sp>
         <p:nvSpPr>
-          <p:cNvPr id="23" name="TextBox 22"/>
+          <p:cNvPr id="24" name="TextBox 23"/>
           <p:cNvSpPr txBox="1"/>
           <p:nvPr/>
         </p:nvSpPr>
         <p:spPr>
           <a:xfrm>
-            <a:off x="7370064" y="832104"/>
-            <a:ext cx="2139696" cy="274320"/>
+            <a:off x="5372753" y="822960"/>
+            <a:ext cx="1571461" cy="420624"/>
           </a:xfrm>
           <a:prstGeom prst="rect">
             <a:avLst/>
@@ -5746,28 +5739,29 @@
           </a:bodyPr>
           <a:lstStyle/>
           <a:p>
-            <a:pPr algn="l"/>
-            <a:r>
-              <a:rPr sz="900" b="1" i="0">
+            <a:pPr algn="ctr"/>
+            <a:r>
+              <a:rPr sz="800" b="1" i="0">
                 <a:solidFill>
                   <a:srgbClr val="FFFFFF"/>
                 </a:solidFill>
               </a:rPr>
-              <a:t>④ PROPOSITION  [30 sec]</a:t>
-            </a:r>
-          </a:p>
-        </p:txBody>
-      </p:sp>
-      <p:sp>
-        <p:nvSpPr>
-          <p:cNvPr id="24" name="Rectangle 23"/>
+              <a:t>④
+APPEL AU SOUTIEN</a:t>
+            </a:r>
+          </a:p>
+        </p:txBody>
+      </p:sp>
+      <p:sp>
+        <p:nvSpPr>
+          <p:cNvPr id="25" name="Rectangle 24"/>
           <p:cNvSpPr/>
           <p:nvPr/>
         </p:nvSpPr>
         <p:spPr>
           <a:xfrm>
-            <a:off x="7296912" y="1152144"/>
-            <a:ext cx="2286000" cy="4206240"/>
+            <a:off x="5317889" y="1261872"/>
+            <a:ext cx="1662901" cy="4434840"/>
           </a:xfrm>
           <a:prstGeom prst="rect">
             <a:avLst/>
@@ -5775,9 +5769,9 @@
           <a:solidFill>
             <a:srgbClr val="FFFFFF"/>
           </a:solidFill>
-          <a:ln w="19050">
+          <a:ln w="15240">
             <a:solidFill>
-              <a:srgbClr val="C08010"/>
+              <a:srgbClr val="00AAAA"/>
             </a:solidFill>
           </a:ln>
         </p:spPr>
@@ -5805,14 +5799,14 @@
       </p:sp>
       <p:sp>
         <p:nvSpPr>
-          <p:cNvPr id="25" name="TextBox 24"/>
+          <p:cNvPr id="26" name="TextBox 25"/>
           <p:cNvSpPr txBox="1"/>
           <p:nvPr/>
         </p:nvSpPr>
         <p:spPr>
           <a:xfrm>
-            <a:off x="7406640" y="1225296"/>
-            <a:ext cx="2066543" cy="3931920"/>
+            <a:off x="5391041" y="1316736"/>
+            <a:ext cx="1534885" cy="4251960"/>
           </a:xfrm>
           <a:prstGeom prst="rect">
             <a:avLst/>
@@ -5827,35 +5821,36 @@
           <a:p>
             <a:pPr algn="l"/>
             <a:r>
-              <a:rPr sz="1000" b="0" i="0">
+              <a:rPr sz="850" b="0" i="0">
                 <a:solidFill>
                   <a:srgbClr val="1A1A1A"/>
                 </a:solidFill>
               </a:rPr>
-              <a:t>'10€/mois c'est 30 centimes
-par jour — moins qu'un café.
-En 1 an vous offrez l'accès
-aux soins à 6 enfants.'</a:t>
-            </a:r>
-          </a:p>
-        </p:txBody>
-      </p:sp>
-      <p:sp>
-        <p:nvSpPr>
-          <p:cNvPr id="26" name="Rectangle 25"/>
+              <a:t>Proposition du don mensuel
+par Prélèvement Automatique
+Montant suggéré adapté
+Impact chiffré du don
+Simplicité du geste</a:t>
+            </a:r>
+          </a:p>
+        </p:txBody>
+      </p:sp>
+      <p:sp>
+        <p:nvSpPr>
+          <p:cNvPr id="27" name="Rectangle 26"/>
           <p:cNvSpPr/>
           <p:nvPr/>
         </p:nvSpPr>
         <p:spPr>
           <a:xfrm>
-            <a:off x="9637776" y="804672"/>
-            <a:ext cx="2286000" cy="347472"/>
+            <a:off x="6999078" y="804672"/>
+            <a:ext cx="1662901" cy="457200"/>
           </a:xfrm>
           <a:prstGeom prst="rect">
             <a:avLst/>
           </a:prstGeom>
           <a:solidFill>
-            <a:srgbClr val="FF0000"/>
+            <a:srgbClr val="337777"/>
           </a:solidFill>
           <a:ln>
             <a:noFill/>
@@ -5885,14 +5880,14 @@
       </p:sp>
       <p:sp>
         <p:nvSpPr>
-          <p:cNvPr id="27" name="TextBox 26"/>
+          <p:cNvPr id="28" name="TextBox 27"/>
           <p:cNvSpPr txBox="1"/>
           <p:nvPr/>
         </p:nvSpPr>
         <p:spPr>
           <a:xfrm>
-            <a:off x="9710928" y="832104"/>
-            <a:ext cx="2139696" cy="274320"/>
+            <a:off x="7053942" y="822960"/>
+            <a:ext cx="1571461" cy="420624"/>
           </a:xfrm>
           <a:prstGeom prst="rect">
             <a:avLst/>
@@ -5905,28 +5900,29 @@
           </a:bodyPr>
           <a:lstStyle/>
           <a:p>
-            <a:pPr algn="l"/>
-            <a:r>
-              <a:rPr sz="900" b="1" i="0">
+            <a:pPr algn="ctr"/>
+            <a:r>
+              <a:rPr sz="800" b="1" i="0">
                 <a:solidFill>
                   <a:srgbClr val="FFFFFF"/>
                 </a:solidFill>
               </a:rPr>
-              <a:t>⑤ ENGAGEMENT  [20 sec]</a:t>
-            </a:r>
-          </a:p>
-        </p:txBody>
-      </p:sp>
-      <p:sp>
-        <p:nvSpPr>
-          <p:cNvPr id="28" name="Rectangle 27"/>
+              <a:t>⑤
+SI DON PONCTUEL</a:t>
+            </a:r>
+          </a:p>
+        </p:txBody>
+      </p:sp>
+      <p:sp>
+        <p:nvSpPr>
+          <p:cNvPr id="29" name="Rectangle 28"/>
           <p:cNvSpPr/>
           <p:nvPr/>
         </p:nvSpPr>
         <p:spPr>
           <a:xfrm>
-            <a:off x="9637776" y="1152144"/>
-            <a:ext cx="2286000" cy="4206240"/>
+            <a:off x="6999078" y="1261872"/>
+            <a:ext cx="1662901" cy="4434840"/>
           </a:xfrm>
           <a:prstGeom prst="rect">
             <a:avLst/>
@@ -5934,9 +5930,9 @@
           <a:solidFill>
             <a:srgbClr val="FFFFFF"/>
           </a:solidFill>
-          <a:ln w="19050">
+          <a:ln w="15240">
             <a:solidFill>
-              <a:srgbClr val="FF0000"/>
+              <a:srgbClr val="337777"/>
             </a:solidFill>
           </a:ln>
         </p:spPr>
@@ -5964,14 +5960,14 @@
       </p:sp>
       <p:sp>
         <p:nvSpPr>
-          <p:cNvPr id="29" name="TextBox 28"/>
+          <p:cNvPr id="30" name="TextBox 29"/>
           <p:cNvSpPr txBox="1"/>
           <p:nvPr/>
         </p:nvSpPr>
         <p:spPr>
           <a:xfrm>
-            <a:off x="9747504" y="1225296"/>
-            <a:ext cx="2066543" cy="3931920"/>
+            <a:off x="7072230" y="1316736"/>
+            <a:ext cx="1534885" cy="4251960"/>
           </a:xfrm>
           <a:prstGeom prst="rect">
             <a:avLst/>
@@ -5986,35 +5982,37 @@
           <a:p>
             <a:pPr algn="l"/>
             <a:r>
-              <a:rPr sz="1000" b="0" i="0">
+              <a:rPr sz="850" b="0" i="0">
                 <a:solidFill>
                   <a:srgbClr val="1A1A1A"/>
                 </a:solidFill>
               </a:rPr>
-              <a:t>Formulaire simple · Accompagner
-la signature · Remerciement sincère
-'Merci ! Vous recevrez votre
-confirmation par SMS sous 24h.'</a:t>
-            </a:r>
-          </a:p>
-        </p:txBody>
-      </p:sp>
-      <p:sp>
-        <p:nvSpPr>
-          <p:cNvPr id="30" name="Rectangle 29"/>
+              <a:t>Si le prospect propose
+un don unique, réorienter
+vers le don régulier
+'Je comprends — et si on
+envisageait quelque chose
+de régulier ?'</a:t>
+            </a:r>
+          </a:p>
+        </p:txBody>
+      </p:sp>
+      <p:sp>
+        <p:nvSpPr>
+          <p:cNvPr id="31" name="Rectangle 30"/>
           <p:cNvSpPr/>
           <p:nvPr/>
         </p:nvSpPr>
         <p:spPr>
           <a:xfrm>
-            <a:off x="274320" y="5486400"/>
-            <a:ext cx="11640312" cy="402336"/>
+            <a:off x="8680268" y="804672"/>
+            <a:ext cx="1662901" cy="457200"/>
           </a:xfrm>
           <a:prstGeom prst="rect">
             <a:avLst/>
           </a:prstGeom>
           <a:solidFill>
-            <a:srgbClr val="005555"/>
+            <a:srgbClr val="226666"/>
           </a:solidFill>
           <a:ln>
             <a:noFill/>
@@ -6044,14 +6042,339 @@
       </p:sp>
       <p:sp>
         <p:nvSpPr>
-          <p:cNvPr id="31" name="TextBox 30"/>
+          <p:cNvPr id="32" name="TextBox 31"/>
           <p:cNvSpPr txBox="1"/>
           <p:nvPr/>
         </p:nvSpPr>
         <p:spPr>
           <a:xfrm>
-            <a:off x="411479" y="5559552"/>
-            <a:ext cx="11365992" cy="256032"/>
+            <a:off x="8735132" y="822960"/>
+            <a:ext cx="1571461" cy="420624"/>
+          </a:xfrm>
+          <a:prstGeom prst="rect">
+            <a:avLst/>
+          </a:prstGeom>
+          <a:noFill/>
+        </p:spPr>
+        <p:txBody>
+          <a:bodyPr wrap="square">
+            <a:spAutoFit/>
+          </a:bodyPr>
+          <a:lstStyle/>
+          <a:p>
+            <a:pPr algn="ctr"/>
+            <a:r>
+              <a:rPr sz="800" b="1" i="0">
+                <a:solidFill>
+                  <a:srgbClr val="FFFFFF"/>
+                </a:solidFill>
+              </a:rPr>
+              <a:t>⑥
+INDÉCIS</a:t>
+            </a:r>
+          </a:p>
+        </p:txBody>
+      </p:sp>
+      <p:sp>
+        <p:nvSpPr>
+          <p:cNvPr id="33" name="Rectangle 32"/>
+          <p:cNvSpPr/>
+          <p:nvPr/>
+        </p:nvSpPr>
+        <p:spPr>
+          <a:xfrm>
+            <a:off x="8680268" y="1261872"/>
+            <a:ext cx="1662901" cy="4434840"/>
+          </a:xfrm>
+          <a:prstGeom prst="rect">
+            <a:avLst/>
+          </a:prstGeom>
+          <a:solidFill>
+            <a:srgbClr val="FFFFFF"/>
+          </a:solidFill>
+          <a:ln w="15240">
+            <a:solidFill>
+              <a:srgbClr val="226666"/>
+            </a:solidFill>
+          </a:ln>
+        </p:spPr>
+        <p:style>
+          <a:lnRef idx="1">
+            <a:schemeClr val="accent1"/>
+          </a:lnRef>
+          <a:fillRef idx="3">
+            <a:schemeClr val="accent1"/>
+          </a:fillRef>
+          <a:effectRef idx="2">
+            <a:schemeClr val="accent1"/>
+          </a:effectRef>
+          <a:fontRef idx="minor">
+            <a:schemeClr val="lt1"/>
+          </a:fontRef>
+        </p:style>
+        <p:txBody>
+          <a:bodyPr rtlCol="0" anchor="ctr"/>
+          <a:lstStyle/>
+          <a:p>
+            <a:pPr algn="ctr"/>
+          </a:p>
+        </p:txBody>
+      </p:sp>
+      <p:sp>
+        <p:nvSpPr>
+          <p:cNvPr id="34" name="TextBox 33"/>
+          <p:cNvSpPr txBox="1"/>
+          <p:nvPr/>
+        </p:nvSpPr>
+        <p:spPr>
+          <a:xfrm>
+            <a:off x="8753420" y="1316736"/>
+            <a:ext cx="1534885" cy="4251960"/>
+          </a:xfrm>
+          <a:prstGeom prst="rect">
+            <a:avLst/>
+          </a:prstGeom>
+          <a:noFill/>
+        </p:spPr>
+        <p:txBody>
+          <a:bodyPr wrap="square">
+            <a:spAutoFit/>
+          </a:bodyPr>
+          <a:lstStyle/>
+          <a:p>
+            <a:pPr algn="l"/>
+            <a:r>
+              <a:rPr sz="850" b="0" i="0">
+                <a:solidFill>
+                  <a:srgbClr val="1A1A1A"/>
+                </a:solidFill>
+              </a:rPr>
+              <a:t>Gestion de l'hésitation :
+rester dans l'échange,
+ne pas forcer la conclusion
+Relancer avec une question
+ouverture sur le délai
+de réflexion</a:t>
+            </a:r>
+          </a:p>
+        </p:txBody>
+      </p:sp>
+      <p:sp>
+        <p:nvSpPr>
+          <p:cNvPr id="35" name="Rectangle 34"/>
+          <p:cNvSpPr/>
+          <p:nvPr/>
+        </p:nvSpPr>
+        <p:spPr>
+          <a:xfrm>
+            <a:off x="10361458" y="804672"/>
+            <a:ext cx="1662901" cy="457200"/>
+          </a:xfrm>
+          <a:prstGeom prst="rect">
+            <a:avLst/>
+          </a:prstGeom>
+          <a:solidFill>
+            <a:srgbClr val="115555"/>
+          </a:solidFill>
+          <a:ln>
+            <a:noFill/>
+          </a:ln>
+        </p:spPr>
+        <p:style>
+          <a:lnRef idx="1">
+            <a:schemeClr val="accent1"/>
+          </a:lnRef>
+          <a:fillRef idx="3">
+            <a:schemeClr val="accent1"/>
+          </a:fillRef>
+          <a:effectRef idx="2">
+            <a:schemeClr val="accent1"/>
+          </a:effectRef>
+          <a:fontRef idx="minor">
+            <a:schemeClr val="lt1"/>
+          </a:fontRef>
+        </p:style>
+        <p:txBody>
+          <a:bodyPr rtlCol="0" anchor="ctr"/>
+          <a:lstStyle/>
+          <a:p>
+            <a:pPr algn="ctr"/>
+          </a:p>
+        </p:txBody>
+      </p:sp>
+      <p:sp>
+        <p:nvSpPr>
+          <p:cNvPr id="36" name="TextBox 35"/>
+          <p:cNvSpPr txBox="1"/>
+          <p:nvPr/>
+        </p:nvSpPr>
+        <p:spPr>
+          <a:xfrm>
+            <a:off x="10416322" y="822960"/>
+            <a:ext cx="1571461" cy="420624"/>
+          </a:xfrm>
+          <a:prstGeom prst="rect">
+            <a:avLst/>
+          </a:prstGeom>
+          <a:noFill/>
+        </p:spPr>
+        <p:txBody>
+          <a:bodyPr wrap="square">
+            <a:spAutoFit/>
+          </a:bodyPr>
+          <a:lstStyle/>
+          <a:p>
+            <a:pPr algn="ctr"/>
+            <a:r>
+              <a:rPr sz="800" b="1" i="0">
+                <a:solidFill>
+                  <a:srgbClr val="FFFFFF"/>
+                </a:solidFill>
+              </a:rPr>
+              <a:t>⑦
+VALIDATION
+COORDONNÉES</a:t>
+            </a:r>
+          </a:p>
+        </p:txBody>
+      </p:sp>
+      <p:sp>
+        <p:nvSpPr>
+          <p:cNvPr id="37" name="Rectangle 36"/>
+          <p:cNvSpPr/>
+          <p:nvPr/>
+        </p:nvSpPr>
+        <p:spPr>
+          <a:xfrm>
+            <a:off x="10361458" y="1261872"/>
+            <a:ext cx="1662901" cy="4434840"/>
+          </a:xfrm>
+          <a:prstGeom prst="rect">
+            <a:avLst/>
+          </a:prstGeom>
+          <a:solidFill>
+            <a:srgbClr val="FFFFFF"/>
+          </a:solidFill>
+          <a:ln w="15240">
+            <a:solidFill>
+              <a:srgbClr val="115555"/>
+            </a:solidFill>
+          </a:ln>
+        </p:spPr>
+        <p:style>
+          <a:lnRef idx="1">
+            <a:schemeClr val="accent1"/>
+          </a:lnRef>
+          <a:fillRef idx="3">
+            <a:schemeClr val="accent1"/>
+          </a:fillRef>
+          <a:effectRef idx="2">
+            <a:schemeClr val="accent1"/>
+          </a:effectRef>
+          <a:fontRef idx="minor">
+            <a:schemeClr val="lt1"/>
+          </a:fontRef>
+        </p:style>
+        <p:txBody>
+          <a:bodyPr rtlCol="0" anchor="ctr"/>
+          <a:lstStyle/>
+          <a:p>
+            <a:pPr algn="ctr"/>
+          </a:p>
+        </p:txBody>
+      </p:sp>
+      <p:sp>
+        <p:nvSpPr>
+          <p:cNvPr id="38" name="TextBox 37"/>
+          <p:cNvSpPr txBox="1"/>
+          <p:nvPr/>
+        </p:nvSpPr>
+        <p:spPr>
+          <a:xfrm>
+            <a:off x="10434610" y="1316736"/>
+            <a:ext cx="1534885" cy="4251960"/>
+          </a:xfrm>
+          <a:prstGeom prst="rect">
+            <a:avLst/>
+          </a:prstGeom>
+          <a:noFill/>
+        </p:spPr>
+        <p:txBody>
+          <a:bodyPr wrap="square">
+            <a:spAutoFit/>
+          </a:bodyPr>
+          <a:lstStyle/>
+          <a:p>
+            <a:pPr algn="l"/>
+            <a:r>
+              <a:rPr sz="850" b="0" i="0">
+                <a:solidFill>
+                  <a:srgbClr val="1A1A1A"/>
+                </a:solidFill>
+              </a:rPr>
+              <a:t>Sécurisation du don :
+IBAN à chaud / PA en ligne /
+PEL / PA courrier
+Confirmer toutes
+les coordonnées · SMS
+de confirmation envoyé</a:t>
+            </a:r>
+          </a:p>
+        </p:txBody>
+      </p:sp>
+      <p:sp>
+        <p:nvSpPr>
+          <p:cNvPr id="39" name="Rectangle 38"/>
+          <p:cNvSpPr/>
+          <p:nvPr/>
+        </p:nvSpPr>
+        <p:spPr>
+          <a:xfrm>
+            <a:off x="274320" y="5797296"/>
+            <a:ext cx="11640312" cy="347472"/>
+          </a:xfrm>
+          <a:prstGeom prst="rect">
+            <a:avLst/>
+          </a:prstGeom>
+          <a:solidFill>
+            <a:srgbClr val="008080"/>
+          </a:solidFill>
+          <a:ln>
+            <a:noFill/>
+          </a:ln>
+        </p:spPr>
+        <p:style>
+          <a:lnRef idx="1">
+            <a:schemeClr val="accent1"/>
+          </a:lnRef>
+          <a:fillRef idx="3">
+            <a:schemeClr val="accent1"/>
+          </a:fillRef>
+          <a:effectRef idx="2">
+            <a:schemeClr val="accent1"/>
+          </a:effectRef>
+          <a:fontRef idx="minor">
+            <a:schemeClr val="lt1"/>
+          </a:fontRef>
+        </p:style>
+        <p:txBody>
+          <a:bodyPr rtlCol="0" anchor="ctr"/>
+          <a:lstStyle/>
+          <a:p>
+            <a:pPr algn="ctr"/>
+          </a:p>
+        </p:txBody>
+      </p:sp>
+      <p:sp>
+        <p:nvSpPr>
+          <p:cNvPr id="40" name="TextBox 39"/>
+          <p:cNvSpPr txBox="1"/>
+          <p:nvPr/>
+        </p:nvSpPr>
+        <p:spPr>
+          <a:xfrm>
+            <a:off x="411479" y="5870448"/>
+            <a:ext cx="11365992" cy="201168"/>
           </a:xfrm>
           <a:prstGeom prst="rect">
             <a:avLst/>
@@ -6071,7 +6394,7 @@
                   <a:srgbClr val="FFFFFF"/>
                 </a:solidFill>
               </a:rPr>
-              <a:t>Durée totale : 2 min 15 sec  ·  Version express (passant pressé) : 55 sec  ·  Le silence après la proposition est votre allié — ne le brisez pas.</a:t>
+              <a:t>Durée standard d'un appel complet : 3 à 5 minutes  ·  Chaque étape a une fonction précise — ne pas sauter, ne pas inverser.</a:t>
             </a:r>
           </a:p>
         </p:txBody>
@@ -6146,7 +6469,7 @@
         <p:spPr>
           <a:xfrm>
             <a:off x="0" y="0"/>
-            <a:ext cx="12188952" cy="658368"/>
+            <a:ext cx="12188952" cy="685800"/>
           </a:xfrm>
           <a:prstGeom prst="rect">
             <a:avLst/>
@@ -6188,14 +6511,14 @@
         </p:nvSpPr>
         <p:spPr>
           <a:xfrm>
-            <a:off x="0" y="640080"/>
-            <a:ext cx="12188952" cy="54864"/>
+            <a:off x="0" y="667512"/>
+            <a:ext cx="12188952" cy="45720"/>
           </a:xfrm>
           <a:prstGeom prst="rect">
             <a:avLst/>
           </a:prstGeom>
           <a:solidFill>
-            <a:srgbClr val="FF0000"/>
+            <a:srgbClr val="00AAAA"/>
           </a:solidFill>
           <a:ln>
             <a:noFill/>
@@ -6231,8 +6554,8 @@
         </p:nvSpPr>
         <p:spPr>
           <a:xfrm>
-            <a:off x="164592" y="64008"/>
-            <a:ext cx="685800" cy="530352"/>
+            <a:off x="164592" y="73152"/>
+            <a:ext cx="2011680" cy="347472"/>
           </a:xfrm>
           <a:prstGeom prst="rect">
             <a:avLst/>
@@ -6247,12 +6570,12 @@
           <a:p>
             <a:pPr algn="l"/>
             <a:r>
-              <a:rPr sz="2000" b="1" i="0">
+              <a:rPr sz="1400" b="1" i="0">
                 <a:solidFill>
                   <a:srgbClr val="FFFFFF"/>
                 </a:solidFill>
               </a:rPr>
-              <a:t>SHY</a:t>
+              <a:t>SHY-Performance</a:t>
             </a:r>
           </a:p>
         </p:txBody>
@@ -6265,14 +6588,14 @@
         </p:nvSpPr>
         <p:spPr>
           <a:xfrm>
-            <a:off x="914400" y="91440"/>
-            <a:ext cx="36576" cy="475488"/>
+            <a:off x="2286000" y="91440"/>
+            <a:ext cx="36576" cy="502920"/>
           </a:xfrm>
           <a:prstGeom prst="rect">
             <a:avLst/>
           </a:prstGeom>
           <a:solidFill>
-            <a:srgbClr val="FF0000"/>
+            <a:srgbClr val="00AAAA"/>
           </a:solidFill>
           <a:ln>
             <a:noFill/>
@@ -6308,8 +6631,8 @@
         </p:nvSpPr>
         <p:spPr>
           <a:xfrm>
-            <a:off x="1024128" y="91440"/>
-            <a:ext cx="10881360" cy="475488"/>
+            <a:off x="2423160" y="91440"/>
+            <a:ext cx="9235440" cy="502920"/>
           </a:xfrm>
           <a:prstGeom prst="rect">
             <a:avLst/>
@@ -6324,19 +6647,43 @@
           <a:p>
             <a:pPr algn="l"/>
             <a:r>
-              <a:rPr sz="1700" b="1" i="0">
+              <a:rPr sz="1600" b="1" i="0">
                 <a:solidFill>
                   <a:srgbClr val="FFFFFF"/>
                 </a:solidFill>
               </a:rPr>
-              <a:t>L'Impact Story — Comment Raconter une Histoire qui Touche</a:t>
-            </a:r>
-          </a:p>
-        </p:txBody>
-      </p:sp>
-      <p:sp>
-        <p:nvSpPr>
-          <p:cNvPr id="8" name="Rectangle 7"/>
+              <a:t>Les 5 Règles Officielles de la Phrase d'Accroche</a:t>
+            </a:r>
+          </a:p>
+        </p:txBody>
+      </p:sp>
+      <p:pic>
+        <p:nvPicPr>
+          <p:cNvPr id="8" name="Picture 7" descr="shy_logo_v2.png"/>
+          <p:cNvPicPr>
+            <a:picLocks noChangeAspect="1"/>
+          </p:cNvPicPr>
+          <p:nvPr/>
+        </p:nvPicPr>
+        <p:blipFill>
+          <a:blip r:embed="rId2"/>
+          <a:stretch>
+            <a:fillRect/>
+          </a:stretch>
+        </p:blipFill>
+        <p:spPr>
+          <a:xfrm>
+            <a:off x="11247120" y="0"/>
+            <a:ext cx="822960" cy="676656"/>
+          </a:xfrm>
+          <a:prstGeom prst="rect">
+            <a:avLst/>
+          </a:prstGeom>
+        </p:spPr>
+      </p:pic>
+      <p:sp>
+        <p:nvSpPr>
+          <p:cNvPr id="9" name="Rectangle 8"/>
           <p:cNvSpPr/>
           <p:nvPr/>
         </p:nvSpPr>
@@ -6379,7 +6726,7 @@
       </p:sp>
       <p:sp>
         <p:nvSpPr>
-          <p:cNvPr id="9" name="TextBox 8"/>
+          <p:cNvPr id="10" name="TextBox 9"/>
           <p:cNvSpPr txBox="1"/>
           <p:nvPr/>
         </p:nvSpPr>
@@ -6401,26 +6748,26 @@
           <a:p>
             <a:pPr algn="ctr"/>
             <a:r>
-              <a:rPr sz="900" b="0" i="0">
+              <a:rPr sz="800" b="0" i="0">
                 <a:solidFill>
                   <a:srgbClr val="FFFFFF"/>
                 </a:solidFill>
               </a:rPr>
-              <a:t>SHY-Performance  ·  Formation FIM  ·  V6-01062026SHY-TE</a:t>
-            </a:r>
-          </a:p>
-        </p:txBody>
-      </p:sp>
-      <p:sp>
-        <p:nvSpPr>
-          <p:cNvPr id="10" name="TextBox 9"/>
+              <a:t>SHY-Performance  ·  Formation FIM  ·  UNICEF France  ·  V6-01062026SHY-TE</a:t>
+            </a:r>
+          </a:p>
+        </p:txBody>
+      </p:sp>
+      <p:sp>
+        <p:nvSpPr>
+          <p:cNvPr id="11" name="TextBox 10"/>
           <p:cNvSpPr txBox="1"/>
           <p:nvPr/>
         </p:nvSpPr>
         <p:spPr>
           <a:xfrm>
             <a:off x="320040" y="804672"/>
-            <a:ext cx="11521440" cy="640080"/>
+            <a:ext cx="11430000" cy="292608"/>
           </a:xfrm>
           <a:prstGeom prst="rect">
             <a:avLst/>
@@ -6435,27 +6782,26 @@
           <a:p>
             <a:pPr algn="l"/>
             <a:r>
-              <a:rPr sz="1200" b="0" i="0">
+              <a:rPr sz="1200" b="1" i="0">
                 <a:solidFill>
-                  <a:srgbClr val="1A1A1A"/>
+                  <a:srgbClr val="005555"/>
                 </a:solidFill>
               </a:rPr>
-              <a:t>L'Impact Story est le cœur de votre script. C'est ce moment précis où le donateur passe
-de 'intéressé' à 'convaincu'. Voici comment la construire :</a:t>
-            </a:r>
-          </a:p>
-        </p:txBody>
-      </p:sp>
-      <p:sp>
-        <p:nvSpPr>
-          <p:cNvPr id="11" name="Rectangle 10"/>
+              <a:t>Ces 5 règles sont non négociables — elles définissent un appel conforme :</a:t>
+            </a:r>
+          </a:p>
+        </p:txBody>
+      </p:sp>
+      <p:sp>
+        <p:nvSpPr>
+          <p:cNvPr id="12" name="Rectangle 11"/>
           <p:cNvSpPr/>
           <p:nvPr/>
         </p:nvSpPr>
         <p:spPr>
           <a:xfrm>
-            <a:off x="274320" y="1554480"/>
-            <a:ext cx="2816352" cy="329184"/>
+            <a:off x="274320" y="1170432"/>
+            <a:ext cx="1005840" cy="822960"/>
           </a:xfrm>
           <a:prstGeom prst="rect">
             <a:avLst/>
@@ -6491,14 +6837,14 @@
       </p:sp>
       <p:sp>
         <p:nvSpPr>
-          <p:cNvPr id="12" name="TextBox 11"/>
+          <p:cNvPr id="13" name="TextBox 12"/>
           <p:cNvSpPr txBox="1"/>
           <p:nvPr/>
         </p:nvSpPr>
         <p:spPr>
           <a:xfrm>
-            <a:off x="365760" y="1581912"/>
-            <a:ext cx="2633472" cy="256032"/>
+            <a:off x="292608" y="1335024"/>
+            <a:ext cx="969264" cy="493776"/>
           </a:xfrm>
           <a:prstGeom prst="rect">
             <a:avLst/>
@@ -6511,36 +6857,36 @@
           </a:bodyPr>
           <a:lstStyle/>
           <a:p>
-            <a:pPr algn="l"/>
-            <a:r>
-              <a:rPr sz="1000" b="1" i="0">
+            <a:pPr algn="ctr"/>
+            <a:r>
+              <a:rPr sz="900" b="1" i="0">
                 <a:solidFill>
                   <a:srgbClr val="FFFFFF"/>
                 </a:solidFill>
               </a:rPr>
-              <a:t>PERSONNAGE</a:t>
-            </a:r>
-          </a:p>
-        </p:txBody>
-      </p:sp>
-      <p:sp>
-        <p:nvSpPr>
-          <p:cNvPr id="13" name="Rectangle 12"/>
+              <a:t>RÈGLE 1</a:t>
+            </a:r>
+          </a:p>
+        </p:txBody>
+      </p:sp>
+      <p:sp>
+        <p:nvSpPr>
+          <p:cNvPr id="14" name="Rectangle 13"/>
           <p:cNvSpPr/>
           <p:nvPr/>
         </p:nvSpPr>
         <p:spPr>
           <a:xfrm>
-            <a:off x="274320" y="1883664"/>
-            <a:ext cx="2816352" cy="2651760"/>
+            <a:off x="1298448" y="1170432"/>
+            <a:ext cx="3108960" cy="822960"/>
           </a:xfrm>
           <a:prstGeom prst="rect">
             <a:avLst/>
           </a:prstGeom>
           <a:solidFill>
-            <a:srgbClr val="FFFFFF"/>
+            <a:srgbClr val="F0F7F7"/>
           </a:solidFill>
-          <a:ln w="19050">
+          <a:ln w="10160">
             <a:solidFill>
               <a:srgbClr val="005555"/>
             </a:solidFill>
@@ -6570,14 +6916,14 @@
       </p:sp>
       <p:sp>
         <p:nvSpPr>
-          <p:cNvPr id="14" name="TextBox 13"/>
+          <p:cNvPr id="15" name="TextBox 14"/>
           <p:cNvSpPr txBox="1"/>
           <p:nvPr/>
         </p:nvSpPr>
         <p:spPr>
           <a:xfrm>
-            <a:off x="402336" y="1956816"/>
-            <a:ext cx="2560320" cy="2487168"/>
+            <a:off x="1389888" y="1353312"/>
+            <a:ext cx="2944368" cy="493776"/>
           </a:xfrm>
           <a:prstGeom prst="rect">
             <a:avLst/>
@@ -6592,34 +6938,32 @@
           <a:p>
             <a:pPr algn="l"/>
             <a:r>
-              <a:rPr sz="1000" b="0" i="0">
+              <a:rPr sz="1100" b="1" i="0">
                 <a:solidFill>
-                  <a:srgbClr val="1A1A1A"/>
+                  <a:srgbClr val="005555"/>
                 </a:solidFill>
               </a:rPr>
-              <a:t>Donnez un prénom, un âge, un pays.
-'Amara, 3 ans, Sahel.'
-Le donateur doit voir un visage, pas une statistique.</a:t>
-            </a:r>
-          </a:p>
-        </p:txBody>
-      </p:sp>
-      <p:sp>
-        <p:nvSpPr>
-          <p:cNvPr id="15" name="Rectangle 14"/>
+              <a:t>Se présenter avec prénom et nom</a:t>
+            </a:r>
+          </a:p>
+        </p:txBody>
+      </p:sp>
+      <p:sp>
+        <p:nvSpPr>
+          <p:cNvPr id="16" name="Rectangle 15"/>
           <p:cNvSpPr/>
           <p:nvPr/>
         </p:nvSpPr>
         <p:spPr>
           <a:xfrm>
-            <a:off x="3200400" y="1554480"/>
-            <a:ext cx="2816352" cy="329184"/>
+            <a:off x="4425696" y="1170432"/>
+            <a:ext cx="7488936" cy="822960"/>
           </a:xfrm>
           <a:prstGeom prst="rect">
             <a:avLst/>
           </a:prstGeom>
           <a:solidFill>
-            <a:srgbClr val="FF0000"/>
+            <a:srgbClr val="FFFFFF"/>
           </a:solidFill>
           <a:ln>
             <a:noFill/>
@@ -6649,14 +6993,14 @@
       </p:sp>
       <p:sp>
         <p:nvSpPr>
-          <p:cNvPr id="16" name="TextBox 15"/>
+          <p:cNvPr id="17" name="TextBox 16"/>
           <p:cNvSpPr txBox="1"/>
           <p:nvPr/>
         </p:nvSpPr>
         <p:spPr>
           <a:xfrm>
-            <a:off x="3291840" y="1581912"/>
-            <a:ext cx="2633472" cy="256032"/>
+            <a:off x="4535424" y="1261872"/>
+            <a:ext cx="7296912" cy="658368"/>
           </a:xfrm>
           <a:prstGeom prst="rect">
             <a:avLst/>
@@ -6671,37 +7015,36 @@
           <a:p>
             <a:pPr algn="l"/>
             <a:r>
-              <a:rPr sz="1000" b="1" i="0">
+              <a:rPr sz="1000" b="0" i="1">
                 <a:solidFill>
-                  <a:srgbClr val="FFFFFF"/>
+                  <a:srgbClr val="1A1A1A"/>
                 </a:solidFill>
               </a:rPr>
-              <a:t>SITUATION</a:t>
-            </a:r>
-          </a:p>
-        </p:txBody>
-      </p:sp>
-      <p:sp>
-        <p:nvSpPr>
-          <p:cNvPr id="17" name="Rectangle 16"/>
+              <a:t>Votre identité est donnée clairement dès les premières secondes.
+'Bonjour, je m'appelle [Prénom NOM]…'</a:t>
+            </a:r>
+          </a:p>
+        </p:txBody>
+      </p:sp>
+      <p:sp>
+        <p:nvSpPr>
+          <p:cNvPr id="18" name="Rectangle 17"/>
           <p:cNvSpPr/>
           <p:nvPr/>
         </p:nvSpPr>
         <p:spPr>
           <a:xfrm>
-            <a:off x="3200400" y="1883664"/>
-            <a:ext cx="2816352" cy="2651760"/>
+            <a:off x="274320" y="2029967"/>
+            <a:ext cx="1005840" cy="822960"/>
           </a:xfrm>
           <a:prstGeom prst="rect">
             <a:avLst/>
           </a:prstGeom>
           <a:solidFill>
-            <a:srgbClr val="FFFFFF"/>
+            <a:srgbClr val="005555"/>
           </a:solidFill>
-          <a:ln w="19050">
-            <a:solidFill>
-              <a:srgbClr val="FF0000"/>
-            </a:solidFill>
+          <a:ln>
+            <a:noFill/>
           </a:ln>
         </p:spPr>
         <p:style>
@@ -6728,14 +7071,14 @@
       </p:sp>
       <p:sp>
         <p:nvSpPr>
-          <p:cNvPr id="18" name="TextBox 17"/>
+          <p:cNvPr id="19" name="TextBox 18"/>
           <p:cNvSpPr txBox="1"/>
           <p:nvPr/>
         </p:nvSpPr>
         <p:spPr>
           <a:xfrm>
-            <a:off x="3328416" y="1956816"/>
-            <a:ext cx="2560320" cy="2487168"/>
+            <a:off x="292608" y="2194560"/>
+            <a:ext cx="969264" cy="493776"/>
           </a:xfrm>
           <a:prstGeom prst="rect">
             <a:avLst/>
@@ -6748,39 +7091,39 @@
           </a:bodyPr>
           <a:lstStyle/>
           <a:p>
-            <a:pPr algn="l"/>
-            <a:r>
-              <a:rPr sz="1000" b="0" i="0">
+            <a:pPr algn="ctr"/>
+            <a:r>
+              <a:rPr sz="900" b="1" i="0">
                 <a:solidFill>
-                  <a:srgbClr val="1A1A1A"/>
+                  <a:srgbClr val="FFFFFF"/>
                 </a:solidFill>
               </a:rPr>
-              <a:t>Décrivez le danger concret avec 1 seul chiffre.
-'Sans accès à l'eau potable, 1 enfant sur 5
-ne survivra pas à sa première année.'</a:t>
-            </a:r>
-          </a:p>
-        </p:txBody>
-      </p:sp>
-      <p:sp>
-        <p:nvSpPr>
-          <p:cNvPr id="19" name="Rectangle 18"/>
+              <a:t>RÈGLE 2</a:t>
+            </a:r>
+          </a:p>
+        </p:txBody>
+      </p:sp>
+      <p:sp>
+        <p:nvSpPr>
+          <p:cNvPr id="20" name="Rectangle 19"/>
           <p:cNvSpPr/>
           <p:nvPr/>
         </p:nvSpPr>
         <p:spPr>
           <a:xfrm>
-            <a:off x="6126480" y="1554480"/>
-            <a:ext cx="2816352" cy="329184"/>
+            <a:off x="1298448" y="2029967"/>
+            <a:ext cx="3108960" cy="822960"/>
           </a:xfrm>
           <a:prstGeom prst="rect">
             <a:avLst/>
           </a:prstGeom>
           <a:solidFill>
-            <a:srgbClr val="C08010"/>
+            <a:srgbClr val="F0F7F7"/>
           </a:solidFill>
-          <a:ln>
-            <a:noFill/>
+          <a:ln w="10160">
+            <a:solidFill>
+              <a:srgbClr val="005555"/>
+            </a:solidFill>
           </a:ln>
         </p:spPr>
         <p:style>
@@ -6807,14 +7150,14 @@
       </p:sp>
       <p:sp>
         <p:nvSpPr>
-          <p:cNvPr id="20" name="TextBox 19"/>
+          <p:cNvPr id="21" name="TextBox 20"/>
           <p:cNvSpPr txBox="1"/>
           <p:nvPr/>
         </p:nvSpPr>
         <p:spPr>
           <a:xfrm>
-            <a:off x="6217920" y="1581912"/>
-            <a:ext cx="2633472" cy="256032"/>
+            <a:off x="1389888" y="2212848"/>
+            <a:ext cx="2944368" cy="493776"/>
           </a:xfrm>
           <a:prstGeom prst="rect">
             <a:avLst/>
@@ -6829,266 +7172,26 @@
           <a:p>
             <a:pPr algn="l"/>
             <a:r>
-              <a:rPr sz="1000" b="1" i="0">
+              <a:rPr sz="1100" b="1" i="0">
                 <a:solidFill>
-                  <a:srgbClr val="FFFFFF"/>
+                  <a:srgbClr val="005555"/>
                 </a:solidFill>
               </a:rPr>
-              <a:t>BASCULE</a:t>
-            </a:r>
-          </a:p>
-        </p:txBody>
-      </p:sp>
-      <p:sp>
-        <p:nvSpPr>
-          <p:cNvPr id="21" name="Rectangle 20"/>
+              <a:t>Nommer l'organisation représentée</a:t>
+            </a:r>
+          </a:p>
+        </p:txBody>
+      </p:sp>
+      <p:sp>
+        <p:nvSpPr>
+          <p:cNvPr id="22" name="Rectangle 21"/>
           <p:cNvSpPr/>
           <p:nvPr/>
         </p:nvSpPr>
         <p:spPr>
           <a:xfrm>
-            <a:off x="6126480" y="1883664"/>
-            <a:ext cx="2816352" cy="2651760"/>
-          </a:xfrm>
-          <a:prstGeom prst="rect">
-            <a:avLst/>
-          </a:prstGeom>
-          <a:solidFill>
-            <a:srgbClr val="FFFFFF"/>
-          </a:solidFill>
-          <a:ln w="19050">
-            <a:solidFill>
-              <a:srgbClr val="C08010"/>
-            </a:solidFill>
-          </a:ln>
-        </p:spPr>
-        <p:style>
-          <a:lnRef idx="1">
-            <a:schemeClr val="accent1"/>
-          </a:lnRef>
-          <a:fillRef idx="3">
-            <a:schemeClr val="accent1"/>
-          </a:fillRef>
-          <a:effectRef idx="2">
-            <a:schemeClr val="accent1"/>
-          </a:effectRef>
-          <a:fontRef idx="minor">
-            <a:schemeClr val="lt1"/>
-          </a:fontRef>
-        </p:style>
-        <p:txBody>
-          <a:bodyPr rtlCol="0" anchor="ctr"/>
-          <a:lstStyle/>
-          <a:p>
-            <a:pPr algn="ctr"/>
-          </a:p>
-        </p:txBody>
-      </p:sp>
-      <p:sp>
-        <p:nvSpPr>
-          <p:cNvPr id="22" name="TextBox 21"/>
-          <p:cNvSpPr txBox="1"/>
-          <p:nvPr/>
-        </p:nvSpPr>
-        <p:spPr>
-          <a:xfrm>
-            <a:off x="6254496" y="1956816"/>
-            <a:ext cx="2560320" cy="2487168"/>
-          </a:xfrm>
-          <a:prstGeom prst="rect">
-            <a:avLst/>
-          </a:prstGeom>
-          <a:noFill/>
-        </p:spPr>
-        <p:txBody>
-          <a:bodyPr wrap="square">
-            <a:spAutoFit/>
-          </a:bodyPr>
-          <a:lstStyle/>
-          <a:p>
-            <a:pPr algn="l"/>
-            <a:r>
-              <a:rPr sz="1000" b="0" i="0">
-                <a:solidFill>
-                  <a:srgbClr val="1A1A1A"/>
-                </a:solidFill>
-              </a:rPr>
-              <a:t>C'est ici que votre don entre en scène.
-'Grâce aux donateurs comme vous,
-l'UNICEF a livré 50 000 kits eau potable.'</a:t>
-            </a:r>
-          </a:p>
-        </p:txBody>
-      </p:sp>
-      <p:sp>
-        <p:nvSpPr>
-          <p:cNvPr id="23" name="Rectangle 22"/>
-          <p:cNvSpPr/>
-          <p:nvPr/>
-        </p:nvSpPr>
-        <p:spPr>
-          <a:xfrm>
-            <a:off x="9052560" y="1554480"/>
-            <a:ext cx="2816352" cy="329184"/>
-          </a:xfrm>
-          <a:prstGeom prst="rect">
-            <a:avLst/>
-          </a:prstGeom>
-          <a:solidFill>
-            <a:srgbClr val="2A7A50"/>
-          </a:solidFill>
-          <a:ln>
-            <a:noFill/>
-          </a:ln>
-        </p:spPr>
-        <p:style>
-          <a:lnRef idx="1">
-            <a:schemeClr val="accent1"/>
-          </a:lnRef>
-          <a:fillRef idx="3">
-            <a:schemeClr val="accent1"/>
-          </a:fillRef>
-          <a:effectRef idx="2">
-            <a:schemeClr val="accent1"/>
-          </a:effectRef>
-          <a:fontRef idx="minor">
-            <a:schemeClr val="lt1"/>
-          </a:fontRef>
-        </p:style>
-        <p:txBody>
-          <a:bodyPr rtlCol="0" anchor="ctr"/>
-          <a:lstStyle/>
-          <a:p>
-            <a:pPr algn="ctr"/>
-          </a:p>
-        </p:txBody>
-      </p:sp>
-      <p:sp>
-        <p:nvSpPr>
-          <p:cNvPr id="24" name="TextBox 23"/>
-          <p:cNvSpPr txBox="1"/>
-          <p:nvPr/>
-        </p:nvSpPr>
-        <p:spPr>
-          <a:xfrm>
-            <a:off x="9144000" y="1581912"/>
-            <a:ext cx="2633472" cy="256032"/>
-          </a:xfrm>
-          <a:prstGeom prst="rect">
-            <a:avLst/>
-          </a:prstGeom>
-          <a:noFill/>
-        </p:spPr>
-        <p:txBody>
-          <a:bodyPr wrap="square">
-            <a:spAutoFit/>
-          </a:bodyPr>
-          <a:lstStyle/>
-          <a:p>
-            <a:pPr algn="l"/>
-            <a:r>
-              <a:rPr sz="1000" b="1" i="0">
-                <a:solidFill>
-                  <a:srgbClr val="FFFFFF"/>
-                </a:solidFill>
-              </a:rPr>
-              <a:t>RÉSOLUTION</a:t>
-            </a:r>
-          </a:p>
-        </p:txBody>
-      </p:sp>
-      <p:sp>
-        <p:nvSpPr>
-          <p:cNvPr id="25" name="Rectangle 24"/>
-          <p:cNvSpPr/>
-          <p:nvPr/>
-        </p:nvSpPr>
-        <p:spPr>
-          <a:xfrm>
-            <a:off x="9052560" y="1883664"/>
-            <a:ext cx="2816352" cy="2651760"/>
-          </a:xfrm>
-          <a:prstGeom prst="rect">
-            <a:avLst/>
-          </a:prstGeom>
-          <a:solidFill>
-            <a:srgbClr val="FFFFFF"/>
-          </a:solidFill>
-          <a:ln w="19050">
-            <a:solidFill>
-              <a:srgbClr val="2A7A50"/>
-            </a:solidFill>
-          </a:ln>
-        </p:spPr>
-        <p:style>
-          <a:lnRef idx="1">
-            <a:schemeClr val="accent1"/>
-          </a:lnRef>
-          <a:fillRef idx="3">
-            <a:schemeClr val="accent1"/>
-          </a:fillRef>
-          <a:effectRef idx="2">
-            <a:schemeClr val="accent1"/>
-          </a:effectRef>
-          <a:fontRef idx="minor">
-            <a:schemeClr val="lt1"/>
-          </a:fontRef>
-        </p:style>
-        <p:txBody>
-          <a:bodyPr rtlCol="0" anchor="ctr"/>
-          <a:lstStyle/>
-          <a:p>
-            <a:pPr algn="ctr"/>
-          </a:p>
-        </p:txBody>
-      </p:sp>
-      <p:sp>
-        <p:nvSpPr>
-          <p:cNvPr id="26" name="TextBox 25"/>
-          <p:cNvSpPr txBox="1"/>
-          <p:nvPr/>
-        </p:nvSpPr>
-        <p:spPr>
-          <a:xfrm>
-            <a:off x="9180576" y="1956816"/>
-            <a:ext cx="2560320" cy="2487168"/>
-          </a:xfrm>
-          <a:prstGeom prst="rect">
-            <a:avLst/>
-          </a:prstGeom>
-          <a:noFill/>
-        </p:spPr>
-        <p:txBody>
-          <a:bodyPr wrap="square">
-            <a:spAutoFit/>
-          </a:bodyPr>
-          <a:lstStyle/>
-          <a:p>
-            <a:pPr algn="l"/>
-            <a:r>
-              <a:rPr sz="1000" b="0" i="0">
-                <a:solidFill>
-                  <a:srgbClr val="1A1A1A"/>
-                </a:solidFill>
-              </a:rPr>
-              <a:t>La fin heureuse — rendue possible
-par le don.
-'Amara a aujourd'hui 4 ans et elle est
-scolarisée.'</a:t>
-            </a:r>
-          </a:p>
-        </p:txBody>
-      </p:sp>
-      <p:sp>
-        <p:nvSpPr>
-          <p:cNvPr id="27" name="Rectangle 26"/>
-          <p:cNvSpPr/>
-          <p:nvPr/>
-        </p:nvSpPr>
-        <p:spPr>
-          <a:xfrm>
-            <a:off x="274320" y="4700016"/>
-            <a:ext cx="11640312" cy="658368"/>
+            <a:off x="4425696" y="2029967"/>
+            <a:ext cx="7488936" cy="822960"/>
           </a:xfrm>
           <a:prstGeom prst="rect">
             <a:avLst/>
@@ -7124,14 +7227,14 @@
       </p:sp>
       <p:sp>
         <p:nvSpPr>
-          <p:cNvPr id="28" name="TextBox 27"/>
+          <p:cNvPr id="23" name="TextBox 22"/>
           <p:cNvSpPr txBox="1"/>
           <p:nvPr/>
         </p:nvSpPr>
         <p:spPr>
           <a:xfrm>
-            <a:off x="411479" y="4773168"/>
-            <a:ext cx="11365992" cy="512063"/>
+            <a:off x="4535424" y="2121408"/>
+            <a:ext cx="7296912" cy="658368"/>
           </a:xfrm>
           <a:prstGeom prst="rect">
             <a:avLst/>
@@ -7146,33 +7249,33 @@
           <a:p>
             <a:pPr algn="l"/>
             <a:r>
-              <a:rPr sz="1000" b="0" i="0">
+              <a:rPr sz="1000" b="0" i="1">
                 <a:solidFill>
                   <a:srgbClr val="1A1A1A"/>
                 </a:solidFill>
               </a:rPr>
-              <a:t>Règle d'or : 1 seul enfant · 1 seul problème · 1 seul chiffre · 1 seule solution.
-La simplicité crée l'émotion. La liste de statistiques crée la distance.</a:t>
-            </a:r>
-          </a:p>
-        </p:txBody>
-      </p:sp>
-      <p:sp>
-        <p:nvSpPr>
-          <p:cNvPr id="29" name="Rectangle 28"/>
+              <a:t>'…je vous appelle au nom de l'UNICEF France…'
+Le prospect sait immédiatement qui appelle.</a:t>
+            </a:r>
+          </a:p>
+        </p:txBody>
+      </p:sp>
+      <p:sp>
+        <p:nvSpPr>
+          <p:cNvPr id="24" name="Rectangle 23"/>
           <p:cNvSpPr/>
           <p:nvPr/>
         </p:nvSpPr>
         <p:spPr>
           <a:xfrm>
-            <a:off x="274320" y="4700016"/>
-            <a:ext cx="128016" cy="658368"/>
+            <a:off x="274320" y="2889503"/>
+            <a:ext cx="1005840" cy="822960"/>
           </a:xfrm>
           <a:prstGeom prst="rect">
             <a:avLst/>
           </a:prstGeom>
           <a:solidFill>
-            <a:srgbClr val="FF0000"/>
+            <a:srgbClr val="005555"/>
           </a:solidFill>
           <a:ln>
             <a:noFill/>
@@ -7202,23 +7305,59 @@
       </p:sp>
       <p:sp>
         <p:nvSpPr>
-          <p:cNvPr id="30" name="Rectangle 29"/>
+          <p:cNvPr id="25" name="TextBox 24"/>
+          <p:cNvSpPr txBox="1"/>
+          <p:nvPr/>
+        </p:nvSpPr>
+        <p:spPr>
+          <a:xfrm>
+            <a:off x="292608" y="3054096"/>
+            <a:ext cx="969264" cy="493776"/>
+          </a:xfrm>
+          <a:prstGeom prst="rect">
+            <a:avLst/>
+          </a:prstGeom>
+          <a:noFill/>
+        </p:spPr>
+        <p:txBody>
+          <a:bodyPr wrap="square">
+            <a:spAutoFit/>
+          </a:bodyPr>
+          <a:lstStyle/>
+          <a:p>
+            <a:pPr algn="ctr"/>
+            <a:r>
+              <a:rPr sz="900" b="1" i="0">
+                <a:solidFill>
+                  <a:srgbClr val="FFFFFF"/>
+                </a:solidFill>
+              </a:rPr>
+              <a:t>RÈGLE 3</a:t>
+            </a:r>
+          </a:p>
+        </p:txBody>
+      </p:sp>
+      <p:sp>
+        <p:nvSpPr>
+          <p:cNvPr id="26" name="Rectangle 25"/>
           <p:cNvSpPr/>
           <p:nvPr/>
         </p:nvSpPr>
         <p:spPr>
           <a:xfrm>
-            <a:off x="274320" y="5486400"/>
-            <a:ext cx="11640312" cy="402336"/>
+            <a:off x="1298448" y="2889503"/>
+            <a:ext cx="3108960" cy="822960"/>
           </a:xfrm>
           <a:prstGeom prst="rect">
             <a:avLst/>
           </a:prstGeom>
           <a:solidFill>
-            <a:srgbClr val="FF0000"/>
+            <a:srgbClr val="F0F7F7"/>
           </a:solidFill>
-          <a:ln>
-            <a:noFill/>
+          <a:ln w="10160">
+            <a:solidFill>
+              <a:srgbClr val="005555"/>
+            </a:solidFill>
           </a:ln>
         </p:spPr>
         <p:style>
@@ -7245,13 +7384,636 @@
       </p:sp>
       <p:sp>
         <p:nvSpPr>
+          <p:cNvPr id="27" name="TextBox 26"/>
+          <p:cNvSpPr txBox="1"/>
+          <p:nvPr/>
+        </p:nvSpPr>
+        <p:spPr>
+          <a:xfrm>
+            <a:off x="1389888" y="3072384"/>
+            <a:ext cx="2944368" cy="493776"/>
+          </a:xfrm>
+          <a:prstGeom prst="rect">
+            <a:avLst/>
+          </a:prstGeom>
+          <a:noFill/>
+        </p:spPr>
+        <p:txBody>
+          <a:bodyPr wrap="square">
+            <a:spAutoFit/>
+          </a:bodyPr>
+          <a:lstStyle/>
+          <a:p>
+            <a:pPr algn="l"/>
+            <a:r>
+              <a:rPr sz="1100" b="1" i="0">
+                <a:solidFill>
+                  <a:srgbClr val="005555"/>
+                </a:solidFill>
+              </a:rPr>
+              <a:t>Annoncer la raison de l'appel</a:t>
+            </a:r>
+          </a:p>
+        </p:txBody>
+      </p:sp>
+      <p:sp>
+        <p:nvSpPr>
+          <p:cNvPr id="28" name="Rectangle 27"/>
+          <p:cNvSpPr/>
+          <p:nvPr/>
+        </p:nvSpPr>
+        <p:spPr>
+          <a:xfrm>
+            <a:off x="4425696" y="2889503"/>
+            <a:ext cx="7488936" cy="822960"/>
+          </a:xfrm>
+          <a:prstGeom prst="rect">
+            <a:avLst/>
+          </a:prstGeom>
+          <a:solidFill>
+            <a:srgbClr val="FFFFFF"/>
+          </a:solidFill>
+          <a:ln>
+            <a:noFill/>
+          </a:ln>
+        </p:spPr>
+        <p:style>
+          <a:lnRef idx="1">
+            <a:schemeClr val="accent1"/>
+          </a:lnRef>
+          <a:fillRef idx="3">
+            <a:schemeClr val="accent1"/>
+          </a:fillRef>
+          <a:effectRef idx="2">
+            <a:schemeClr val="accent1"/>
+          </a:effectRef>
+          <a:fontRef idx="minor">
+            <a:schemeClr val="lt1"/>
+          </a:fontRef>
+        </p:style>
+        <p:txBody>
+          <a:bodyPr rtlCol="0" anchor="ctr"/>
+          <a:lstStyle/>
+          <a:p>
+            <a:pPr algn="ctr"/>
+          </a:p>
+        </p:txBody>
+      </p:sp>
+      <p:sp>
+        <p:nvSpPr>
+          <p:cNvPr id="29" name="TextBox 28"/>
+          <p:cNvSpPr txBox="1"/>
+          <p:nvPr/>
+        </p:nvSpPr>
+        <p:spPr>
+          <a:xfrm>
+            <a:off x="4535424" y="2980944"/>
+            <a:ext cx="7296912" cy="658368"/>
+          </a:xfrm>
+          <a:prstGeom prst="rect">
+            <a:avLst/>
+          </a:prstGeom>
+          <a:noFill/>
+        </p:spPr>
+        <p:txBody>
+          <a:bodyPr wrap="square">
+            <a:spAutoFit/>
+          </a:bodyPr>
+          <a:lstStyle/>
+          <a:p>
+            <a:pPr algn="l"/>
+            <a:r>
+              <a:rPr sz="1000" b="0" i="1">
+                <a:solidFill>
+                  <a:srgbClr val="1A1A1A"/>
+                </a:solidFill>
+              </a:rPr>
+              <a:t>'…pour vous parler d'une initiative importante pour les enfants…'
+Clarté totale — pas d'ambiguïté sur l'objet de l'appel.</a:t>
+            </a:r>
+          </a:p>
+        </p:txBody>
+      </p:sp>
+      <p:sp>
+        <p:nvSpPr>
+          <p:cNvPr id="30" name="Rectangle 29"/>
+          <p:cNvSpPr/>
+          <p:nvPr/>
+        </p:nvSpPr>
+        <p:spPr>
+          <a:xfrm>
+            <a:off x="274320" y="3749039"/>
+            <a:ext cx="1005840" cy="822960"/>
+          </a:xfrm>
+          <a:prstGeom prst="rect">
+            <a:avLst/>
+          </a:prstGeom>
+          <a:solidFill>
+            <a:srgbClr val="005555"/>
+          </a:solidFill>
+          <a:ln>
+            <a:noFill/>
+          </a:ln>
+        </p:spPr>
+        <p:style>
+          <a:lnRef idx="1">
+            <a:schemeClr val="accent1"/>
+          </a:lnRef>
+          <a:fillRef idx="3">
+            <a:schemeClr val="accent1"/>
+          </a:fillRef>
+          <a:effectRef idx="2">
+            <a:schemeClr val="accent1"/>
+          </a:effectRef>
+          <a:fontRef idx="minor">
+            <a:schemeClr val="lt1"/>
+          </a:fontRef>
+        </p:style>
+        <p:txBody>
+          <a:bodyPr rtlCol="0" anchor="ctr"/>
+          <a:lstStyle/>
+          <a:p>
+            <a:pPr algn="ctr"/>
+          </a:p>
+        </p:txBody>
+      </p:sp>
+      <p:sp>
+        <p:nvSpPr>
           <p:cNvPr id="31" name="TextBox 30"/>
           <p:cNvSpPr txBox="1"/>
           <p:nvPr/>
         </p:nvSpPr>
         <p:spPr>
           <a:xfrm>
-            <a:off x="411479" y="5559552"/>
+            <a:off x="292608" y="3913631"/>
+            <a:ext cx="969264" cy="493776"/>
+          </a:xfrm>
+          <a:prstGeom prst="rect">
+            <a:avLst/>
+          </a:prstGeom>
+          <a:noFill/>
+        </p:spPr>
+        <p:txBody>
+          <a:bodyPr wrap="square">
+            <a:spAutoFit/>
+          </a:bodyPr>
+          <a:lstStyle/>
+          <a:p>
+            <a:pPr algn="ctr"/>
+            <a:r>
+              <a:rPr sz="900" b="1" i="0">
+                <a:solidFill>
+                  <a:srgbClr val="FFFFFF"/>
+                </a:solidFill>
+              </a:rPr>
+              <a:t>RÈGLE 4</a:t>
+            </a:r>
+          </a:p>
+        </p:txBody>
+      </p:sp>
+      <p:sp>
+        <p:nvSpPr>
+          <p:cNvPr id="32" name="Rectangle 31"/>
+          <p:cNvSpPr/>
+          <p:nvPr/>
+        </p:nvSpPr>
+        <p:spPr>
+          <a:xfrm>
+            <a:off x="1298448" y="3749039"/>
+            <a:ext cx="3108960" cy="822960"/>
+          </a:xfrm>
+          <a:prstGeom prst="rect">
+            <a:avLst/>
+          </a:prstGeom>
+          <a:solidFill>
+            <a:srgbClr val="F0F7F7"/>
+          </a:solidFill>
+          <a:ln w="10160">
+            <a:solidFill>
+              <a:srgbClr val="005555"/>
+            </a:solidFill>
+          </a:ln>
+        </p:spPr>
+        <p:style>
+          <a:lnRef idx="1">
+            <a:schemeClr val="accent1"/>
+          </a:lnRef>
+          <a:fillRef idx="3">
+            <a:schemeClr val="accent1"/>
+          </a:fillRef>
+          <a:effectRef idx="2">
+            <a:schemeClr val="accent1"/>
+          </a:effectRef>
+          <a:fontRef idx="minor">
+            <a:schemeClr val="lt1"/>
+          </a:fontRef>
+        </p:style>
+        <p:txBody>
+          <a:bodyPr rtlCol="0" anchor="ctr"/>
+          <a:lstStyle/>
+          <a:p>
+            <a:pPr algn="ctr"/>
+          </a:p>
+        </p:txBody>
+      </p:sp>
+      <p:sp>
+        <p:nvSpPr>
+          <p:cNvPr id="33" name="TextBox 32"/>
+          <p:cNvSpPr txBox="1"/>
+          <p:nvPr/>
+        </p:nvSpPr>
+        <p:spPr>
+          <a:xfrm>
+            <a:off x="1389888" y="3931920"/>
+            <a:ext cx="2944368" cy="493776"/>
+          </a:xfrm>
+          <a:prstGeom prst="rect">
+            <a:avLst/>
+          </a:prstGeom>
+          <a:noFill/>
+        </p:spPr>
+        <p:txBody>
+          <a:bodyPr wrap="square">
+            <a:spAutoFit/>
+          </a:bodyPr>
+          <a:lstStyle/>
+          <a:p>
+            <a:pPr algn="l"/>
+            <a:r>
+              <a:rPr sz="1100" b="1" i="0">
+                <a:solidFill>
+                  <a:srgbClr val="005555"/>
+                </a:solidFill>
+              </a:rPr>
+              <a:t>Vérifier la disponibilité du prospect</a:t>
+            </a:r>
+          </a:p>
+        </p:txBody>
+      </p:sp>
+      <p:sp>
+        <p:nvSpPr>
+          <p:cNvPr id="34" name="Rectangle 33"/>
+          <p:cNvSpPr/>
+          <p:nvPr/>
+        </p:nvSpPr>
+        <p:spPr>
+          <a:xfrm>
+            <a:off x="4425696" y="3749039"/>
+            <a:ext cx="7488936" cy="822960"/>
+          </a:xfrm>
+          <a:prstGeom prst="rect">
+            <a:avLst/>
+          </a:prstGeom>
+          <a:solidFill>
+            <a:srgbClr val="F0F7F7"/>
+          </a:solidFill>
+          <a:ln>
+            <a:noFill/>
+          </a:ln>
+        </p:spPr>
+        <p:style>
+          <a:lnRef idx="1">
+            <a:schemeClr val="accent1"/>
+          </a:lnRef>
+          <a:fillRef idx="3">
+            <a:schemeClr val="accent1"/>
+          </a:fillRef>
+          <a:effectRef idx="2">
+            <a:schemeClr val="accent1"/>
+          </a:effectRef>
+          <a:fontRef idx="minor">
+            <a:schemeClr val="lt1"/>
+          </a:fontRef>
+        </p:style>
+        <p:txBody>
+          <a:bodyPr rtlCol="0" anchor="ctr"/>
+          <a:lstStyle/>
+          <a:p>
+            <a:pPr algn="ctr"/>
+          </a:p>
+        </p:txBody>
+      </p:sp>
+      <p:sp>
+        <p:nvSpPr>
+          <p:cNvPr id="35" name="TextBox 34"/>
+          <p:cNvSpPr txBox="1"/>
+          <p:nvPr/>
+        </p:nvSpPr>
+        <p:spPr>
+          <a:xfrm>
+            <a:off x="4535424" y="3840479"/>
+            <a:ext cx="7296912" cy="658368"/>
+          </a:xfrm>
+          <a:prstGeom prst="rect">
+            <a:avLst/>
+          </a:prstGeom>
+          <a:noFill/>
+        </p:spPr>
+        <p:txBody>
+          <a:bodyPr wrap="square">
+            <a:spAutoFit/>
+          </a:bodyPr>
+          <a:lstStyle/>
+          <a:p>
+            <a:pPr algn="l"/>
+            <a:r>
+              <a:rPr sz="1000" b="0" i="1">
+                <a:solidFill>
+                  <a:srgbClr val="1A1A1A"/>
+                </a:solidFill>
+              </a:rPr>
+              <a:t>'Est-ce que vous avez quelques minutes ?'
+Respect de l'interlocuteur — condition d'un échange de qualité.</a:t>
+            </a:r>
+          </a:p>
+        </p:txBody>
+      </p:sp>
+      <p:sp>
+        <p:nvSpPr>
+          <p:cNvPr id="36" name="Rectangle 35"/>
+          <p:cNvSpPr/>
+          <p:nvPr/>
+        </p:nvSpPr>
+        <p:spPr>
+          <a:xfrm>
+            <a:off x="274320" y="4608575"/>
+            <a:ext cx="1005840" cy="822960"/>
+          </a:xfrm>
+          <a:prstGeom prst="rect">
+            <a:avLst/>
+          </a:prstGeom>
+          <a:solidFill>
+            <a:srgbClr val="005555"/>
+          </a:solidFill>
+          <a:ln>
+            <a:noFill/>
+          </a:ln>
+        </p:spPr>
+        <p:style>
+          <a:lnRef idx="1">
+            <a:schemeClr val="accent1"/>
+          </a:lnRef>
+          <a:fillRef idx="3">
+            <a:schemeClr val="accent1"/>
+          </a:fillRef>
+          <a:effectRef idx="2">
+            <a:schemeClr val="accent1"/>
+          </a:effectRef>
+          <a:fontRef idx="minor">
+            <a:schemeClr val="lt1"/>
+          </a:fontRef>
+        </p:style>
+        <p:txBody>
+          <a:bodyPr rtlCol="0" anchor="ctr"/>
+          <a:lstStyle/>
+          <a:p>
+            <a:pPr algn="ctr"/>
+          </a:p>
+        </p:txBody>
+      </p:sp>
+      <p:sp>
+        <p:nvSpPr>
+          <p:cNvPr id="37" name="TextBox 36"/>
+          <p:cNvSpPr txBox="1"/>
+          <p:nvPr/>
+        </p:nvSpPr>
+        <p:spPr>
+          <a:xfrm>
+            <a:off x="292608" y="4773167"/>
+            <a:ext cx="969264" cy="493776"/>
+          </a:xfrm>
+          <a:prstGeom prst="rect">
+            <a:avLst/>
+          </a:prstGeom>
+          <a:noFill/>
+        </p:spPr>
+        <p:txBody>
+          <a:bodyPr wrap="square">
+            <a:spAutoFit/>
+          </a:bodyPr>
+          <a:lstStyle/>
+          <a:p>
+            <a:pPr algn="ctr"/>
+            <a:r>
+              <a:rPr sz="900" b="1" i="0">
+                <a:solidFill>
+                  <a:srgbClr val="FFFFFF"/>
+                </a:solidFill>
+              </a:rPr>
+              <a:t>RÈGLE 5</a:t>
+            </a:r>
+          </a:p>
+        </p:txBody>
+      </p:sp>
+      <p:sp>
+        <p:nvSpPr>
+          <p:cNvPr id="38" name="Rectangle 37"/>
+          <p:cNvSpPr/>
+          <p:nvPr/>
+        </p:nvSpPr>
+        <p:spPr>
+          <a:xfrm>
+            <a:off x="1298448" y="4608575"/>
+            <a:ext cx="3108960" cy="822960"/>
+          </a:xfrm>
+          <a:prstGeom prst="rect">
+            <a:avLst/>
+          </a:prstGeom>
+          <a:solidFill>
+            <a:srgbClr val="F0F7F7"/>
+          </a:solidFill>
+          <a:ln w="10160">
+            <a:solidFill>
+              <a:srgbClr val="005555"/>
+            </a:solidFill>
+          </a:ln>
+        </p:spPr>
+        <p:style>
+          <a:lnRef idx="1">
+            <a:schemeClr val="accent1"/>
+          </a:lnRef>
+          <a:fillRef idx="3">
+            <a:schemeClr val="accent1"/>
+          </a:fillRef>
+          <a:effectRef idx="2">
+            <a:schemeClr val="accent1"/>
+          </a:effectRef>
+          <a:fontRef idx="minor">
+            <a:schemeClr val="lt1"/>
+          </a:fontRef>
+        </p:style>
+        <p:txBody>
+          <a:bodyPr rtlCol="0" anchor="ctr"/>
+          <a:lstStyle/>
+          <a:p>
+            <a:pPr algn="ctr"/>
+          </a:p>
+        </p:txBody>
+      </p:sp>
+      <p:sp>
+        <p:nvSpPr>
+          <p:cNvPr id="39" name="TextBox 38"/>
+          <p:cNvSpPr txBox="1"/>
+          <p:nvPr/>
+        </p:nvSpPr>
+        <p:spPr>
+          <a:xfrm>
+            <a:off x="1389888" y="4791455"/>
+            <a:ext cx="2944368" cy="493776"/>
+          </a:xfrm>
+          <a:prstGeom prst="rect">
+            <a:avLst/>
+          </a:prstGeom>
+          <a:noFill/>
+        </p:spPr>
+        <p:txBody>
+          <a:bodyPr wrap="square">
+            <a:spAutoFit/>
+          </a:bodyPr>
+          <a:lstStyle/>
+          <a:p>
+            <a:pPr algn="l"/>
+            <a:r>
+              <a:rPr sz="1100" b="1" i="0">
+                <a:solidFill>
+                  <a:srgbClr val="005555"/>
+                </a:solidFill>
+              </a:rPr>
+              <a:t>Adopter un ton chaleureux et naturel</a:t>
+            </a:r>
+          </a:p>
+        </p:txBody>
+      </p:sp>
+      <p:sp>
+        <p:nvSpPr>
+          <p:cNvPr id="40" name="Rectangle 39"/>
+          <p:cNvSpPr/>
+          <p:nvPr/>
+        </p:nvSpPr>
+        <p:spPr>
+          <a:xfrm>
+            <a:off x="4425696" y="4608575"/>
+            <a:ext cx="7488936" cy="822960"/>
+          </a:xfrm>
+          <a:prstGeom prst="rect">
+            <a:avLst/>
+          </a:prstGeom>
+          <a:solidFill>
+            <a:srgbClr val="FFFFFF"/>
+          </a:solidFill>
+          <a:ln>
+            <a:noFill/>
+          </a:ln>
+        </p:spPr>
+        <p:style>
+          <a:lnRef idx="1">
+            <a:schemeClr val="accent1"/>
+          </a:lnRef>
+          <a:fillRef idx="3">
+            <a:schemeClr val="accent1"/>
+          </a:fillRef>
+          <a:effectRef idx="2">
+            <a:schemeClr val="accent1"/>
+          </a:effectRef>
+          <a:fontRef idx="minor">
+            <a:schemeClr val="lt1"/>
+          </a:fontRef>
+        </p:style>
+        <p:txBody>
+          <a:bodyPr rtlCol="0" anchor="ctr"/>
+          <a:lstStyle/>
+          <a:p>
+            <a:pPr algn="ctr"/>
+          </a:p>
+        </p:txBody>
+      </p:sp>
+      <p:sp>
+        <p:nvSpPr>
+          <p:cNvPr id="41" name="TextBox 40"/>
+          <p:cNvSpPr txBox="1"/>
+          <p:nvPr/>
+        </p:nvSpPr>
+        <p:spPr>
+          <a:xfrm>
+            <a:off x="4535424" y="4700015"/>
+            <a:ext cx="7296912" cy="658368"/>
+          </a:xfrm>
+          <a:prstGeom prst="rect">
+            <a:avLst/>
+          </a:prstGeom>
+          <a:noFill/>
+        </p:spPr>
+        <p:txBody>
+          <a:bodyPr wrap="square">
+            <a:spAutoFit/>
+          </a:bodyPr>
+          <a:lstStyle/>
+          <a:p>
+            <a:pPr algn="l"/>
+            <a:r>
+              <a:rPr sz="1000" b="0" i="1">
+                <a:solidFill>
+                  <a:srgbClr val="1A1A1A"/>
+                </a:solidFill>
+              </a:rPr>
+              <a:t>Sourire audible · Débit posé · Articulation claire
+Le ton est aussi important que les mots — souvent plus.</a:t>
+            </a:r>
+          </a:p>
+        </p:txBody>
+      </p:sp>
+      <p:sp>
+        <p:nvSpPr>
+          <p:cNvPr id="42" name="Rectangle 41"/>
+          <p:cNvSpPr/>
+          <p:nvPr/>
+        </p:nvSpPr>
+        <p:spPr>
+          <a:xfrm>
+            <a:off x="274320" y="5468112"/>
+            <a:ext cx="11640312" cy="402336"/>
+          </a:xfrm>
+          <a:prstGeom prst="rect">
+            <a:avLst/>
+          </a:prstGeom>
+          <a:solidFill>
+            <a:srgbClr val="008080"/>
+          </a:solidFill>
+          <a:ln>
+            <a:noFill/>
+          </a:ln>
+        </p:spPr>
+        <p:style>
+          <a:lnRef idx="1">
+            <a:schemeClr val="accent1"/>
+          </a:lnRef>
+          <a:fillRef idx="3">
+            <a:schemeClr val="accent1"/>
+          </a:fillRef>
+          <a:effectRef idx="2">
+            <a:schemeClr val="accent1"/>
+          </a:effectRef>
+          <a:fontRef idx="minor">
+            <a:schemeClr val="lt1"/>
+          </a:fontRef>
+        </p:style>
+        <p:txBody>
+          <a:bodyPr rtlCol="0" anchor="ctr"/>
+          <a:lstStyle/>
+          <a:p>
+            <a:pPr algn="ctr"/>
+          </a:p>
+        </p:txBody>
+      </p:sp>
+      <p:sp>
+        <p:nvSpPr>
+          <p:cNvPr id="43" name="TextBox 42"/>
+          <p:cNvSpPr txBox="1"/>
+          <p:nvPr/>
+        </p:nvSpPr>
+        <p:spPr>
+          <a:xfrm>
+            <a:off x="411479" y="5541264"/>
             <a:ext cx="11365992" cy="256032"/>
           </a:xfrm>
           <a:prstGeom prst="rect">
@@ -7272,7 +8034,7 @@
                   <a:srgbClr val="FFFFFF"/>
                 </a:solidFill>
               </a:rPr>
-              <a:t>Exercice : Écrivez votre propre Impact Story en 5 lignes — un enfant, une situation, un impact.</a:t>
+              <a:t>Ces 5 règles sont vérifiées par la grille d'évaluation FIDELIS. Un appel qui viole l'une d'elles est disqualifié dans la nomenclature.</a:t>
             </a:r>
           </a:p>
         </p:txBody>

--- a/FIM_BookJ3_Lecture_Script_V6-01062026SHY-TE.pptx
+++ b/FIM_BookJ3_Lecture_Script_V6-01062026SHY-TE.pptx
@@ -9,6 +9,7 @@
     <p:sldId id="257" r:id="rId8"/>
     <p:sldId id="258" r:id="rId9"/>
     <p:sldId id="259" r:id="rId10"/>
+    <p:sldId id="260" r:id="rId11"/>
   </p:sldIdLst>
   <p:sldSz cx="12188952" cy="6858000" type="screen4x3"/>
   <p:notesSz cx="6858000" cy="9144000"/>
@@ -3149,7 +3150,7 @@
             <a:avLst/>
           </a:prstGeom>
           <a:solidFill>
-            <a:srgbClr val="005555"/>
+            <a:srgbClr val="005050"/>
           </a:solidFill>
           <a:ln>
             <a:noFill/>
@@ -3229,7 +3230,7 @@
         <p:spPr>
           <a:xfrm>
             <a:off x="347472" y="91440"/>
-            <a:ext cx="3200400" cy="438912"/>
+            <a:ext cx="4572000" cy="402336"/>
           </a:xfrm>
           <a:prstGeom prst="rect">
             <a:avLst/>
@@ -3262,8 +3263,8 @@
         </p:nvSpPr>
         <p:spPr>
           <a:xfrm>
-            <a:off x="347472" y="530352"/>
-            <a:ext cx="7772400" cy="347472"/>
+            <a:off x="347472" y="493776"/>
+            <a:ext cx="8229600" cy="329184"/>
           </a:xfrm>
           <a:prstGeom prst="rect">
             <a:avLst/>
@@ -3296,8 +3297,8 @@
         </p:nvSpPr>
         <p:spPr>
           <a:xfrm>
-            <a:off x="347472" y="932688"/>
-            <a:ext cx="7772400" cy="292608"/>
+            <a:off x="347472" y="877824"/>
+            <a:ext cx="8229600" cy="274320"/>
           </a:xfrm>
           <a:prstGeom prst="rect">
             <a:avLst/>
@@ -3330,8 +3331,8 @@
         </p:nvSpPr>
         <p:spPr>
           <a:xfrm>
-            <a:off x="347472" y="1207008"/>
-            <a:ext cx="10515600" cy="914400"/>
+            <a:off x="347472" y="1188720"/>
+            <a:ext cx="10515600" cy="960120"/>
           </a:xfrm>
           <a:prstGeom prst="rect">
             <a:avLst/>
@@ -3346,7 +3347,7 @@
           <a:p>
             <a:pPr algn="l"/>
             <a:r>
-              <a:rPr sz="3000" b="1" i="0">
+              <a:rPr sz="2900" b="1" i="0">
                 <a:solidFill>
                   <a:srgbClr val="FFFFFF"/>
                 </a:solidFill>
@@ -3364,8 +3365,8 @@
         </p:nvSpPr>
         <p:spPr>
           <a:xfrm>
-            <a:off x="347472" y="1901952"/>
-            <a:ext cx="10515600" cy="402336"/>
+            <a:off x="347472" y="1920240"/>
+            <a:ext cx="10515600" cy="384048"/>
           </a:xfrm>
           <a:prstGeom prst="rect">
             <a:avLst/>
@@ -3406,8 +3407,8 @@
         </p:blipFill>
         <p:spPr>
           <a:xfrm>
-            <a:off x="11247120" y="45720"/>
-            <a:ext cx="822960" cy="804672"/>
+            <a:off x="11228832" y="0"/>
+            <a:ext cx="841248" cy="676656"/>
           </a:xfrm>
           <a:prstGeom prst="rect">
             <a:avLst/>
@@ -3429,7 +3430,7 @@
             <a:avLst/>
           </a:prstGeom>
           <a:solidFill>
-            <a:srgbClr val="005555"/>
+            <a:srgbClr val="005050"/>
           </a:solidFill>
           <a:ln>
             <a:noFill/>
@@ -3487,42 +3488,6 @@
                 </a:solidFill>
               </a:rPr>
               <a:t>SHY-Performance  ·  Formation FIM  ·  UNICEF France  ·  V6-01062026SHY-TE</a:t>
-            </a:r>
-          </a:p>
-        </p:txBody>
-      </p:sp>
-      <p:sp>
-        <p:nvSpPr>
-          <p:cNvPr id="13" name="TextBox 12"/>
-          <p:cNvSpPr txBox="1"/>
-          <p:nvPr/>
-        </p:nvSpPr>
-        <p:spPr>
-          <a:xfrm>
-            <a:off x="457200" y="2514600"/>
-            <a:ext cx="10789920" cy="1005840"/>
-          </a:xfrm>
-          <a:prstGeom prst="rect">
-            <a:avLst/>
-          </a:prstGeom>
-          <a:noFill/>
-        </p:spPr>
-        <p:txBody>
-          <a:bodyPr wrap="square">
-            <a:spAutoFit/>
-          </a:bodyPr>
-          <a:lstStyle/>
-          <a:p>
-            <a:pPr algn="l"/>
-            <a:r>
-              <a:rPr sz="1400" b="0" i="0">
-                <a:solidFill>
-                  <a:srgbClr val="1A1A1A"/>
-                </a:solidFill>
-              </a:rPr>
-              <a:t>Aujourd'hui vous allez lire, analyser et incarner le script officiel UNICEF.
-Vous ne le lirez pas mécaniquement — vous allez comprendre l'intention
-de chaque phrase pour le délivrer avec conviction et naturel.</a:t>
             </a:r>
           </a:p>
         </p:txBody>
@@ -3603,7 +3568,7 @@
             <a:avLst/>
           </a:prstGeom>
           <a:solidFill>
-            <a:srgbClr val="005555"/>
+            <a:srgbClr val="005050"/>
           </a:solidFill>
           <a:ln>
             <a:noFill/>
@@ -3682,8 +3647,8 @@
         </p:nvSpPr>
         <p:spPr>
           <a:xfrm>
-            <a:off x="164592" y="73152"/>
-            <a:ext cx="2011680" cy="347472"/>
+            <a:off x="164592" y="91440"/>
+            <a:ext cx="1920240" cy="329184"/>
           </a:xfrm>
           <a:prstGeom prst="rect">
             <a:avLst/>
@@ -3716,8 +3681,8 @@
         </p:nvSpPr>
         <p:spPr>
           <a:xfrm>
-            <a:off x="2286000" y="91440"/>
-            <a:ext cx="36576" cy="502920"/>
+            <a:off x="2212848" y="109728"/>
+            <a:ext cx="36576" cy="475488"/>
           </a:xfrm>
           <a:prstGeom prst="rect">
             <a:avLst/>
@@ -3759,8 +3724,8 @@
         </p:nvSpPr>
         <p:spPr>
           <a:xfrm>
-            <a:off x="2423160" y="91440"/>
-            <a:ext cx="9235440" cy="502920"/>
+            <a:off x="2350008" y="91440"/>
+            <a:ext cx="8823960" cy="502920"/>
           </a:xfrm>
           <a:prstGeom prst="rect">
             <a:avLst/>
@@ -3801,8 +3766,8 @@
         </p:blipFill>
         <p:spPr>
           <a:xfrm>
-            <a:off x="11247120" y="0"/>
-            <a:ext cx="822960" cy="676656"/>
+            <a:off x="11228832" y="0"/>
+            <a:ext cx="841248" cy="676656"/>
           </a:xfrm>
           <a:prstGeom prst="rect">
             <a:avLst/>
@@ -3824,7 +3789,7 @@
             <a:avLst/>
           </a:prstGeom>
           <a:solidFill>
-            <a:srgbClr val="005555"/>
+            <a:srgbClr val="005050"/>
           </a:solidFill>
           <a:ln>
             <a:noFill/>
@@ -3901,7 +3866,7 @@
             <a:avLst/>
           </a:prstGeom>
           <a:solidFill>
-            <a:srgbClr val="005555"/>
+            <a:srgbClr val="005050"/>
           </a:solidFill>
           <a:ln>
             <a:noFill/>
@@ -3982,7 +3947,7 @@
           </a:solidFill>
           <a:ln w="15240">
             <a:solidFill>
-              <a:srgbClr val="005555"/>
+              <a:srgbClr val="005050"/>
             </a:solidFill>
           </a:ln>
         </p:spPr>
@@ -4353,9 +4318,9 @@
                   <a:srgbClr val="1A1A1A"/>
                 </a:solidFill>
               </a:rPr>
-              <a:t>Les 7 étapes · Les 5 règles
-d'accroche · Les 4 modes
-de validation du don</a:t>
+              <a:t>7 étapes · 5 règles accroche
+4 modes de validation du don
+Ton, rythme, intention</a:t>
             </a:r>
           </a:p>
         </p:txBody>
@@ -4511,9 +4476,9 @@
                   <a:srgbClr val="1A1A1A"/>
                 </a:solidFill>
               </a:rPr>
-              <a:t>Exercices de lecture en binômes.
-Débriefs collectifs.
-Points forts &amp; axes d'amélioration.</a:t>
+              <a:t>Lecture en binômes. Débriefs
+collectifs. Points forts
+&amp; axes d'amélioration.</a:t>
             </a:r>
           </a:p>
         </p:txBody>
@@ -4590,7 +4555,7 @@
                   <a:srgbClr val="FFFFFF"/>
                 </a:solidFill>
               </a:rPr>
-              <a:t>Vos 3 réussites à valider aujourd'hui</a:t>
+              <a:t>À retenir</a:t>
             </a:r>
           </a:p>
         </p:txBody>
@@ -4669,7 +4634,7 @@
                   <a:srgbClr val="1A1A1A"/>
                 </a:solidFill>
               </a:rPr>
-              <a:t>✔ Script lu 3 fois sans hésitation majeure</a:t>
+              <a:t>✔ Script lu 3 fois sans hésitation</a:t>
             </a:r>
           </a:p>
         </p:txBody>
@@ -4748,7 +4713,7 @@
                   <a:srgbClr val="1A1A1A"/>
                 </a:solidFill>
               </a:rPr>
-              <a:t>✔ 5 règles d'accroche récitées sans support</a:t>
+              <a:t>✔ 5 règles d'accroche récitées</a:t>
             </a:r>
           </a:p>
         </p:txBody>
@@ -4827,7 +4792,7 @@
                   <a:srgbClr val="1A1A1A"/>
                 </a:solidFill>
               </a:rPr>
-              <a:t>✔ Score seuil : 12/20 pour passage J4</a:t>
+              <a:t>✔ Score seuil 12/20 pour J4</a:t>
             </a:r>
           </a:p>
         </p:txBody>
@@ -4908,7 +4873,7 @@
             <a:avLst/>
           </a:prstGeom>
           <a:solidFill>
-            <a:srgbClr val="005555"/>
+            <a:srgbClr val="005050"/>
           </a:solidFill>
           <a:ln>
             <a:noFill/>
@@ -4987,8 +4952,8 @@
         </p:nvSpPr>
         <p:spPr>
           <a:xfrm>
-            <a:off x="164592" y="73152"/>
-            <a:ext cx="2011680" cy="347472"/>
+            <a:off x="164592" y="91440"/>
+            <a:ext cx="1920240" cy="329184"/>
           </a:xfrm>
           <a:prstGeom prst="rect">
             <a:avLst/>
@@ -5021,8 +4986,8 @@
         </p:nvSpPr>
         <p:spPr>
           <a:xfrm>
-            <a:off x="2286000" y="91440"/>
-            <a:ext cx="36576" cy="502920"/>
+            <a:off x="2212848" y="109728"/>
+            <a:ext cx="36576" cy="475488"/>
           </a:xfrm>
           <a:prstGeom prst="rect">
             <a:avLst/>
@@ -5064,8 +5029,8 @@
         </p:nvSpPr>
         <p:spPr>
           <a:xfrm>
-            <a:off x="2423160" y="91440"/>
-            <a:ext cx="9235440" cy="502920"/>
+            <a:off x="2350008" y="91440"/>
+            <a:ext cx="8823960" cy="502920"/>
           </a:xfrm>
           <a:prstGeom prst="rect">
             <a:avLst/>
@@ -5085,7 +5050,7 @@
                   <a:srgbClr val="FFFFFF"/>
                 </a:solidFill>
               </a:rPr>
-              <a:t>Le Script Officiel UNICEF — Les 7 Étapes que Vous Allez Maîtriser</a:t>
+              <a:t>Le Script Officiel UNICEF — Les 7 Étapes</a:t>
             </a:r>
           </a:p>
         </p:txBody>
@@ -5106,8 +5071,8 @@
         </p:blipFill>
         <p:spPr>
           <a:xfrm>
-            <a:off x="11247120" y="0"/>
-            <a:ext cx="822960" cy="676656"/>
+            <a:off x="11228832" y="0"/>
+            <a:ext cx="841248" cy="676656"/>
           </a:xfrm>
           <a:prstGeom prst="rect">
             <a:avLst/>
@@ -5129,7 +5094,7 @@
             <a:avLst/>
           </a:prstGeom>
           <a:solidFill>
-            <a:srgbClr val="005555"/>
+            <a:srgbClr val="005050"/>
           </a:solidFill>
           <a:ln>
             <a:noFill/>
@@ -5200,13 +5165,13 @@
         <p:spPr>
           <a:xfrm>
             <a:off x="274320" y="804672"/>
-            <a:ext cx="1662901" cy="457200"/>
+            <a:ext cx="1662901" cy="438912"/>
           </a:xfrm>
           <a:prstGeom prst="rect">
             <a:avLst/>
           </a:prstGeom>
           <a:solidFill>
-            <a:srgbClr val="005555"/>
+            <a:srgbClr val="005050"/>
           </a:solidFill>
           <a:ln>
             <a:noFill/>
@@ -5243,7 +5208,7 @@
         <p:spPr>
           <a:xfrm>
             <a:off x="329184" y="822960"/>
-            <a:ext cx="1571461" cy="420624"/>
+            <a:ext cx="1571461" cy="402336"/>
           </a:xfrm>
           <a:prstGeom prst="rect">
             <a:avLst/>
@@ -5277,7 +5242,7 @@
         </p:nvSpPr>
         <p:spPr>
           <a:xfrm>
-            <a:off x="274320" y="1261872"/>
+            <a:off x="274320" y="1243584"/>
             <a:ext cx="1662901" cy="4434840"/>
           </a:xfrm>
           <a:prstGeom prst="rect">
@@ -5288,7 +5253,7 @@
           </a:solidFill>
           <a:ln w="15240">
             <a:solidFill>
-              <a:srgbClr val="005555"/>
+              <a:srgbClr val="005050"/>
             </a:solidFill>
           </a:ln>
         </p:spPr>
@@ -5322,7 +5287,7 @@
         </p:nvSpPr>
         <p:spPr>
           <a:xfrm>
-            <a:off x="347472" y="1316736"/>
+            <a:off x="347472" y="1298448"/>
             <a:ext cx="1534885" cy="4251960"/>
           </a:xfrm>
           <a:prstGeom prst="rect">
@@ -5343,11 +5308,9 @@
                   <a:srgbClr val="1A1A1A"/>
                 </a:solidFill>
               </a:rPr>
-              <a:t>Ouverture téléphonique conforme
-aux 5 règles officielles
-Ton chaleureux, prénom + nom,
-organisation clairement nommée,
-raison de l'appel annoncée</a:t>
+              <a:t>Ouverture conforme aux 5 règles
+Ton chaleureux, prénom+nom,
+organisation nommée, raison annoncée</a:t>
             </a:r>
           </a:p>
         </p:txBody>
@@ -5361,7 +5324,7 @@
         <p:spPr>
           <a:xfrm>
             <a:off x="1955509" y="804672"/>
-            <a:ext cx="1662901" cy="457200"/>
+            <a:ext cx="1662901" cy="438912"/>
           </a:xfrm>
           <a:prstGeom prst="rect">
             <a:avLst/>
@@ -5404,7 +5367,7 @@
         <p:spPr>
           <a:xfrm>
             <a:off x="2010373" y="822960"/>
-            <a:ext cx="1571461" cy="420624"/>
+            <a:ext cx="1571461" cy="402336"/>
           </a:xfrm>
           <a:prstGeom prst="rect">
             <a:avLst/>
@@ -5438,7 +5401,7 @@
         </p:nvSpPr>
         <p:spPr>
           <a:xfrm>
-            <a:off x="1955509" y="1261872"/>
+            <a:off x="1955509" y="1243584"/>
             <a:ext cx="1662901" cy="4434840"/>
           </a:xfrm>
           <a:prstGeom prst="rect">
@@ -5483,7 +5446,7 @@
         </p:nvSpPr>
         <p:spPr>
           <a:xfrm>
-            <a:off x="2028661" y="1316736"/>
+            <a:off x="2028661" y="1298448"/>
             <a:ext cx="1534885" cy="4251960"/>
           </a:xfrm>
           <a:prstGeom prst="rect">
@@ -5504,10 +5467,8 @@
                   <a:srgbClr val="1A1A1A"/>
                 </a:solidFill>
               </a:rPr>
-              <a:t>Présentation de la cause :
-la malnutrition aigüe sévère
-Chiffre-clé : 1 enfant toutes
-les 11 secondes · Dimension
+              <a:t>Présentation de la cause
+1 enfant/11sec · Dimension
 humaine et émotionnelle</a:t>
             </a:r>
           </a:p>
@@ -5522,7 +5483,7 @@
         <p:spPr>
           <a:xfrm>
             <a:off x="3636699" y="804672"/>
-            <a:ext cx="1662901" cy="457200"/>
+            <a:ext cx="1662901" cy="438912"/>
           </a:xfrm>
           <a:prstGeom prst="rect">
             <a:avLst/>
@@ -5565,7 +5526,7 @@
         <p:spPr>
           <a:xfrm>
             <a:off x="3691563" y="822960"/>
-            <a:ext cx="1571461" cy="420624"/>
+            <a:ext cx="1571461" cy="402336"/>
           </a:xfrm>
           <a:prstGeom prst="rect">
             <a:avLst/>
@@ -5599,7 +5560,7 @@
         </p:nvSpPr>
         <p:spPr>
           <a:xfrm>
-            <a:off x="3636699" y="1261872"/>
+            <a:off x="3636699" y="1243584"/>
             <a:ext cx="1662901" cy="4434840"/>
           </a:xfrm>
           <a:prstGeom prst="rect">
@@ -5644,7 +5605,7 @@
         </p:nvSpPr>
         <p:spPr>
           <a:xfrm>
-            <a:off x="3709851" y="1316736"/>
+            <a:off x="3709851" y="1298448"/>
             <a:ext cx="1534885" cy="4251960"/>
           </a:xfrm>
           <a:prstGeom prst="rect">
@@ -5665,11 +5626,9 @@
                   <a:srgbClr val="1A1A1A"/>
                 </a:solidFill>
               </a:rPr>
-              <a:t>La solution concrète de l'UNICEF :
-les sachets RUTF (92g)
+              <a:t>La solution UNICEF : sachets 92g
 6 à 8 semaines pour guérir
-un enfant sévèrement malnutri
-Coût : quelques euros/traitement</a:t>
+un enfant sévèrement malnutri</a:t>
             </a:r>
           </a:p>
         </p:txBody>
@@ -5683,7 +5642,7 @@
         <p:spPr>
           <a:xfrm>
             <a:off x="5317889" y="804672"/>
-            <a:ext cx="1662901" cy="457200"/>
+            <a:ext cx="1662901" cy="438912"/>
           </a:xfrm>
           <a:prstGeom prst="rect">
             <a:avLst/>
@@ -5726,7 +5685,7 @@
         <p:spPr>
           <a:xfrm>
             <a:off x="5372753" y="822960"/>
-            <a:ext cx="1571461" cy="420624"/>
+            <a:ext cx="1571461" cy="402336"/>
           </a:xfrm>
           <a:prstGeom prst="rect">
             <a:avLst/>
@@ -5760,7 +5719,7 @@
         </p:nvSpPr>
         <p:spPr>
           <a:xfrm>
-            <a:off x="5317889" y="1261872"/>
+            <a:off x="5317889" y="1243584"/>
             <a:ext cx="1662901" cy="4434840"/>
           </a:xfrm>
           <a:prstGeom prst="rect">
@@ -5805,7 +5764,7 @@
         </p:nvSpPr>
         <p:spPr>
           <a:xfrm>
-            <a:off x="5391041" y="1316736"/>
+            <a:off x="5391041" y="1298448"/>
             <a:ext cx="1534885" cy="4251960"/>
           </a:xfrm>
           <a:prstGeom prst="rect">
@@ -5826,11 +5785,9 @@
                   <a:srgbClr val="1A1A1A"/>
                 </a:solidFill>
               </a:rPr>
-              <a:t>Proposition du don mensuel
-par Prélèvement Automatique
-Montant suggéré adapté
-Impact chiffré du don
-Simplicité du geste</a:t>
+              <a:t>Proposition du PA mensuel
+Montant suggéré · Impact
+chiffré · Simplicité du geste</a:t>
             </a:r>
           </a:p>
         </p:txBody>
@@ -5844,7 +5801,7 @@
         <p:spPr>
           <a:xfrm>
             <a:off x="6999078" y="804672"/>
-            <a:ext cx="1662901" cy="457200"/>
+            <a:ext cx="1662901" cy="438912"/>
           </a:xfrm>
           <a:prstGeom prst="rect">
             <a:avLst/>
@@ -5887,7 +5844,7 @@
         <p:spPr>
           <a:xfrm>
             <a:off x="7053942" y="822960"/>
-            <a:ext cx="1571461" cy="420624"/>
+            <a:ext cx="1571461" cy="402336"/>
           </a:xfrm>
           <a:prstGeom prst="rect">
             <a:avLst/>
@@ -5921,7 +5878,7 @@
         </p:nvSpPr>
         <p:spPr>
           <a:xfrm>
-            <a:off x="6999078" y="1261872"/>
+            <a:off x="6999078" y="1243584"/>
             <a:ext cx="1662901" cy="4434840"/>
           </a:xfrm>
           <a:prstGeom prst="rect">
@@ -5966,7 +5923,7 @@
         </p:nvSpPr>
         <p:spPr>
           <a:xfrm>
-            <a:off x="7072230" y="1316736"/>
+            <a:off x="7072230" y="1298448"/>
             <a:ext cx="1534885" cy="4251960"/>
           </a:xfrm>
           <a:prstGeom prst="rect">
@@ -5987,12 +5944,9 @@
                   <a:srgbClr val="1A1A1A"/>
                 </a:solidFill>
               </a:rPr>
-              <a:t>Si le prospect propose
-un don unique, réorienter
-vers le don régulier
-'Je comprends — et si on
-envisageait quelque chose
-de régulier ?'</a:t>
+              <a:t>Réorientation vers le PA
+'Et si on envisageait quelque
+chose de régulier ?'</a:t>
             </a:r>
           </a:p>
         </p:txBody>
@@ -6006,7 +5960,7 @@
         <p:spPr>
           <a:xfrm>
             <a:off x="8680268" y="804672"/>
-            <a:ext cx="1662901" cy="457200"/>
+            <a:ext cx="1662901" cy="438912"/>
           </a:xfrm>
           <a:prstGeom prst="rect">
             <a:avLst/>
@@ -6049,7 +6003,7 @@
         <p:spPr>
           <a:xfrm>
             <a:off x="8735132" y="822960"/>
-            <a:ext cx="1571461" cy="420624"/>
+            <a:ext cx="1571461" cy="402336"/>
           </a:xfrm>
           <a:prstGeom prst="rect">
             <a:avLst/>
@@ -6083,7 +6037,7 @@
         </p:nvSpPr>
         <p:spPr>
           <a:xfrm>
-            <a:off x="8680268" y="1261872"/>
+            <a:off x="8680268" y="1243584"/>
             <a:ext cx="1662901" cy="4434840"/>
           </a:xfrm>
           <a:prstGeom prst="rect">
@@ -6128,7 +6082,7 @@
         </p:nvSpPr>
         <p:spPr>
           <a:xfrm>
-            <a:off x="8753420" y="1316736"/>
+            <a:off x="8753420" y="1298448"/>
             <a:ext cx="1534885" cy="4251960"/>
           </a:xfrm>
           <a:prstGeom prst="rect">
@@ -6149,12 +6103,9 @@
                   <a:srgbClr val="1A1A1A"/>
                 </a:solidFill>
               </a:rPr>
-              <a:t>Gestion de l'hésitation :
-rester dans l'échange,
-ne pas forcer la conclusion
-Relancer avec une question
-ouverture sur le délai
-de réflexion</a:t>
+              <a:t>Gestion de l'hésitation
+Rester dans l'échange
+Relance avec question ouverte</a:t>
             </a:r>
           </a:p>
         </p:txBody>
@@ -6168,7 +6119,7 @@
         <p:spPr>
           <a:xfrm>
             <a:off x="10361458" y="804672"/>
-            <a:ext cx="1662901" cy="457200"/>
+            <a:ext cx="1662901" cy="438912"/>
           </a:xfrm>
           <a:prstGeom prst="rect">
             <a:avLst/>
@@ -6211,7 +6162,7 @@
         <p:spPr>
           <a:xfrm>
             <a:off x="10416322" y="822960"/>
-            <a:ext cx="1571461" cy="420624"/>
+            <a:ext cx="1571461" cy="402336"/>
           </a:xfrm>
           <a:prstGeom prst="rect">
             <a:avLst/>
@@ -6232,8 +6183,7 @@
                 </a:solidFill>
               </a:rPr>
               <a:t>⑦
-VALIDATION
-COORDONNÉES</a:t>
+VALIDATION</a:t>
             </a:r>
           </a:p>
         </p:txBody>
@@ -6246,7 +6196,7 @@
         </p:nvSpPr>
         <p:spPr>
           <a:xfrm>
-            <a:off x="10361458" y="1261872"/>
+            <a:off x="10361458" y="1243584"/>
             <a:ext cx="1662901" cy="4434840"/>
           </a:xfrm>
           <a:prstGeom prst="rect">
@@ -6291,7 +6241,7 @@
         </p:nvSpPr>
         <p:spPr>
           <a:xfrm>
-            <a:off x="10434610" y="1316736"/>
+            <a:off x="10434610" y="1298448"/>
             <a:ext cx="1534885" cy="4251960"/>
           </a:xfrm>
           <a:prstGeom prst="rect">
@@ -6312,12 +6262,9 @@
                   <a:srgbClr val="1A1A1A"/>
                 </a:solidFill>
               </a:rPr>
-              <a:t>Sécurisation du don :
-IBAN à chaud / PA en ligne /
+              <a:t>IBAN à chaud / PA en ligne /
 PEL / PA courrier
-Confirmer toutes
-les coordonnées · SMS
-de confirmation envoyé</a:t>
+Confirmer coordonnées · SMS</a:t>
             </a:r>
           </a:p>
         </p:txBody>
@@ -6394,7 +6341,7 @@
                   <a:srgbClr val="FFFFFF"/>
                 </a:solidFill>
               </a:rPr>
-              <a:t>Durée standard d'un appel complet : 3 à 5 minutes  ·  Chaque étape a une fonction précise — ne pas sauter, ne pas inverser.</a:t>
+              <a:t>Durée standard : 3 à 5 min · Chaque étape a une fonction précise — ne pas sauter, ne pas inverser.</a:t>
             </a:r>
           </a:p>
         </p:txBody>
@@ -6475,7 +6422,7 @@
             <a:avLst/>
           </a:prstGeom>
           <a:solidFill>
-            <a:srgbClr val="005555"/>
+            <a:srgbClr val="005050"/>
           </a:solidFill>
           <a:ln>
             <a:noFill/>
@@ -6554,8 +6501,8 @@
         </p:nvSpPr>
         <p:spPr>
           <a:xfrm>
-            <a:off x="164592" y="73152"/>
-            <a:ext cx="2011680" cy="347472"/>
+            <a:off x="164592" y="91440"/>
+            <a:ext cx="1920240" cy="329184"/>
           </a:xfrm>
           <a:prstGeom prst="rect">
             <a:avLst/>
@@ -6588,8 +6535,8 @@
         </p:nvSpPr>
         <p:spPr>
           <a:xfrm>
-            <a:off x="2286000" y="91440"/>
-            <a:ext cx="36576" cy="502920"/>
+            <a:off x="2212848" y="109728"/>
+            <a:ext cx="36576" cy="475488"/>
           </a:xfrm>
           <a:prstGeom prst="rect">
             <a:avLst/>
@@ -6631,8 +6578,8 @@
         </p:nvSpPr>
         <p:spPr>
           <a:xfrm>
-            <a:off x="2423160" y="91440"/>
-            <a:ext cx="9235440" cy="502920"/>
+            <a:off x="2350008" y="91440"/>
+            <a:ext cx="8823960" cy="502920"/>
           </a:xfrm>
           <a:prstGeom prst="rect">
             <a:avLst/>
@@ -6673,8 +6620,8 @@
         </p:blipFill>
         <p:spPr>
           <a:xfrm>
-            <a:off x="11247120" y="0"/>
-            <a:ext cx="822960" cy="676656"/>
+            <a:off x="11228832" y="0"/>
+            <a:ext cx="841248" cy="676656"/>
           </a:xfrm>
           <a:prstGeom prst="rect">
             <a:avLst/>
@@ -6696,7 +6643,7 @@
             <a:avLst/>
           </a:prstGeom>
           <a:solidFill>
-            <a:srgbClr val="005555"/>
+            <a:srgbClr val="005050"/>
           </a:solidFill>
           <a:ln>
             <a:noFill/>
@@ -6784,10 +6731,10 @@
             <a:r>
               <a:rPr sz="1200" b="1" i="0">
                 <a:solidFill>
-                  <a:srgbClr val="005555"/>
+                  <a:srgbClr val="005050"/>
                 </a:solidFill>
               </a:rPr>
-              <a:t>Ces 5 règles sont non négociables — elles définissent un appel conforme :</a:t>
+              <a:t>Ces 5 règles sont non négociables — elles définissent un appel conforme FIDELIS :</a:t>
             </a:r>
           </a:p>
         </p:txBody>
@@ -6801,13 +6748,13 @@
         <p:spPr>
           <a:xfrm>
             <a:off x="274320" y="1170432"/>
-            <a:ext cx="1005840" cy="822960"/>
+            <a:ext cx="1005840" cy="804672"/>
           </a:xfrm>
           <a:prstGeom prst="rect">
             <a:avLst/>
           </a:prstGeom>
           <a:solidFill>
-            <a:srgbClr val="005555"/>
+            <a:srgbClr val="005050"/>
           </a:solidFill>
           <a:ln>
             <a:noFill/>
@@ -6844,7 +6791,7 @@
         <p:spPr>
           <a:xfrm>
             <a:off x="292608" y="1335024"/>
-            <a:ext cx="969264" cy="493776"/>
+            <a:ext cx="969264" cy="475488"/>
           </a:xfrm>
           <a:prstGeom prst="rect">
             <a:avLst/>
@@ -6859,7 +6806,7 @@
           <a:p>
             <a:pPr algn="ctr"/>
             <a:r>
-              <a:rPr sz="900" b="1" i="0">
+              <a:rPr sz="800" b="1" i="0">
                 <a:solidFill>
                   <a:srgbClr val="FFFFFF"/>
                 </a:solidFill>
@@ -6878,7 +6825,7 @@
         <p:spPr>
           <a:xfrm>
             <a:off x="1298448" y="1170432"/>
-            <a:ext cx="3108960" cy="822960"/>
+            <a:ext cx="3108960" cy="804672"/>
           </a:xfrm>
           <a:prstGeom prst="rect">
             <a:avLst/>
@@ -6888,7 +6835,7 @@
           </a:solidFill>
           <a:ln w="10160">
             <a:solidFill>
-              <a:srgbClr val="005555"/>
+              <a:srgbClr val="005050"/>
             </a:solidFill>
           </a:ln>
         </p:spPr>
@@ -6923,7 +6870,7 @@
         <p:spPr>
           <a:xfrm>
             <a:off x="1389888" y="1353312"/>
-            <a:ext cx="2944368" cy="493776"/>
+            <a:ext cx="2944368" cy="475488"/>
           </a:xfrm>
           <a:prstGeom prst="rect">
             <a:avLst/>
@@ -6938,9 +6885,9 @@
           <a:p>
             <a:pPr algn="l"/>
             <a:r>
-              <a:rPr sz="1100" b="1" i="0">
+              <a:rPr sz="1000" b="1" i="0">
                 <a:solidFill>
-                  <a:srgbClr val="005555"/>
+                  <a:srgbClr val="005050"/>
                 </a:solidFill>
               </a:rPr>
               <a:t>Se présenter avec prénom et nom</a:t>
@@ -6957,7 +6904,7 @@
         <p:spPr>
           <a:xfrm>
             <a:off x="4425696" y="1170432"/>
-            <a:ext cx="7488936" cy="822960"/>
+            <a:ext cx="7488936" cy="804672"/>
           </a:xfrm>
           <a:prstGeom prst="rect">
             <a:avLst/>
@@ -7000,7 +6947,7 @@
         <p:spPr>
           <a:xfrm>
             <a:off x="4535424" y="1261872"/>
-            <a:ext cx="7296912" cy="658368"/>
+            <a:ext cx="7296912" cy="640080"/>
           </a:xfrm>
           <a:prstGeom prst="rect">
             <a:avLst/>
@@ -7020,8 +6967,7 @@
                   <a:srgbClr val="1A1A1A"/>
                 </a:solidFill>
               </a:rPr>
-              <a:t>Votre identité est donnée clairement dès les premières secondes.
-'Bonjour, je m'appelle [Prénom NOM]…'</a:t>
+              <a:t>'Bonjour, je m'appelle [Prénom NOM]…' — identité claire dès les premières secondes.</a:t>
             </a:r>
           </a:p>
         </p:txBody>
@@ -7034,14 +6980,14 @@
         </p:nvSpPr>
         <p:spPr>
           <a:xfrm>
-            <a:off x="274320" y="2029967"/>
-            <a:ext cx="1005840" cy="822960"/>
+            <a:off x="274320" y="2011680"/>
+            <a:ext cx="1005840" cy="804672"/>
           </a:xfrm>
           <a:prstGeom prst="rect">
             <a:avLst/>
           </a:prstGeom>
           <a:solidFill>
-            <a:srgbClr val="005555"/>
+            <a:srgbClr val="005050"/>
           </a:solidFill>
           <a:ln>
             <a:noFill/>
@@ -7077,8 +7023,8 @@
         </p:nvSpPr>
         <p:spPr>
           <a:xfrm>
-            <a:off x="292608" y="2194560"/>
-            <a:ext cx="969264" cy="493776"/>
+            <a:off x="292608" y="2176272"/>
+            <a:ext cx="969264" cy="475488"/>
           </a:xfrm>
           <a:prstGeom prst="rect">
             <a:avLst/>
@@ -7093,7 +7039,7 @@
           <a:p>
             <a:pPr algn="ctr"/>
             <a:r>
-              <a:rPr sz="900" b="1" i="0">
+              <a:rPr sz="800" b="1" i="0">
                 <a:solidFill>
                   <a:srgbClr val="FFFFFF"/>
                 </a:solidFill>
@@ -7111,8 +7057,8 @@
         </p:nvSpPr>
         <p:spPr>
           <a:xfrm>
-            <a:off x="1298448" y="2029967"/>
-            <a:ext cx="3108960" cy="822960"/>
+            <a:off x="1298448" y="2011680"/>
+            <a:ext cx="3108960" cy="804672"/>
           </a:xfrm>
           <a:prstGeom prst="rect">
             <a:avLst/>
@@ -7122,7 +7068,7 @@
           </a:solidFill>
           <a:ln w="10160">
             <a:solidFill>
-              <a:srgbClr val="005555"/>
+              <a:srgbClr val="005050"/>
             </a:solidFill>
           </a:ln>
         </p:spPr>
@@ -7156,8 +7102,8 @@
         </p:nvSpPr>
         <p:spPr>
           <a:xfrm>
-            <a:off x="1389888" y="2212848"/>
-            <a:ext cx="2944368" cy="493776"/>
+            <a:off x="1389888" y="2194560"/>
+            <a:ext cx="2944368" cy="475488"/>
           </a:xfrm>
           <a:prstGeom prst="rect">
             <a:avLst/>
@@ -7172,9 +7118,9 @@
           <a:p>
             <a:pPr algn="l"/>
             <a:r>
-              <a:rPr sz="1100" b="1" i="0">
+              <a:rPr sz="1000" b="1" i="0">
                 <a:solidFill>
-                  <a:srgbClr val="005555"/>
+                  <a:srgbClr val="005050"/>
                 </a:solidFill>
               </a:rPr>
               <a:t>Nommer l'organisation représentée</a:t>
@@ -7190,8 +7136,8 @@
         </p:nvSpPr>
         <p:spPr>
           <a:xfrm>
-            <a:off x="4425696" y="2029967"/>
-            <a:ext cx="7488936" cy="822960"/>
+            <a:off x="4425696" y="2011680"/>
+            <a:ext cx="7488936" cy="804672"/>
           </a:xfrm>
           <a:prstGeom prst="rect">
             <a:avLst/>
@@ -7233,8 +7179,8 @@
         </p:nvSpPr>
         <p:spPr>
           <a:xfrm>
-            <a:off x="4535424" y="2121408"/>
-            <a:ext cx="7296912" cy="658368"/>
+            <a:off x="4535424" y="2103120"/>
+            <a:ext cx="7296912" cy="640080"/>
           </a:xfrm>
           <a:prstGeom prst="rect">
             <a:avLst/>
@@ -7254,8 +7200,7 @@
                   <a:srgbClr val="1A1A1A"/>
                 </a:solidFill>
               </a:rPr>
-              <a:t>'…je vous appelle au nom de l'UNICEF France…'
-Le prospect sait immédiatement qui appelle.</a:t>
+              <a:t>'…je vous appelle au nom de l'UNICEF France…' — le prospect sait immédiatement qui appelle.</a:t>
             </a:r>
           </a:p>
         </p:txBody>
@@ -7268,14 +7213,14 @@
         </p:nvSpPr>
         <p:spPr>
           <a:xfrm>
-            <a:off x="274320" y="2889503"/>
-            <a:ext cx="1005840" cy="822960"/>
+            <a:off x="274320" y="2852928"/>
+            <a:ext cx="1005840" cy="804672"/>
           </a:xfrm>
           <a:prstGeom prst="rect">
             <a:avLst/>
           </a:prstGeom>
           <a:solidFill>
-            <a:srgbClr val="005555"/>
+            <a:srgbClr val="005050"/>
           </a:solidFill>
           <a:ln>
             <a:noFill/>
@@ -7311,8 +7256,8 @@
         </p:nvSpPr>
         <p:spPr>
           <a:xfrm>
-            <a:off x="292608" y="3054096"/>
-            <a:ext cx="969264" cy="493776"/>
+            <a:off x="292608" y="3017520"/>
+            <a:ext cx="969264" cy="475488"/>
           </a:xfrm>
           <a:prstGeom prst="rect">
             <a:avLst/>
@@ -7327,7 +7272,7 @@
           <a:p>
             <a:pPr algn="ctr"/>
             <a:r>
-              <a:rPr sz="900" b="1" i="0">
+              <a:rPr sz="800" b="1" i="0">
                 <a:solidFill>
                   <a:srgbClr val="FFFFFF"/>
                 </a:solidFill>
@@ -7345,8 +7290,8 @@
         </p:nvSpPr>
         <p:spPr>
           <a:xfrm>
-            <a:off x="1298448" y="2889503"/>
-            <a:ext cx="3108960" cy="822960"/>
+            <a:off x="1298448" y="2852928"/>
+            <a:ext cx="3108960" cy="804672"/>
           </a:xfrm>
           <a:prstGeom prst="rect">
             <a:avLst/>
@@ -7356,7 +7301,7 @@
           </a:solidFill>
           <a:ln w="10160">
             <a:solidFill>
-              <a:srgbClr val="005555"/>
+              <a:srgbClr val="005050"/>
             </a:solidFill>
           </a:ln>
         </p:spPr>
@@ -7390,8 +7335,8 @@
         </p:nvSpPr>
         <p:spPr>
           <a:xfrm>
-            <a:off x="1389888" y="3072384"/>
-            <a:ext cx="2944368" cy="493776"/>
+            <a:off x="1389888" y="3035808"/>
+            <a:ext cx="2944368" cy="475488"/>
           </a:xfrm>
           <a:prstGeom prst="rect">
             <a:avLst/>
@@ -7406,9 +7351,9 @@
           <a:p>
             <a:pPr algn="l"/>
             <a:r>
-              <a:rPr sz="1100" b="1" i="0">
+              <a:rPr sz="1000" b="1" i="0">
                 <a:solidFill>
-                  <a:srgbClr val="005555"/>
+                  <a:srgbClr val="005050"/>
                 </a:solidFill>
               </a:rPr>
               <a:t>Annoncer la raison de l'appel</a:t>
@@ -7424,8 +7369,8 @@
         </p:nvSpPr>
         <p:spPr>
           <a:xfrm>
-            <a:off x="4425696" y="2889503"/>
-            <a:ext cx="7488936" cy="822960"/>
+            <a:off x="4425696" y="2852928"/>
+            <a:ext cx="7488936" cy="804672"/>
           </a:xfrm>
           <a:prstGeom prst="rect">
             <a:avLst/>
@@ -7467,8 +7412,8 @@
         </p:nvSpPr>
         <p:spPr>
           <a:xfrm>
-            <a:off x="4535424" y="2980944"/>
-            <a:ext cx="7296912" cy="658368"/>
+            <a:off x="4535424" y="2944368"/>
+            <a:ext cx="7296912" cy="640080"/>
           </a:xfrm>
           <a:prstGeom prst="rect">
             <a:avLst/>
@@ -7488,8 +7433,7 @@
                   <a:srgbClr val="1A1A1A"/>
                 </a:solidFill>
               </a:rPr>
-              <a:t>'…pour vous parler d'une initiative importante pour les enfants…'
-Clarté totale — pas d'ambiguïté sur l'objet de l'appel.</a:t>
+              <a:t>'…pour vous parler d'une initiative importante pour les enfants…' — clarté totale sur l'objet de l'appel.</a:t>
             </a:r>
           </a:p>
         </p:txBody>
@@ -7502,14 +7446,14 @@
         </p:nvSpPr>
         <p:spPr>
           <a:xfrm>
-            <a:off x="274320" y="3749039"/>
-            <a:ext cx="1005840" cy="822960"/>
+            <a:off x="274320" y="3694176"/>
+            <a:ext cx="1005840" cy="804672"/>
           </a:xfrm>
           <a:prstGeom prst="rect">
             <a:avLst/>
           </a:prstGeom>
           <a:solidFill>
-            <a:srgbClr val="005555"/>
+            <a:srgbClr val="005050"/>
           </a:solidFill>
           <a:ln>
             <a:noFill/>
@@ -7545,8 +7489,8 @@
         </p:nvSpPr>
         <p:spPr>
           <a:xfrm>
-            <a:off x="292608" y="3913631"/>
-            <a:ext cx="969264" cy="493776"/>
+            <a:off x="292608" y="3858768"/>
+            <a:ext cx="969264" cy="475488"/>
           </a:xfrm>
           <a:prstGeom prst="rect">
             <a:avLst/>
@@ -7561,7 +7505,7 @@
           <a:p>
             <a:pPr algn="ctr"/>
             <a:r>
-              <a:rPr sz="900" b="1" i="0">
+              <a:rPr sz="800" b="1" i="0">
                 <a:solidFill>
                   <a:srgbClr val="FFFFFF"/>
                 </a:solidFill>
@@ -7579,8 +7523,8 @@
         </p:nvSpPr>
         <p:spPr>
           <a:xfrm>
-            <a:off x="1298448" y="3749039"/>
-            <a:ext cx="3108960" cy="822960"/>
+            <a:off x="1298448" y="3694176"/>
+            <a:ext cx="3108960" cy="804672"/>
           </a:xfrm>
           <a:prstGeom prst="rect">
             <a:avLst/>
@@ -7590,7 +7534,7 @@
           </a:solidFill>
           <a:ln w="10160">
             <a:solidFill>
-              <a:srgbClr val="005555"/>
+              <a:srgbClr val="005050"/>
             </a:solidFill>
           </a:ln>
         </p:spPr>
@@ -7624,8 +7568,8 @@
         </p:nvSpPr>
         <p:spPr>
           <a:xfrm>
-            <a:off x="1389888" y="3931920"/>
-            <a:ext cx="2944368" cy="493776"/>
+            <a:off x="1389888" y="3877056"/>
+            <a:ext cx="2944368" cy="475488"/>
           </a:xfrm>
           <a:prstGeom prst="rect">
             <a:avLst/>
@@ -7640,9 +7584,9 @@
           <a:p>
             <a:pPr algn="l"/>
             <a:r>
-              <a:rPr sz="1100" b="1" i="0">
+              <a:rPr sz="1000" b="1" i="0">
                 <a:solidFill>
-                  <a:srgbClr val="005555"/>
+                  <a:srgbClr val="005050"/>
                 </a:solidFill>
               </a:rPr>
               <a:t>Vérifier la disponibilité du prospect</a:t>
@@ -7658,8 +7602,8 @@
         </p:nvSpPr>
         <p:spPr>
           <a:xfrm>
-            <a:off x="4425696" y="3749039"/>
-            <a:ext cx="7488936" cy="822960"/>
+            <a:off x="4425696" y="3694176"/>
+            <a:ext cx="7488936" cy="804672"/>
           </a:xfrm>
           <a:prstGeom prst="rect">
             <a:avLst/>
@@ -7701,8 +7645,8 @@
         </p:nvSpPr>
         <p:spPr>
           <a:xfrm>
-            <a:off x="4535424" y="3840479"/>
-            <a:ext cx="7296912" cy="658368"/>
+            <a:off x="4535424" y="3785615"/>
+            <a:ext cx="7296912" cy="640080"/>
           </a:xfrm>
           <a:prstGeom prst="rect">
             <a:avLst/>
@@ -7722,8 +7666,7 @@
                   <a:srgbClr val="1A1A1A"/>
                 </a:solidFill>
               </a:rPr>
-              <a:t>'Est-ce que vous avez quelques minutes ?'
-Respect de l'interlocuteur — condition d'un échange de qualité.</a:t>
+              <a:t>'Est-ce que vous avez quelques minutes ?' — respect de l'interlocuteur.</a:t>
             </a:r>
           </a:p>
         </p:txBody>
@@ -7736,14 +7679,14 @@
         </p:nvSpPr>
         <p:spPr>
           <a:xfrm>
-            <a:off x="274320" y="4608575"/>
-            <a:ext cx="1005840" cy="822960"/>
+            <a:off x="274320" y="4535424"/>
+            <a:ext cx="1005840" cy="804672"/>
           </a:xfrm>
           <a:prstGeom prst="rect">
             <a:avLst/>
           </a:prstGeom>
           <a:solidFill>
-            <a:srgbClr val="005555"/>
+            <a:srgbClr val="005050"/>
           </a:solidFill>
           <a:ln>
             <a:noFill/>
@@ -7779,8 +7722,8 @@
         </p:nvSpPr>
         <p:spPr>
           <a:xfrm>
-            <a:off x="292608" y="4773167"/>
-            <a:ext cx="969264" cy="493776"/>
+            <a:off x="292608" y="4700016"/>
+            <a:ext cx="969264" cy="475488"/>
           </a:xfrm>
           <a:prstGeom prst="rect">
             <a:avLst/>
@@ -7795,7 +7738,7 @@
           <a:p>
             <a:pPr algn="ctr"/>
             <a:r>
-              <a:rPr sz="900" b="1" i="0">
+              <a:rPr sz="800" b="1" i="0">
                 <a:solidFill>
                   <a:srgbClr val="FFFFFF"/>
                 </a:solidFill>
@@ -7813,8 +7756,8 @@
         </p:nvSpPr>
         <p:spPr>
           <a:xfrm>
-            <a:off x="1298448" y="4608575"/>
-            <a:ext cx="3108960" cy="822960"/>
+            <a:off x="1298448" y="4535424"/>
+            <a:ext cx="3108960" cy="804672"/>
           </a:xfrm>
           <a:prstGeom prst="rect">
             <a:avLst/>
@@ -7824,7 +7767,7 @@
           </a:solidFill>
           <a:ln w="10160">
             <a:solidFill>
-              <a:srgbClr val="005555"/>
+              <a:srgbClr val="005050"/>
             </a:solidFill>
           </a:ln>
         </p:spPr>
@@ -7858,8 +7801,8 @@
         </p:nvSpPr>
         <p:spPr>
           <a:xfrm>
-            <a:off x="1389888" y="4791455"/>
-            <a:ext cx="2944368" cy="493776"/>
+            <a:off x="1389888" y="4718304"/>
+            <a:ext cx="2944368" cy="475488"/>
           </a:xfrm>
           <a:prstGeom prst="rect">
             <a:avLst/>
@@ -7874,9 +7817,9 @@
           <a:p>
             <a:pPr algn="l"/>
             <a:r>
-              <a:rPr sz="1100" b="1" i="0">
+              <a:rPr sz="1000" b="1" i="0">
                 <a:solidFill>
-                  <a:srgbClr val="005555"/>
+                  <a:srgbClr val="005050"/>
                 </a:solidFill>
               </a:rPr>
               <a:t>Adopter un ton chaleureux et naturel</a:t>
@@ -7892,8 +7835,8 @@
         </p:nvSpPr>
         <p:spPr>
           <a:xfrm>
-            <a:off x="4425696" y="4608575"/>
-            <a:ext cx="7488936" cy="822960"/>
+            <a:off x="4425696" y="4535424"/>
+            <a:ext cx="7488936" cy="804672"/>
           </a:xfrm>
           <a:prstGeom prst="rect">
             <a:avLst/>
@@ -7935,8 +7878,8 @@
         </p:nvSpPr>
         <p:spPr>
           <a:xfrm>
-            <a:off x="4535424" y="4700015"/>
-            <a:ext cx="7296912" cy="658368"/>
+            <a:off x="4535424" y="4626864"/>
+            <a:ext cx="7296912" cy="640080"/>
           </a:xfrm>
           <a:prstGeom prst="rect">
             <a:avLst/>
@@ -7956,8 +7899,7 @@
                   <a:srgbClr val="1A1A1A"/>
                 </a:solidFill>
               </a:rPr>
-              <a:t>Sourire audible · Débit posé · Articulation claire
-Le ton est aussi important que les mots — souvent plus.</a:t>
+              <a:t>Sourire audible · Débit posé · Articulation claire — le ton est aussi important que les mots.</a:t>
             </a:r>
           </a:p>
         </p:txBody>
@@ -7970,7 +7912,7 @@
         </p:nvSpPr>
         <p:spPr>
           <a:xfrm>
-            <a:off x="274320" y="5468112"/>
+            <a:off x="274320" y="5376672"/>
             <a:ext cx="11640312" cy="402336"/>
           </a:xfrm>
           <a:prstGeom prst="rect">
@@ -8013,7 +7955,7 @@
         </p:nvSpPr>
         <p:spPr>
           <a:xfrm>
-            <a:off x="411479" y="5541264"/>
+            <a:off x="411479" y="5449824"/>
             <a:ext cx="11365992" cy="256032"/>
           </a:xfrm>
           <a:prstGeom prst="rect">
@@ -8034,7 +7976,459 @@
                   <a:srgbClr val="FFFFFF"/>
                 </a:solidFill>
               </a:rPr>
-              <a:t>Ces 5 règles sont vérifiées par la grille d'évaluation FIDELIS. Un appel qui viole l'une d'elles est disqualifié dans la nomenclature.</a:t>
+              <a:t>Un appel qui viole une de ces 5 règles est disqualifié dans la nomenclature FIDELIS.</a:t>
+            </a:r>
+          </a:p>
+        </p:txBody>
+      </p:sp>
+    </p:spTree>
+  </p:cSld>
+  <p:clrMapOvr>
+    <a:masterClrMapping/>
+  </p:clrMapOvr>
+</p:sld>
+</file>
+
+<file path=ppt/slides/slide5.xml><?xml version="1.0" encoding="utf-8"?>
+<p:sld xmlns:a="http://schemas.openxmlformats.org/drawingml/2006/main" xmlns:p="http://schemas.openxmlformats.org/presentationml/2006/main" xmlns:r="http://schemas.openxmlformats.org/officeDocument/2006/relationships">
+  <p:cSld>
+    <p:spTree>
+      <p:nvGrpSpPr>
+        <p:cNvPr id="1" name=""/>
+        <p:cNvGrpSpPr/>
+        <p:nvPr/>
+      </p:nvGrpSpPr>
+      <p:grpSpPr/>
+      <p:sp>
+        <p:nvSpPr>
+          <p:cNvPr id="2" name="Rectangle 1"/>
+          <p:cNvSpPr/>
+          <p:nvPr/>
+        </p:nvSpPr>
+        <p:spPr>
+          <a:xfrm>
+            <a:off x="0" y="0"/>
+            <a:ext cx="12188952" cy="6858000"/>
+          </a:xfrm>
+          <a:prstGeom prst="rect">
+            <a:avLst/>
+          </a:prstGeom>
+          <a:solidFill>
+            <a:srgbClr val="005050"/>
+          </a:solidFill>
+          <a:ln>
+            <a:noFill/>
+          </a:ln>
+        </p:spPr>
+        <p:style>
+          <a:lnRef idx="1">
+            <a:schemeClr val="accent1"/>
+          </a:lnRef>
+          <a:fillRef idx="3">
+            <a:schemeClr val="accent1"/>
+          </a:fillRef>
+          <a:effectRef idx="2">
+            <a:schemeClr val="accent1"/>
+          </a:effectRef>
+          <a:fontRef idx="minor">
+            <a:schemeClr val="lt1"/>
+          </a:fontRef>
+        </p:style>
+        <p:txBody>
+          <a:bodyPr rtlCol="0" anchor="ctr"/>
+          <a:lstStyle/>
+          <a:p>
+            <a:pPr algn="ctr"/>
+          </a:p>
+        </p:txBody>
+      </p:sp>
+      <p:sp>
+        <p:nvSpPr>
+          <p:cNvPr id="3" name="Rectangle 2"/>
+          <p:cNvSpPr/>
+          <p:nvPr/>
+        </p:nvSpPr>
+        <p:spPr>
+          <a:xfrm>
+            <a:off x="0" y="0"/>
+            <a:ext cx="12188952" cy="73152"/>
+          </a:xfrm>
+          <a:prstGeom prst="rect">
+            <a:avLst/>
+          </a:prstGeom>
+          <a:solidFill>
+            <a:srgbClr val="00AAAA"/>
+          </a:solidFill>
+          <a:ln>
+            <a:noFill/>
+          </a:ln>
+        </p:spPr>
+        <p:style>
+          <a:lnRef idx="1">
+            <a:schemeClr val="accent1"/>
+          </a:lnRef>
+          <a:fillRef idx="3">
+            <a:schemeClr val="accent1"/>
+          </a:fillRef>
+          <a:effectRef idx="2">
+            <a:schemeClr val="accent1"/>
+          </a:effectRef>
+          <a:fontRef idx="minor">
+            <a:schemeClr val="lt1"/>
+          </a:fontRef>
+        </p:style>
+        <p:txBody>
+          <a:bodyPr rtlCol="0" anchor="ctr"/>
+          <a:lstStyle/>
+          <a:p>
+            <a:pPr algn="ctr"/>
+          </a:p>
+        </p:txBody>
+      </p:sp>
+      <p:sp>
+        <p:nvSpPr>
+          <p:cNvPr id="4" name="Rectangle 3"/>
+          <p:cNvSpPr/>
+          <p:nvPr/>
+        </p:nvSpPr>
+        <p:spPr>
+          <a:xfrm>
+            <a:off x="0" y="6784848"/>
+            <a:ext cx="12188952" cy="73152"/>
+          </a:xfrm>
+          <a:prstGeom prst="rect">
+            <a:avLst/>
+          </a:prstGeom>
+          <a:solidFill>
+            <a:srgbClr val="00AAAA"/>
+          </a:solidFill>
+          <a:ln>
+            <a:noFill/>
+          </a:ln>
+        </p:spPr>
+        <p:style>
+          <a:lnRef idx="1">
+            <a:schemeClr val="accent1"/>
+          </a:lnRef>
+          <a:fillRef idx="3">
+            <a:schemeClr val="accent1"/>
+          </a:fillRef>
+          <a:effectRef idx="2">
+            <a:schemeClr val="accent1"/>
+          </a:effectRef>
+          <a:fontRef idx="minor">
+            <a:schemeClr val="lt1"/>
+          </a:fontRef>
+        </p:style>
+        <p:txBody>
+          <a:bodyPr rtlCol="0" anchor="ctr"/>
+          <a:lstStyle/>
+          <a:p>
+            <a:pPr algn="ctr"/>
+          </a:p>
+        </p:txBody>
+      </p:sp>
+      <p:sp>
+        <p:nvSpPr>
+          <p:cNvPr id="5" name="Oval 4"/>
+          <p:cNvSpPr/>
+          <p:nvPr/>
+        </p:nvSpPr>
+        <p:spPr>
+          <a:xfrm>
+            <a:off x="4114800" y="1097280"/>
+            <a:ext cx="3931920" cy="3931920"/>
+          </a:xfrm>
+          <a:prstGeom prst="ellipse">
+            <a:avLst/>
+          </a:prstGeom>
+          <a:solidFill>
+            <a:srgbClr val="006A6A"/>
+          </a:solidFill>
+          <a:ln>
+            <a:noFill/>
+          </a:ln>
+        </p:spPr>
+        <p:style>
+          <a:lnRef idx="1">
+            <a:schemeClr val="accent1"/>
+          </a:lnRef>
+          <a:fillRef idx="3">
+            <a:schemeClr val="accent1"/>
+          </a:fillRef>
+          <a:effectRef idx="2">
+            <a:schemeClr val="accent1"/>
+          </a:effectRef>
+          <a:fontRef idx="minor">
+            <a:schemeClr val="lt1"/>
+          </a:fontRef>
+        </p:style>
+        <p:txBody>
+          <a:bodyPr rtlCol="0" anchor="ctr"/>
+          <a:lstStyle/>
+          <a:p>
+            <a:pPr algn="ctr"/>
+          </a:p>
+        </p:txBody>
+      </p:sp>
+      <p:sp>
+        <p:nvSpPr>
+          <p:cNvPr id="6" name="TextBox 5"/>
+          <p:cNvSpPr txBox="1"/>
+          <p:nvPr/>
+        </p:nvSpPr>
+        <p:spPr>
+          <a:xfrm>
+            <a:off x="5029200" y="2011680"/>
+            <a:ext cx="2103120" cy="1371600"/>
+          </a:xfrm>
+          <a:prstGeom prst="rect">
+            <a:avLst/>
+          </a:prstGeom>
+          <a:noFill/>
+        </p:spPr>
+        <p:txBody>
+          <a:bodyPr wrap="square">
+            <a:spAutoFit/>
+          </a:bodyPr>
+          <a:lstStyle/>
+          <a:p>
+            <a:pPr algn="ctr"/>
+            <a:r>
+              <a:rPr sz="4800" b="0" i="0">
+                <a:solidFill>
+                  <a:srgbClr val="FFFFFF"/>
+                </a:solidFill>
+              </a:rPr>
+              <a:t>🙏</a:t>
+            </a:r>
+          </a:p>
+        </p:txBody>
+      </p:sp>
+      <p:sp>
+        <p:nvSpPr>
+          <p:cNvPr id="7" name="TextBox 6"/>
+          <p:cNvSpPr txBox="1"/>
+          <p:nvPr/>
+        </p:nvSpPr>
+        <p:spPr>
+          <a:xfrm>
+            <a:off x="1371600" y="1280160"/>
+            <a:ext cx="9418320" cy="1097280"/>
+          </a:xfrm>
+          <a:prstGeom prst="rect">
+            <a:avLst/>
+          </a:prstGeom>
+          <a:noFill/>
+        </p:spPr>
+        <p:txBody>
+          <a:bodyPr wrap="square">
+            <a:spAutoFit/>
+          </a:bodyPr>
+          <a:lstStyle/>
+          <a:p>
+            <a:pPr algn="ctr"/>
+            <a:r>
+              <a:rPr sz="4600" b="1" i="0">
+                <a:solidFill>
+                  <a:srgbClr val="FFFFFF"/>
+                </a:solidFill>
+              </a:rPr>
+              <a:t>Merci à Tous !</a:t>
+            </a:r>
+          </a:p>
+        </p:txBody>
+      </p:sp>
+      <p:sp>
+        <p:nvSpPr>
+          <p:cNvPr id="8" name="TextBox 7"/>
+          <p:cNvSpPr txBox="1"/>
+          <p:nvPr/>
+        </p:nvSpPr>
+        <p:spPr>
+          <a:xfrm>
+            <a:off x="1371600" y="2606040"/>
+            <a:ext cx="9418320" cy="548640"/>
+          </a:xfrm>
+          <a:prstGeom prst="rect">
+            <a:avLst/>
+          </a:prstGeom>
+          <a:noFill/>
+        </p:spPr>
+        <p:txBody>
+          <a:bodyPr wrap="square">
+            <a:spAutoFit/>
+          </a:bodyPr>
+          <a:lstStyle/>
+          <a:p>
+            <a:pPr algn="ctr"/>
+            <a:r>
+              <a:rPr sz="1800" b="0" i="1">
+                <a:solidFill>
+                  <a:srgbClr val="CCEEEE"/>
+                </a:solidFill>
+              </a:rPr>
+              <a:t>Votre engagement fait la différence pour les enfants du monde entier.</a:t>
+            </a:r>
+          </a:p>
+        </p:txBody>
+      </p:sp>
+      <p:sp>
+        <p:nvSpPr>
+          <p:cNvPr id="9" name="TextBox 8"/>
+          <p:cNvSpPr txBox="1"/>
+          <p:nvPr/>
+        </p:nvSpPr>
+        <p:spPr>
+          <a:xfrm>
+            <a:off x="1371600" y="3246120"/>
+            <a:ext cx="9418320" cy="347472"/>
+          </a:xfrm>
+          <a:prstGeom prst="rect">
+            <a:avLst/>
+          </a:prstGeom>
+          <a:noFill/>
+        </p:spPr>
+        <p:txBody>
+          <a:bodyPr wrap="square">
+            <a:spAutoFit/>
+          </a:bodyPr>
+          <a:lstStyle/>
+          <a:p>
+            <a:pPr algn="ctr"/>
+            <a:r>
+              <a:rPr sz="1200" b="0" i="0">
+                <a:solidFill>
+                  <a:srgbClr val="88DDDD"/>
+                </a:solidFill>
+              </a:rPr>
+              <a:t>BOOK J3  ·  Journée 3  ·  Script UNICEF × FIDELIS</a:t>
+            </a:r>
+          </a:p>
+        </p:txBody>
+      </p:sp>
+      <p:sp>
+        <p:nvSpPr>
+          <p:cNvPr id="10" name="TextBox 9"/>
+          <p:cNvSpPr txBox="1"/>
+          <p:nvPr/>
+        </p:nvSpPr>
+        <p:spPr>
+          <a:xfrm>
+            <a:off x="1828800" y="3749039"/>
+            <a:ext cx="8531352" cy="457200"/>
+          </a:xfrm>
+          <a:prstGeom prst="rect">
+            <a:avLst/>
+          </a:prstGeom>
+          <a:noFill/>
+        </p:spPr>
+        <p:txBody>
+          <a:bodyPr wrap="square">
+            <a:spAutoFit/>
+          </a:bodyPr>
+          <a:lstStyle/>
+          <a:p>
+            <a:pPr algn="ctr"/>
+            <a:r>
+              <a:rPr sz="1400" b="0" i="1">
+                <a:solidFill>
+                  <a:srgbClr val="AADDDD"/>
+                </a:solidFill>
+              </a:rPr>
+              <a:t>« Le refus d'aujourd'hui peut être le don de demain »</a:t>
+            </a:r>
+          </a:p>
+        </p:txBody>
+      </p:sp>
+      <p:sp>
+        <p:nvSpPr>
+          <p:cNvPr id="11" name="TextBox 10"/>
+          <p:cNvSpPr txBox="1"/>
+          <p:nvPr/>
+        </p:nvSpPr>
+        <p:spPr>
+          <a:xfrm>
+            <a:off x="0" y="4572000"/>
+            <a:ext cx="12188952" cy="329184"/>
+          </a:xfrm>
+          <a:prstGeom prst="rect">
+            <a:avLst/>
+          </a:prstGeom>
+          <a:noFill/>
+        </p:spPr>
+        <p:txBody>
+          <a:bodyPr wrap="square">
+            <a:spAutoFit/>
+          </a:bodyPr>
+          <a:lstStyle/>
+          <a:p>
+            <a:pPr algn="ctr"/>
+            <a:r>
+              <a:rPr sz="1000" b="0" i="0">
+                <a:solidFill>
+                  <a:srgbClr val="88DDDD"/>
+                </a:solidFill>
+              </a:rPr>
+              <a:t>SHY-Performance  ·  Formation FIM  ·  UNICEF France  ·  V6-01062026SHY-TE</a:t>
+            </a:r>
+          </a:p>
+        </p:txBody>
+      </p:sp>
+      <p:pic>
+        <p:nvPicPr>
+          <p:cNvPr id="12" name="Picture 11" descr="shy_logo_v2.png"/>
+          <p:cNvPicPr>
+            <a:picLocks noChangeAspect="1"/>
+          </p:cNvPicPr>
+          <p:nvPr/>
+        </p:nvPicPr>
+        <p:blipFill>
+          <a:blip r:embed="rId2"/>
+          <a:stretch>
+            <a:fillRect/>
+          </a:stretch>
+        </p:blipFill>
+        <p:spPr>
+          <a:xfrm>
+            <a:off x="5669280" y="5120640"/>
+            <a:ext cx="914400" cy="896112"/>
+          </a:xfrm>
+          <a:prstGeom prst="rect">
+            <a:avLst/>
+          </a:prstGeom>
+        </p:spPr>
+      </p:pic>
+      <p:sp>
+        <p:nvSpPr>
+          <p:cNvPr id="13" name="TextBox 12"/>
+          <p:cNvSpPr txBox="1"/>
+          <p:nvPr/>
+        </p:nvSpPr>
+        <p:spPr>
+          <a:xfrm>
+            <a:off x="0" y="6035040"/>
+            <a:ext cx="12188952" cy="329184"/>
+          </a:xfrm>
+          <a:prstGeom prst="rect">
+            <a:avLst/>
+          </a:prstGeom>
+          <a:noFill/>
+        </p:spPr>
+        <p:txBody>
+          <a:bodyPr wrap="square">
+            <a:spAutoFit/>
+          </a:bodyPr>
+          <a:lstStyle/>
+          <a:p>
+            <a:pPr algn="ctr"/>
+            <a:r>
+              <a:rPr sz="1000" b="1" i="0">
+                <a:solidFill>
+                  <a:srgbClr val="FFFFFF"/>
+                </a:solidFill>
+              </a:rPr>
+              <a:t>SHY-Performance  ×  FIDELIS  ×  UNICEF France</a:t>
             </a:r>
           </a:p>
         </p:txBody>
